--- a/Cobook_org_final.pptx
+++ b/Cobook_org_final.pptx
@@ -5,22 +5,23 @@
     <p:sldMasterId id="2147483660" r:id="rId1"/>
   </p:sldMasterIdLst>
   <p:notesMasterIdLst>
-    <p:notesMasterId r:id="rId5"/>
+    <p:notesMasterId r:id="rId16"/>
   </p:notesMasterIdLst>
   <p:sldIdLst>
     <p:sldId id="256" r:id="rId2"/>
     <p:sldId id="257" r:id="rId3"/>
     <p:sldId id="258" r:id="rId4"/>
-    <p:sldId id="259" r:id="rId10"/>
-    <p:sldId id="260" r:id="rId11"/>
-    <p:sldId id="261" r:id="rId12"/>
-    <p:sldId id="262" r:id="rId13"/>
-    <p:sldId id="263" r:id="rId14"/>
-    <p:sldId id="264" r:id="rId15"/>
-    <p:sldId id="265" r:id="rId16"/>
-    <p:sldId id="266" r:id="rId17"/>
-    <p:sldId id="267" r:id="rId18"/>
-    <p:sldId id="268" r:id="rId19"/>
+    <p:sldId id="269" r:id="rId5"/>
+    <p:sldId id="270" r:id="rId6"/>
+    <p:sldId id="259" r:id="rId7"/>
+    <p:sldId id="260" r:id="rId8"/>
+    <p:sldId id="261" r:id="rId9"/>
+    <p:sldId id="262" r:id="rId10"/>
+    <p:sldId id="263" r:id="rId11"/>
+    <p:sldId id="264" r:id="rId12"/>
+    <p:sldId id="265" r:id="rId13"/>
+    <p:sldId id="266" r:id="rId14"/>
+    <p:sldId id="268" r:id="rId15"/>
   </p:sldIdLst>
   <p:sldSz cx="12192000" cy="6858000"/>
   <p:notesSz cx="6858000" cy="9144000"/>
@@ -119,6 +120,11 @@
       </a:defRPr>
     </a:lvl9pPr>
   </p:defaultTextStyle>
+  <p:extLst>
+    <p:ext uri="{EFAFB233-063F-42B5-8137-9DF3F51BA10A}">
+      <p15:sldGuideLst xmlns:p15="http://schemas.microsoft.com/office/powerpoint/2012/main"/>
+    </p:ext>
+  </p:extLst>
 </p:presentation>
 </file>
 
@@ -21115,7 +21121,7 @@
 </file>
 
 <file path=ppt/slides/slide10.xml><?xml version="1.0" encoding="utf-8"?>
-<p:sld xmlns:a="http://schemas.openxmlformats.org/drawingml/2006/main" xmlns:p="http://schemas.openxmlformats.org/presentationml/2006/main" xmlns:r="http://schemas.openxmlformats.org/officeDocument/2006/relationships">
+<p:sld xmlns:a="http://schemas.openxmlformats.org/drawingml/2006/main" xmlns:r="http://schemas.openxmlformats.org/officeDocument/2006/relationships" xmlns:p="http://schemas.openxmlformats.org/presentationml/2006/main">
   <p:cSld>
     <p:spTree>
       <p:nvGrpSpPr>
@@ -21123,7 +21129,14 @@
         <p:cNvGrpSpPr/>
         <p:nvPr/>
       </p:nvGrpSpPr>
-      <p:grpSpPr/>
+      <p:grpSpPr>
+        <a:xfrm>
+          <a:off x="0" y="0"/>
+          <a:ext cx="0" cy="0"/>
+          <a:chOff x="0" y="0"/>
+          <a:chExt cx="0" cy="0"/>
+        </a:xfrm>
+      </p:grpSpPr>
       <p:sp>
         <p:nvSpPr>
           <p:cNvPr id="2" name="Title 1"/>
@@ -21140,6 +21153,1751 @@
           <a:lstStyle/>
           <a:p>
             <a:r>
+              <a:rPr lang="fr-FR" noProof="0" dirty="0"/>
+              <a:t>Pipeline d'Inférence (Recommandation)</a:t>
+            </a:r>
+          </a:p>
+        </p:txBody>
+      </p:sp>
+      <p:sp>
+        <p:nvSpPr>
+          <p:cNvPr id="3" name="Rounded Rectangle 2"/>
+          <p:cNvSpPr/>
+          <p:nvPr/>
+        </p:nvSpPr>
+        <p:spPr>
+          <a:xfrm>
+            <a:off x="365760" y="1828800"/>
+            <a:ext cx="2468880" cy="2011680"/>
+          </a:xfrm>
+          <a:prstGeom prst="roundRect">
+            <a:avLst/>
+          </a:prstGeom>
+          <a:solidFill>
+            <a:srgbClr val="4472C4"/>
+          </a:solidFill>
+          <a:ln>
+            <a:noFill/>
+          </a:ln>
+        </p:spPr>
+        <p:style>
+          <a:lnRef idx="1">
+            <a:schemeClr val="accent1"/>
+          </a:lnRef>
+          <a:fillRef idx="3">
+            <a:schemeClr val="accent1"/>
+          </a:fillRef>
+          <a:effectRef idx="2">
+            <a:schemeClr val="accent1"/>
+          </a:effectRef>
+          <a:fontRef idx="minor">
+            <a:schemeClr val="lt1"/>
+          </a:fontRef>
+        </p:style>
+        <p:txBody>
+          <a:bodyPr wrap="square" rtlCol="0" anchor="ctr"/>
+          <a:lstStyle/>
+          <a:p>
+            <a:pPr algn="ctr">
+              <a:spcBef>
+                <a:spcPts val="0"/>
+              </a:spcBef>
+              <a:spcAft>
+                <a:spcPts val="600"/>
+              </a:spcAft>
+              <a:defRPr sz="1400" b="1">
+                <a:solidFill>
+                  <a:srgbClr val="FFFFFF"/>
+                </a:solidFill>
+                <a:latin typeface="Calibri"/>
+              </a:defRPr>
+            </a:pPr>
+            <a:r>
+              <a:rPr lang="fr-FR" noProof="0" dirty="0">
+                <a:solidFill>
+                  <a:srgbClr val="FFFFFF"/>
+                </a:solidFill>
+              </a:rPr>
+              <a:t>Étape 1</a:t>
+            </a:r>
+            <a:br>
+              <a:rPr lang="fr-FR" noProof="0" dirty="0"/>
+            </a:br>
+            <a:r>
+              <a:rPr lang="fr-FR" noProof="0" dirty="0">
+                <a:solidFill>
+                  <a:srgbClr val="FFFFFF"/>
+                </a:solidFill>
+              </a:rPr>
+              <a:t>Construction</a:t>
+            </a:r>
+          </a:p>
+          <a:p>
+            <a:pPr algn="ctr">
+              <a:defRPr sz="1100">
+                <a:solidFill>
+                  <a:srgbClr val="FFFFFF"/>
+                </a:solidFill>
+                <a:latin typeface="Calibri"/>
+              </a:defRPr>
+            </a:pPr>
+            <a:r>
+              <a:rPr lang="fr-FR" noProof="0" dirty="0">
+                <a:solidFill>
+                  <a:srgbClr val="FFFFFF"/>
+                </a:solidFill>
+              </a:rPr>
+              <a:t>Répliquer </a:t>
+            </a:r>
+            <a:r>
+              <a:rPr lang="fr-FR" noProof="0" dirty="0" err="1">
+                <a:solidFill>
+                  <a:srgbClr val="FFFFFF"/>
+                </a:solidFill>
+              </a:rPr>
+              <a:t>user_idx</a:t>
+            </a:r>
+            <a:endParaRPr lang="fr-FR" noProof="0" dirty="0"/>
+          </a:p>
+          <a:p>
+            <a:pPr algn="ctr">
+              <a:defRPr sz="1100">
+                <a:solidFill>
+                  <a:srgbClr val="FFFFFF"/>
+                </a:solidFill>
+                <a:latin typeface="Calibri"/>
+              </a:defRPr>
+            </a:pPr>
+            <a:r>
+              <a:rPr lang="fr-FR" noProof="0" dirty="0">
+                <a:solidFill>
+                  <a:srgbClr val="FFFFFF"/>
+                </a:solidFill>
+              </a:rPr>
+              <a:t>N fois, pairer</a:t>
+            </a:r>
+          </a:p>
+          <a:p>
+            <a:pPr algn="ctr">
+              <a:defRPr sz="1100">
+                <a:solidFill>
+                  <a:srgbClr val="FFFFFF"/>
+                </a:solidFill>
+                <a:latin typeface="Calibri"/>
+              </a:defRPr>
+            </a:pPr>
+            <a:r>
+              <a:rPr lang="fr-FR" noProof="0" dirty="0">
+                <a:solidFill>
+                  <a:srgbClr val="FFFFFF"/>
+                </a:solidFill>
+              </a:rPr>
+              <a:t>avec tous les items</a:t>
+            </a:r>
+          </a:p>
+          <a:p>
+            <a:pPr algn="ctr">
+              <a:defRPr sz="1100">
+                <a:solidFill>
+                  <a:srgbClr val="FFFFFF"/>
+                </a:solidFill>
+                <a:latin typeface="Calibri"/>
+              </a:defRPr>
+            </a:pPr>
+            <a:r>
+              <a:rPr lang="fr-FR" noProof="0" dirty="0">
+                <a:solidFill>
+                  <a:srgbClr val="FFFFFF"/>
+                </a:solidFill>
+              </a:rPr>
+              <a:t>→ tenseur [N, 2]</a:t>
+            </a:r>
+          </a:p>
+        </p:txBody>
+      </p:sp>
+      <p:sp>
+        <p:nvSpPr>
+          <p:cNvPr id="4" name="Right Arrow 3"/>
+          <p:cNvSpPr/>
+          <p:nvPr/>
+        </p:nvSpPr>
+        <p:spPr>
+          <a:xfrm>
+            <a:off x="2880360" y="2724912"/>
+            <a:ext cx="365760" cy="228600"/>
+          </a:xfrm>
+          <a:prstGeom prst="rightArrow">
+            <a:avLst/>
+          </a:prstGeom>
+          <a:solidFill>
+            <a:srgbClr val="AAAAAA"/>
+          </a:solidFill>
+          <a:ln>
+            <a:noFill/>
+          </a:ln>
+        </p:spPr>
+        <p:style>
+          <a:lnRef idx="1">
+            <a:schemeClr val="accent1"/>
+          </a:lnRef>
+          <a:fillRef idx="3">
+            <a:schemeClr val="accent1"/>
+          </a:fillRef>
+          <a:effectRef idx="2">
+            <a:schemeClr val="accent1"/>
+          </a:effectRef>
+          <a:fontRef idx="minor">
+            <a:schemeClr val="lt1"/>
+          </a:fontRef>
+        </p:style>
+        <p:txBody>
+          <a:bodyPr rtlCol="0" anchor="ctr"/>
+          <a:lstStyle/>
+          <a:p>
+            <a:pPr algn="ctr"/>
+            <a:endParaRPr lang="fr-FR" noProof="0" dirty="0"/>
+          </a:p>
+        </p:txBody>
+      </p:sp>
+      <p:sp>
+        <p:nvSpPr>
+          <p:cNvPr id="5" name="Rounded Rectangle 4"/>
+          <p:cNvSpPr/>
+          <p:nvPr/>
+        </p:nvSpPr>
+        <p:spPr>
+          <a:xfrm>
+            <a:off x="3291840" y="1828800"/>
+            <a:ext cx="2468880" cy="2011680"/>
+          </a:xfrm>
+          <a:prstGeom prst="roundRect">
+            <a:avLst/>
+          </a:prstGeom>
+          <a:solidFill>
+            <a:srgbClr val="ED7D31"/>
+          </a:solidFill>
+          <a:ln>
+            <a:noFill/>
+          </a:ln>
+        </p:spPr>
+        <p:style>
+          <a:lnRef idx="1">
+            <a:schemeClr val="accent1"/>
+          </a:lnRef>
+          <a:fillRef idx="3">
+            <a:schemeClr val="accent1"/>
+          </a:fillRef>
+          <a:effectRef idx="2">
+            <a:schemeClr val="accent1"/>
+          </a:effectRef>
+          <a:fontRef idx="minor">
+            <a:schemeClr val="lt1"/>
+          </a:fontRef>
+        </p:style>
+        <p:txBody>
+          <a:bodyPr wrap="square" rtlCol="0" anchor="ctr"/>
+          <a:lstStyle/>
+          <a:p>
+            <a:pPr algn="ctr">
+              <a:spcBef>
+                <a:spcPts val="0"/>
+              </a:spcBef>
+              <a:spcAft>
+                <a:spcPts val="600"/>
+              </a:spcAft>
+              <a:defRPr sz="1400" b="1">
+                <a:solidFill>
+                  <a:srgbClr val="FFFFFF"/>
+                </a:solidFill>
+                <a:latin typeface="Calibri"/>
+              </a:defRPr>
+            </a:pPr>
+            <a:r>
+              <a:rPr lang="fr-FR" noProof="0" dirty="0">
+                <a:solidFill>
+                  <a:srgbClr val="FFFFFF"/>
+                </a:solidFill>
+              </a:rPr>
+              <a:t>Étape 2</a:t>
+            </a:r>
+            <a:br>
+              <a:rPr lang="fr-FR" noProof="0" dirty="0"/>
+            </a:br>
+            <a:r>
+              <a:rPr lang="fr-FR" noProof="0" dirty="0">
+                <a:solidFill>
+                  <a:srgbClr val="FFFFFF"/>
+                </a:solidFill>
+              </a:rPr>
+              <a:t>Forward </a:t>
+            </a:r>
+            <a:r>
+              <a:rPr lang="fr-FR" noProof="0" dirty="0" err="1">
+                <a:solidFill>
+                  <a:srgbClr val="FFFFFF"/>
+                </a:solidFill>
+              </a:rPr>
+              <a:t>Pass</a:t>
+            </a:r>
+            <a:endParaRPr lang="fr-FR" noProof="0" dirty="0"/>
+          </a:p>
+          <a:p>
+            <a:pPr algn="ctr">
+              <a:defRPr sz="1100">
+                <a:solidFill>
+                  <a:srgbClr val="FFFFFF"/>
+                </a:solidFill>
+                <a:latin typeface="Calibri"/>
+              </a:defRPr>
+            </a:pPr>
+            <a:r>
+              <a:rPr lang="fr-FR" noProof="0" dirty="0">
+                <a:solidFill>
+                  <a:srgbClr val="FFFFFF"/>
+                </a:solidFill>
+              </a:rPr>
+              <a:t>Un seul passage</a:t>
+            </a:r>
+          </a:p>
+          <a:p>
+            <a:pPr algn="ctr">
+              <a:defRPr sz="1100">
+                <a:solidFill>
+                  <a:srgbClr val="FFFFFF"/>
+                </a:solidFill>
+                <a:latin typeface="Calibri"/>
+              </a:defRPr>
+            </a:pPr>
+            <a:r>
+              <a:rPr lang="fr-FR" noProof="0" dirty="0">
+                <a:solidFill>
+                  <a:srgbClr val="FFFFFF"/>
+                </a:solidFill>
+              </a:rPr>
+              <a:t>dans le NCF</a:t>
+            </a:r>
+          </a:p>
+          <a:p>
+            <a:pPr algn="ctr">
+              <a:defRPr sz="1100">
+                <a:solidFill>
+                  <a:srgbClr val="FFFFFF"/>
+                </a:solidFill>
+                <a:latin typeface="Calibri"/>
+              </a:defRPr>
+            </a:pPr>
+            <a:r>
+              <a:rPr lang="fr-FR" noProof="0" dirty="0">
+                <a:solidFill>
+                  <a:srgbClr val="FFFFFF"/>
+                </a:solidFill>
+              </a:rPr>
+              <a:t>N items scorés</a:t>
+            </a:r>
+          </a:p>
+          <a:p>
+            <a:pPr algn="ctr">
+              <a:defRPr sz="1100">
+                <a:solidFill>
+                  <a:srgbClr val="FFFFFF"/>
+                </a:solidFill>
+                <a:latin typeface="Calibri"/>
+              </a:defRPr>
+            </a:pPr>
+            <a:r>
+              <a:rPr lang="fr-FR" noProof="0" dirty="0">
+                <a:solidFill>
+                  <a:srgbClr val="FFFFFF"/>
+                </a:solidFill>
+              </a:rPr>
+              <a:t>en parallèle → [N]</a:t>
+            </a:r>
+          </a:p>
+        </p:txBody>
+      </p:sp>
+      <p:sp>
+        <p:nvSpPr>
+          <p:cNvPr id="6" name="Right Arrow 5"/>
+          <p:cNvSpPr/>
+          <p:nvPr/>
+        </p:nvSpPr>
+        <p:spPr>
+          <a:xfrm>
+            <a:off x="5806440" y="2724912"/>
+            <a:ext cx="365760" cy="228600"/>
+          </a:xfrm>
+          <a:prstGeom prst="rightArrow">
+            <a:avLst/>
+          </a:prstGeom>
+          <a:solidFill>
+            <a:srgbClr val="AAAAAA"/>
+          </a:solidFill>
+          <a:ln>
+            <a:noFill/>
+          </a:ln>
+        </p:spPr>
+        <p:style>
+          <a:lnRef idx="1">
+            <a:schemeClr val="accent1"/>
+          </a:lnRef>
+          <a:fillRef idx="3">
+            <a:schemeClr val="accent1"/>
+          </a:fillRef>
+          <a:effectRef idx="2">
+            <a:schemeClr val="accent1"/>
+          </a:effectRef>
+          <a:fontRef idx="minor">
+            <a:schemeClr val="lt1"/>
+          </a:fontRef>
+        </p:style>
+        <p:txBody>
+          <a:bodyPr rtlCol="0" anchor="ctr"/>
+          <a:lstStyle/>
+          <a:p>
+            <a:pPr algn="ctr"/>
+            <a:endParaRPr lang="fr-FR" noProof="0" dirty="0"/>
+          </a:p>
+        </p:txBody>
+      </p:sp>
+      <p:sp>
+        <p:nvSpPr>
+          <p:cNvPr id="7" name="Rounded Rectangle 6"/>
+          <p:cNvSpPr/>
+          <p:nvPr/>
+        </p:nvSpPr>
+        <p:spPr>
+          <a:xfrm>
+            <a:off x="6217920" y="1828800"/>
+            <a:ext cx="2468880" cy="2011680"/>
+          </a:xfrm>
+          <a:prstGeom prst="roundRect">
+            <a:avLst/>
+          </a:prstGeom>
+          <a:solidFill>
+            <a:srgbClr val="70AD47"/>
+          </a:solidFill>
+          <a:ln>
+            <a:noFill/>
+          </a:ln>
+        </p:spPr>
+        <p:style>
+          <a:lnRef idx="1">
+            <a:schemeClr val="accent1"/>
+          </a:lnRef>
+          <a:fillRef idx="3">
+            <a:schemeClr val="accent1"/>
+          </a:fillRef>
+          <a:effectRef idx="2">
+            <a:schemeClr val="accent1"/>
+          </a:effectRef>
+          <a:fontRef idx="minor">
+            <a:schemeClr val="lt1"/>
+          </a:fontRef>
+        </p:style>
+        <p:txBody>
+          <a:bodyPr wrap="square" rtlCol="0" anchor="ctr"/>
+          <a:lstStyle/>
+          <a:p>
+            <a:pPr algn="ctr">
+              <a:spcBef>
+                <a:spcPts val="0"/>
+              </a:spcBef>
+              <a:spcAft>
+                <a:spcPts val="600"/>
+              </a:spcAft>
+              <a:defRPr sz="1400" b="1">
+                <a:solidFill>
+                  <a:srgbClr val="FFFFFF"/>
+                </a:solidFill>
+                <a:latin typeface="Calibri"/>
+              </a:defRPr>
+            </a:pPr>
+            <a:r>
+              <a:rPr lang="fr-FR" noProof="0" dirty="0">
+                <a:solidFill>
+                  <a:srgbClr val="FFFFFF"/>
+                </a:solidFill>
+              </a:rPr>
+              <a:t>Étape 3</a:t>
+            </a:r>
+            <a:br>
+              <a:rPr lang="fr-FR" noProof="0" dirty="0"/>
+            </a:br>
+            <a:r>
+              <a:rPr lang="fr-FR" noProof="0" dirty="0">
+                <a:solidFill>
+                  <a:srgbClr val="FFFFFF"/>
+                </a:solidFill>
+              </a:rPr>
+              <a:t>Tri &amp; Filtrage</a:t>
+            </a:r>
+          </a:p>
+          <a:p>
+            <a:pPr algn="ctr">
+              <a:defRPr sz="1100">
+                <a:solidFill>
+                  <a:srgbClr val="FFFFFF"/>
+                </a:solidFill>
+                <a:latin typeface="Calibri"/>
+              </a:defRPr>
+            </a:pPr>
+            <a:r>
+              <a:rPr lang="fr-FR" noProof="0" dirty="0">
+                <a:solidFill>
+                  <a:srgbClr val="FFFFFF"/>
+                </a:solidFill>
+              </a:rPr>
+              <a:t>Trier par score</a:t>
+            </a:r>
+          </a:p>
+          <a:p>
+            <a:pPr algn="ctr">
+              <a:defRPr sz="1100">
+                <a:solidFill>
+                  <a:srgbClr val="FFFFFF"/>
+                </a:solidFill>
+                <a:latin typeface="Calibri"/>
+              </a:defRPr>
+            </a:pPr>
+            <a:r>
+              <a:rPr lang="fr-FR" noProof="0" dirty="0">
+                <a:solidFill>
+                  <a:srgbClr val="FFFFFF"/>
+                </a:solidFill>
+              </a:rPr>
+              <a:t>descendant</a:t>
+            </a:r>
+          </a:p>
+          <a:p>
+            <a:pPr algn="ctr">
+              <a:defRPr sz="1100">
+                <a:solidFill>
+                  <a:srgbClr val="FFFFFF"/>
+                </a:solidFill>
+                <a:latin typeface="Calibri"/>
+              </a:defRPr>
+            </a:pPr>
+            <a:r>
+              <a:rPr lang="fr-FR" noProof="0" dirty="0">
+                <a:solidFill>
+                  <a:srgbClr val="FFFFFF"/>
+                </a:solidFill>
+              </a:rPr>
+              <a:t>Exclure items déjà</a:t>
+            </a:r>
+          </a:p>
+          <a:p>
+            <a:pPr algn="ctr">
+              <a:defRPr sz="1100">
+                <a:solidFill>
+                  <a:srgbClr val="FFFFFF"/>
+                </a:solidFill>
+                <a:latin typeface="Calibri"/>
+              </a:defRPr>
+            </a:pPr>
+            <a:r>
+              <a:rPr lang="fr-FR" noProof="0" dirty="0">
+                <a:solidFill>
+                  <a:srgbClr val="FFFFFF"/>
+                </a:solidFill>
+              </a:rPr>
+              <a:t>vus → Top-K</a:t>
+            </a:r>
+          </a:p>
+        </p:txBody>
+      </p:sp>
+      <p:sp>
+        <p:nvSpPr>
+          <p:cNvPr id="8" name="Right Arrow 7"/>
+          <p:cNvSpPr/>
+          <p:nvPr/>
+        </p:nvSpPr>
+        <p:spPr>
+          <a:xfrm>
+            <a:off x="8732520" y="2724912"/>
+            <a:ext cx="365760" cy="228600"/>
+          </a:xfrm>
+          <a:prstGeom prst="rightArrow">
+            <a:avLst/>
+          </a:prstGeom>
+          <a:solidFill>
+            <a:srgbClr val="AAAAAA"/>
+          </a:solidFill>
+          <a:ln>
+            <a:noFill/>
+          </a:ln>
+        </p:spPr>
+        <p:style>
+          <a:lnRef idx="1">
+            <a:schemeClr val="accent1"/>
+          </a:lnRef>
+          <a:fillRef idx="3">
+            <a:schemeClr val="accent1"/>
+          </a:fillRef>
+          <a:effectRef idx="2">
+            <a:schemeClr val="accent1"/>
+          </a:effectRef>
+          <a:fontRef idx="minor">
+            <a:schemeClr val="lt1"/>
+          </a:fontRef>
+        </p:style>
+        <p:txBody>
+          <a:bodyPr rtlCol="0" anchor="ctr"/>
+          <a:lstStyle/>
+          <a:p>
+            <a:pPr algn="ctr"/>
+            <a:endParaRPr lang="fr-FR" noProof="0" dirty="0"/>
+          </a:p>
+        </p:txBody>
+      </p:sp>
+      <p:sp>
+        <p:nvSpPr>
+          <p:cNvPr id="9" name="Rounded Rectangle 8"/>
+          <p:cNvSpPr/>
+          <p:nvPr/>
+        </p:nvSpPr>
+        <p:spPr>
+          <a:xfrm>
+            <a:off x="9144000" y="1828800"/>
+            <a:ext cx="2468880" cy="2011680"/>
+          </a:xfrm>
+          <a:prstGeom prst="roundRect">
+            <a:avLst/>
+          </a:prstGeom>
+          <a:solidFill>
+            <a:srgbClr val="FFC000"/>
+          </a:solidFill>
+          <a:ln>
+            <a:noFill/>
+          </a:ln>
+        </p:spPr>
+        <p:style>
+          <a:lnRef idx="1">
+            <a:schemeClr val="accent1"/>
+          </a:lnRef>
+          <a:fillRef idx="3">
+            <a:schemeClr val="accent1"/>
+          </a:fillRef>
+          <a:effectRef idx="2">
+            <a:schemeClr val="accent1"/>
+          </a:effectRef>
+          <a:fontRef idx="minor">
+            <a:schemeClr val="lt1"/>
+          </a:fontRef>
+        </p:style>
+        <p:txBody>
+          <a:bodyPr wrap="square" rtlCol="0" anchor="ctr"/>
+          <a:lstStyle/>
+          <a:p>
+            <a:pPr algn="ctr">
+              <a:spcBef>
+                <a:spcPts val="0"/>
+              </a:spcBef>
+              <a:spcAft>
+                <a:spcPts val="600"/>
+              </a:spcAft>
+              <a:defRPr sz="1400" b="1">
+                <a:solidFill>
+                  <a:srgbClr val="FFFFFF"/>
+                </a:solidFill>
+                <a:latin typeface="Calibri"/>
+              </a:defRPr>
+            </a:pPr>
+            <a:r>
+              <a:rPr lang="fr-FR" noProof="0" dirty="0">
+                <a:solidFill>
+                  <a:srgbClr val="FFFFFF"/>
+                </a:solidFill>
+              </a:rPr>
+              <a:t>Étape 4</a:t>
+            </a:r>
+            <a:br>
+              <a:rPr lang="fr-FR" noProof="0" dirty="0"/>
+            </a:br>
+            <a:r>
+              <a:rPr lang="fr-FR" noProof="0" dirty="0">
+                <a:solidFill>
+                  <a:srgbClr val="FFFFFF"/>
+                </a:solidFill>
+              </a:rPr>
+              <a:t>Réponse</a:t>
+            </a:r>
+          </a:p>
+          <a:p>
+            <a:pPr algn="ctr">
+              <a:defRPr sz="1100">
+                <a:solidFill>
+                  <a:srgbClr val="FFFFFF"/>
+                </a:solidFill>
+                <a:latin typeface="Calibri"/>
+              </a:defRPr>
+            </a:pPr>
+            <a:r>
+              <a:rPr lang="fr-FR" noProof="0" dirty="0">
+                <a:solidFill>
+                  <a:srgbClr val="FFFFFF"/>
+                </a:solidFill>
+              </a:rPr>
+              <a:t>Mapper indices</a:t>
+            </a:r>
+          </a:p>
+          <a:p>
+            <a:pPr algn="ctr">
+              <a:defRPr sz="1100">
+                <a:solidFill>
+                  <a:srgbClr val="FFFFFF"/>
+                </a:solidFill>
+                <a:latin typeface="Calibri"/>
+              </a:defRPr>
+            </a:pPr>
+            <a:r>
+              <a:rPr lang="fr-FR" noProof="0" dirty="0">
+                <a:solidFill>
+                  <a:srgbClr val="FFFFFF"/>
+                </a:solidFill>
+              </a:rPr>
+              <a:t>→ IDs fournisseurs</a:t>
+            </a:r>
+          </a:p>
+          <a:p>
+            <a:pPr algn="ctr">
+              <a:defRPr sz="1100">
+                <a:solidFill>
+                  <a:srgbClr val="FFFFFF"/>
+                </a:solidFill>
+                <a:latin typeface="Calibri"/>
+              </a:defRPr>
+            </a:pPr>
+            <a:r>
+              <a:rPr lang="fr-FR" noProof="0" dirty="0">
+                <a:solidFill>
+                  <a:srgbClr val="FFFFFF"/>
+                </a:solidFill>
+              </a:rPr>
+              <a:t>Attacher noms</a:t>
+            </a:r>
+          </a:p>
+          <a:p>
+            <a:pPr algn="ctr">
+              <a:defRPr sz="1100">
+                <a:solidFill>
+                  <a:srgbClr val="FFFFFF"/>
+                </a:solidFill>
+                <a:latin typeface="Calibri"/>
+              </a:defRPr>
+            </a:pPr>
+            <a:r>
+              <a:rPr lang="fr-FR" noProof="0" dirty="0">
+                <a:solidFill>
+                  <a:srgbClr val="FFFFFF"/>
+                </a:solidFill>
+              </a:rPr>
+              <a:t>→ JSON</a:t>
+            </a:r>
+          </a:p>
+        </p:txBody>
+      </p:sp>
+      <p:sp>
+        <p:nvSpPr>
+          <p:cNvPr id="10" name="TextBox 9"/>
+          <p:cNvSpPr txBox="1"/>
+          <p:nvPr/>
+        </p:nvSpPr>
+        <p:spPr>
+          <a:xfrm>
+            <a:off x="365760" y="4206240"/>
+            <a:ext cx="11338560" cy="1371600"/>
+          </a:xfrm>
+          <a:prstGeom prst="rect">
+            <a:avLst/>
+          </a:prstGeom>
+          <a:noFill/>
+        </p:spPr>
+        <p:txBody>
+          <a:bodyPr wrap="square">
+            <a:spAutoFit/>
+          </a:bodyPr>
+          <a:lstStyle/>
+          <a:p>
+            <a:pPr algn="l">
+              <a:defRPr sz="1200" b="0">
+                <a:solidFill>
+                  <a:srgbClr val="333333"/>
+                </a:solidFill>
+                <a:latin typeface="Calibri"/>
+              </a:defRPr>
+            </a:pPr>
+            <a:r>
+              <a:rPr lang="fr-FR" noProof="0" dirty="0"/>
+              <a:t>Exemple :  user_90 demande Top-5</a:t>
+            </a:r>
+            <a:br>
+              <a:rPr lang="fr-FR" noProof="0" dirty="0"/>
+            </a:br>
+            <a:r>
+              <a:rPr lang="fr-FR" noProof="0" dirty="0"/>
+              <a:t>[89,89,...,89] × [0,1,...,199]  →  stack [200, 2]  →  </a:t>
+            </a:r>
+            <a:r>
+              <a:rPr lang="fr-FR" noProof="0" dirty="0" err="1"/>
+              <a:t>forward</a:t>
+            </a:r>
+            <a:r>
+              <a:rPr lang="fr-FR" noProof="0" dirty="0"/>
+              <a:t>()  →  [200] scores</a:t>
+            </a:r>
+            <a:br>
+              <a:rPr lang="fr-FR" noProof="0" dirty="0"/>
+            </a:br>
+            <a:r>
+              <a:rPr lang="fr-FR" noProof="0" dirty="0" err="1"/>
+              <a:t>argsort</a:t>
+            </a:r>
+            <a:r>
+              <a:rPr lang="fr-FR" noProof="0" dirty="0"/>
+              <a:t> </a:t>
+            </a:r>
+            <a:r>
+              <a:rPr lang="fr-FR" noProof="0" dirty="0" err="1"/>
+              <a:t>desc</a:t>
+            </a:r>
+            <a:r>
+              <a:rPr lang="fr-FR" noProof="0" dirty="0"/>
+              <a:t> → exclure vus → Top-5: [Zen Clinic (4.78), Pure Lounge (4.69), Diamond Place (4.57), ...]</a:t>
+            </a:r>
+          </a:p>
+        </p:txBody>
+      </p:sp>
+    </p:spTree>
+  </p:cSld>
+  <p:clrMapOvr>
+    <a:masterClrMapping/>
+  </p:clrMapOvr>
+</p:sld>
+</file>
+
+<file path=ppt/slides/slide11.xml><?xml version="1.0" encoding="utf-8"?>
+<p:sld xmlns:a="http://schemas.openxmlformats.org/drawingml/2006/main" xmlns:r="http://schemas.openxmlformats.org/officeDocument/2006/relationships" xmlns:p="http://schemas.openxmlformats.org/presentationml/2006/main">
+  <p:cSld>
+    <p:spTree>
+      <p:nvGrpSpPr>
+        <p:cNvPr id="1" name=""/>
+        <p:cNvGrpSpPr/>
+        <p:nvPr/>
+      </p:nvGrpSpPr>
+      <p:grpSpPr>
+        <a:xfrm>
+          <a:off x="0" y="0"/>
+          <a:ext cx="0" cy="0"/>
+          <a:chOff x="0" y="0"/>
+          <a:chExt cx="0" cy="0"/>
+        </a:xfrm>
+      </p:grpSpPr>
+      <p:sp>
+        <p:nvSpPr>
+          <p:cNvPr id="2" name="Title 1"/>
+          <p:cNvSpPr>
+            <a:spLocks noGrp="1"/>
+          </p:cNvSpPr>
+          <p:nvPr>
+            <p:ph type="title"/>
+          </p:nvPr>
+        </p:nvSpPr>
+        <p:spPr>
+          <a:xfrm>
+            <a:off x="746150" y="-15545"/>
+            <a:ext cx="9720072" cy="1499616"/>
+          </a:xfrm>
+        </p:spPr>
+        <p:txBody>
+          <a:bodyPr/>
+          <a:lstStyle/>
+          <a:p>
+            <a:r>
+              <a:rPr lang="fr-FR" noProof="0" dirty="0"/>
+              <a:t>Résultats d'Évaluation</a:t>
+            </a:r>
+          </a:p>
+        </p:txBody>
+      </p:sp>
+      <p:sp>
+        <p:nvSpPr>
+          <p:cNvPr id="3" name="TextBox 2"/>
+          <p:cNvSpPr txBox="1"/>
+          <p:nvPr/>
+        </p:nvSpPr>
+        <p:spPr>
+          <a:xfrm>
+            <a:off x="640080" y="1575511"/>
+            <a:ext cx="10972800" cy="365760"/>
+          </a:xfrm>
+          <a:prstGeom prst="rect">
+            <a:avLst/>
+          </a:prstGeom>
+          <a:noFill/>
+        </p:spPr>
+        <p:txBody>
+          <a:bodyPr wrap="square">
+            <a:spAutoFit/>
+          </a:bodyPr>
+          <a:lstStyle/>
+          <a:p>
+            <a:pPr algn="ctr">
+              <a:defRPr sz="1300" b="0">
+                <a:solidFill>
+                  <a:srgbClr val="666666"/>
+                </a:solidFill>
+                <a:latin typeface="Calibri"/>
+              </a:defRPr>
+            </a:pPr>
+            <a:r>
+              <a:rPr lang="fr-FR" noProof="0" dirty="0"/>
+              <a:t>Train/Test split 80/20  |  500 utilisateurs  |  200 items  |  ~35 000 ratings</a:t>
+            </a:r>
+          </a:p>
+        </p:txBody>
+      </p:sp>
+      <p:sp>
+        <p:nvSpPr>
+          <p:cNvPr id="4" name="Rounded Rectangle 3"/>
+          <p:cNvSpPr/>
+          <p:nvPr/>
+        </p:nvSpPr>
+        <p:spPr>
+          <a:xfrm>
+            <a:off x="457200" y="2011680"/>
+            <a:ext cx="5303520" cy="457200"/>
+          </a:xfrm>
+          <a:prstGeom prst="roundRect">
+            <a:avLst/>
+          </a:prstGeom>
+          <a:solidFill>
+            <a:srgbClr val="4472C4"/>
+          </a:solidFill>
+          <a:ln>
+            <a:noFill/>
+          </a:ln>
+        </p:spPr>
+        <p:style>
+          <a:lnRef idx="1">
+            <a:schemeClr val="accent1"/>
+          </a:lnRef>
+          <a:fillRef idx="3">
+            <a:schemeClr val="accent1"/>
+          </a:fillRef>
+          <a:effectRef idx="2">
+            <a:schemeClr val="accent1"/>
+          </a:effectRef>
+          <a:fontRef idx="minor">
+            <a:schemeClr val="lt1"/>
+          </a:fontRef>
+        </p:style>
+        <p:txBody>
+          <a:bodyPr wrap="square" rtlCol="0" anchor="ctr"/>
+          <a:lstStyle/>
+          <a:p>
+            <a:pPr algn="ctr">
+              <a:spcBef>
+                <a:spcPts val="0"/>
+              </a:spcBef>
+              <a:spcAft>
+                <a:spcPts val="0"/>
+              </a:spcAft>
+              <a:defRPr sz="1400" b="1">
+                <a:solidFill>
+                  <a:srgbClr val="FFFFFF"/>
+                </a:solidFill>
+                <a:latin typeface="Calibri"/>
+              </a:defRPr>
+            </a:pPr>
+            <a:r>
+              <a:rPr lang="fr-FR" noProof="0" dirty="0">
+                <a:solidFill>
+                  <a:srgbClr val="FFFFFF"/>
+                </a:solidFill>
+              </a:rPr>
+              <a:t>Métriques de Régression</a:t>
+            </a:r>
+          </a:p>
+        </p:txBody>
+      </p:sp>
+      <p:sp>
+        <p:nvSpPr>
+          <p:cNvPr id="5" name="TextBox 4"/>
+          <p:cNvSpPr txBox="1"/>
+          <p:nvPr/>
+        </p:nvSpPr>
+        <p:spPr>
+          <a:xfrm>
+            <a:off x="640080" y="2651760"/>
+            <a:ext cx="2286000" cy="320040"/>
+          </a:xfrm>
+          <a:prstGeom prst="rect">
+            <a:avLst/>
+          </a:prstGeom>
+          <a:noFill/>
+        </p:spPr>
+        <p:txBody>
+          <a:bodyPr wrap="square">
+            <a:spAutoFit/>
+          </a:bodyPr>
+          <a:lstStyle/>
+          <a:p>
+            <a:pPr algn="l">
+              <a:defRPr sz="1300" b="1">
+                <a:solidFill>
+                  <a:srgbClr val="4472C4"/>
+                </a:solidFill>
+                <a:latin typeface="Calibri"/>
+              </a:defRPr>
+            </a:pPr>
+            <a:r>
+              <a:rPr lang="fr-FR" noProof="0" dirty="0"/>
+              <a:t>RMSE</a:t>
+            </a:r>
+          </a:p>
+        </p:txBody>
+      </p:sp>
+      <p:sp>
+        <p:nvSpPr>
+          <p:cNvPr id="6" name="TextBox 5"/>
+          <p:cNvSpPr txBox="1"/>
+          <p:nvPr/>
+        </p:nvSpPr>
+        <p:spPr>
+          <a:xfrm>
+            <a:off x="640080" y="2926080"/>
+            <a:ext cx="2286000" cy="411480"/>
+          </a:xfrm>
+          <a:prstGeom prst="rect">
+            <a:avLst/>
+          </a:prstGeom>
+          <a:noFill/>
+        </p:spPr>
+        <p:txBody>
+          <a:bodyPr wrap="square">
+            <a:spAutoFit/>
+          </a:bodyPr>
+          <a:lstStyle/>
+          <a:p>
+            <a:pPr algn="l">
+              <a:defRPr sz="2800" b="1">
+                <a:solidFill>
+                  <a:srgbClr val="333333"/>
+                </a:solidFill>
+                <a:latin typeface="Calibri"/>
+              </a:defRPr>
+            </a:pPr>
+            <a:r>
+              <a:rPr lang="fr-FR" noProof="0" dirty="0"/>
+              <a:t>0.68</a:t>
+            </a:r>
+          </a:p>
+        </p:txBody>
+      </p:sp>
+      <p:sp>
+        <p:nvSpPr>
+          <p:cNvPr id="8" name="TextBox 7"/>
+          <p:cNvSpPr txBox="1"/>
+          <p:nvPr/>
+        </p:nvSpPr>
+        <p:spPr>
+          <a:xfrm>
+            <a:off x="3200400" y="2651760"/>
+            <a:ext cx="2286000" cy="320040"/>
+          </a:xfrm>
+          <a:prstGeom prst="rect">
+            <a:avLst/>
+          </a:prstGeom>
+          <a:noFill/>
+        </p:spPr>
+        <p:txBody>
+          <a:bodyPr wrap="square">
+            <a:spAutoFit/>
+          </a:bodyPr>
+          <a:lstStyle/>
+          <a:p>
+            <a:pPr algn="l">
+              <a:defRPr sz="1300" b="1">
+                <a:solidFill>
+                  <a:srgbClr val="4472C4"/>
+                </a:solidFill>
+                <a:latin typeface="Calibri"/>
+              </a:defRPr>
+            </a:pPr>
+            <a:r>
+              <a:rPr lang="fr-FR" noProof="0" dirty="0"/>
+              <a:t>MAE</a:t>
+            </a:r>
+          </a:p>
+        </p:txBody>
+      </p:sp>
+      <p:sp>
+        <p:nvSpPr>
+          <p:cNvPr id="9" name="TextBox 8"/>
+          <p:cNvSpPr txBox="1"/>
+          <p:nvPr/>
+        </p:nvSpPr>
+        <p:spPr>
+          <a:xfrm>
+            <a:off x="3200400" y="2926080"/>
+            <a:ext cx="2286000" cy="411480"/>
+          </a:xfrm>
+          <a:prstGeom prst="rect">
+            <a:avLst/>
+          </a:prstGeom>
+          <a:noFill/>
+        </p:spPr>
+        <p:txBody>
+          <a:bodyPr wrap="square">
+            <a:spAutoFit/>
+          </a:bodyPr>
+          <a:lstStyle/>
+          <a:p>
+            <a:pPr algn="l">
+              <a:defRPr sz="2800" b="1">
+                <a:solidFill>
+                  <a:srgbClr val="333333"/>
+                </a:solidFill>
+                <a:latin typeface="Calibri"/>
+              </a:defRPr>
+            </a:pPr>
+            <a:r>
+              <a:rPr lang="fr-FR" noProof="0" dirty="0"/>
+              <a:t>0.54</a:t>
+            </a:r>
+          </a:p>
+        </p:txBody>
+      </p:sp>
+      <p:sp>
+        <p:nvSpPr>
+          <p:cNvPr id="10" name="TextBox 9"/>
+          <p:cNvSpPr txBox="1"/>
+          <p:nvPr/>
+        </p:nvSpPr>
+        <p:spPr>
+          <a:xfrm>
+            <a:off x="3200400" y="3383280"/>
+            <a:ext cx="2286000" cy="274320"/>
+          </a:xfrm>
+          <a:prstGeom prst="rect">
+            <a:avLst/>
+          </a:prstGeom>
+          <a:noFill/>
+        </p:spPr>
+        <p:txBody>
+          <a:bodyPr wrap="square">
+            <a:spAutoFit/>
+          </a:bodyPr>
+          <a:lstStyle/>
+          <a:p>
+            <a:pPr algn="l">
+              <a:defRPr sz="1100" b="0">
+                <a:solidFill>
+                  <a:srgbClr val="888888"/>
+                </a:solidFill>
+                <a:latin typeface="Calibri"/>
+              </a:defRPr>
+            </a:pPr>
+            <a:r>
+              <a:rPr lang="fr-FR" noProof="0" dirty="0"/>
+              <a:t>&lt; 1 point d'erreur</a:t>
+            </a:r>
+          </a:p>
+        </p:txBody>
+      </p:sp>
+      <p:sp>
+        <p:nvSpPr>
+          <p:cNvPr id="11" name="Rounded Rectangle 10"/>
+          <p:cNvSpPr/>
+          <p:nvPr/>
+        </p:nvSpPr>
+        <p:spPr>
+          <a:xfrm>
+            <a:off x="6217920" y="2011680"/>
+            <a:ext cx="5303520" cy="457200"/>
+          </a:xfrm>
+          <a:prstGeom prst="roundRect">
+            <a:avLst/>
+          </a:prstGeom>
+          <a:solidFill>
+            <a:srgbClr val="ED7D31"/>
+          </a:solidFill>
+          <a:ln>
+            <a:noFill/>
+          </a:ln>
+        </p:spPr>
+        <p:style>
+          <a:lnRef idx="1">
+            <a:schemeClr val="accent1"/>
+          </a:lnRef>
+          <a:fillRef idx="3">
+            <a:schemeClr val="accent1"/>
+          </a:fillRef>
+          <a:effectRef idx="2">
+            <a:schemeClr val="accent1"/>
+          </a:effectRef>
+          <a:fontRef idx="minor">
+            <a:schemeClr val="lt1"/>
+          </a:fontRef>
+        </p:style>
+        <p:txBody>
+          <a:bodyPr wrap="square" rtlCol="0" anchor="ctr"/>
+          <a:lstStyle/>
+          <a:p>
+            <a:pPr algn="ctr">
+              <a:spcBef>
+                <a:spcPts val="0"/>
+              </a:spcBef>
+              <a:spcAft>
+                <a:spcPts val="0"/>
+              </a:spcAft>
+              <a:defRPr sz="1400" b="1">
+                <a:solidFill>
+                  <a:srgbClr val="FFFFFF"/>
+                </a:solidFill>
+                <a:latin typeface="Calibri"/>
+              </a:defRPr>
+            </a:pPr>
+            <a:r>
+              <a:rPr lang="fr-FR" noProof="0" dirty="0">
+                <a:solidFill>
+                  <a:srgbClr val="FFFFFF"/>
+                </a:solidFill>
+              </a:rPr>
+              <a:t>Métriques de Classement (Top-5)</a:t>
+            </a:r>
+          </a:p>
+        </p:txBody>
+      </p:sp>
+      <p:sp>
+        <p:nvSpPr>
+          <p:cNvPr id="12" name="TextBox 11"/>
+          <p:cNvSpPr txBox="1"/>
+          <p:nvPr/>
+        </p:nvSpPr>
+        <p:spPr>
+          <a:xfrm>
+            <a:off x="6400800" y="2651760"/>
+            <a:ext cx="1097280" cy="320040"/>
+          </a:xfrm>
+          <a:prstGeom prst="rect">
+            <a:avLst/>
+          </a:prstGeom>
+          <a:noFill/>
+        </p:spPr>
+        <p:txBody>
+          <a:bodyPr wrap="square">
+            <a:spAutoFit/>
+          </a:bodyPr>
+          <a:lstStyle/>
+          <a:p>
+            <a:pPr algn="l">
+              <a:defRPr sz="1300" b="1">
+                <a:solidFill>
+                  <a:srgbClr val="ED7D31"/>
+                </a:solidFill>
+                <a:latin typeface="Calibri"/>
+              </a:defRPr>
+            </a:pPr>
+            <a:r>
+              <a:rPr lang="fr-FR" noProof="0" dirty="0"/>
+              <a:t>P@5</a:t>
+            </a:r>
+          </a:p>
+        </p:txBody>
+      </p:sp>
+      <p:sp>
+        <p:nvSpPr>
+          <p:cNvPr id="13" name="TextBox 12"/>
+          <p:cNvSpPr txBox="1"/>
+          <p:nvPr/>
+        </p:nvSpPr>
+        <p:spPr>
+          <a:xfrm>
+            <a:off x="6400800" y="2926080"/>
+            <a:ext cx="1097280" cy="411480"/>
+          </a:xfrm>
+          <a:prstGeom prst="rect">
+            <a:avLst/>
+          </a:prstGeom>
+          <a:noFill/>
+        </p:spPr>
+        <p:txBody>
+          <a:bodyPr wrap="square">
+            <a:spAutoFit/>
+          </a:bodyPr>
+          <a:lstStyle/>
+          <a:p>
+            <a:pPr algn="l">
+              <a:defRPr sz="2400" b="1">
+                <a:solidFill>
+                  <a:srgbClr val="333333"/>
+                </a:solidFill>
+                <a:latin typeface="Calibri"/>
+              </a:defRPr>
+            </a:pPr>
+            <a:r>
+              <a:rPr lang="fr-FR" noProof="0" dirty="0"/>
+              <a:t>46%</a:t>
+            </a:r>
+          </a:p>
+        </p:txBody>
+      </p:sp>
+      <p:sp>
+        <p:nvSpPr>
+          <p:cNvPr id="14" name="TextBox 13"/>
+          <p:cNvSpPr txBox="1"/>
+          <p:nvPr/>
+        </p:nvSpPr>
+        <p:spPr>
+          <a:xfrm>
+            <a:off x="7680960" y="2651760"/>
+            <a:ext cx="1097280" cy="320040"/>
+          </a:xfrm>
+          <a:prstGeom prst="rect">
+            <a:avLst/>
+          </a:prstGeom>
+          <a:noFill/>
+        </p:spPr>
+        <p:txBody>
+          <a:bodyPr wrap="square">
+            <a:spAutoFit/>
+          </a:bodyPr>
+          <a:lstStyle/>
+          <a:p>
+            <a:pPr algn="l">
+              <a:defRPr sz="1300" b="1">
+                <a:solidFill>
+                  <a:srgbClr val="ED7D31"/>
+                </a:solidFill>
+                <a:latin typeface="Calibri"/>
+              </a:defRPr>
+            </a:pPr>
+            <a:r>
+              <a:rPr lang="fr-FR" noProof="0" dirty="0"/>
+              <a:t>R@5</a:t>
+            </a:r>
+          </a:p>
+        </p:txBody>
+      </p:sp>
+      <p:sp>
+        <p:nvSpPr>
+          <p:cNvPr id="15" name="TextBox 14"/>
+          <p:cNvSpPr txBox="1"/>
+          <p:nvPr/>
+        </p:nvSpPr>
+        <p:spPr>
+          <a:xfrm>
+            <a:off x="7680960" y="2926080"/>
+            <a:ext cx="1097280" cy="411480"/>
+          </a:xfrm>
+          <a:prstGeom prst="rect">
+            <a:avLst/>
+          </a:prstGeom>
+          <a:noFill/>
+        </p:spPr>
+        <p:txBody>
+          <a:bodyPr wrap="square">
+            <a:spAutoFit/>
+          </a:bodyPr>
+          <a:lstStyle/>
+          <a:p>
+            <a:pPr algn="l">
+              <a:defRPr sz="2400" b="1">
+                <a:solidFill>
+                  <a:srgbClr val="333333"/>
+                </a:solidFill>
+                <a:latin typeface="Calibri"/>
+              </a:defRPr>
+            </a:pPr>
+            <a:r>
+              <a:rPr lang="fr-FR" noProof="0" dirty="0"/>
+              <a:t>40%</a:t>
+            </a:r>
+          </a:p>
+        </p:txBody>
+      </p:sp>
+      <p:sp>
+        <p:nvSpPr>
+          <p:cNvPr id="16" name="TextBox 15"/>
+          <p:cNvSpPr txBox="1"/>
+          <p:nvPr/>
+        </p:nvSpPr>
+        <p:spPr>
+          <a:xfrm>
+            <a:off x="8961120" y="2651760"/>
+            <a:ext cx="1097280" cy="320040"/>
+          </a:xfrm>
+          <a:prstGeom prst="rect">
+            <a:avLst/>
+          </a:prstGeom>
+          <a:noFill/>
+        </p:spPr>
+        <p:txBody>
+          <a:bodyPr wrap="square">
+            <a:spAutoFit/>
+          </a:bodyPr>
+          <a:lstStyle/>
+          <a:p>
+            <a:pPr algn="l">
+              <a:defRPr sz="1300" b="1">
+                <a:solidFill>
+                  <a:srgbClr val="ED7D31"/>
+                </a:solidFill>
+                <a:latin typeface="Calibri"/>
+              </a:defRPr>
+            </a:pPr>
+            <a:r>
+              <a:rPr lang="fr-FR" noProof="0" dirty="0"/>
+              <a:t>NDCG</a:t>
+            </a:r>
+          </a:p>
+        </p:txBody>
+      </p:sp>
+      <p:sp>
+        <p:nvSpPr>
+          <p:cNvPr id="17" name="TextBox 16"/>
+          <p:cNvSpPr txBox="1"/>
+          <p:nvPr/>
+        </p:nvSpPr>
+        <p:spPr>
+          <a:xfrm>
+            <a:off x="8961120" y="2926080"/>
+            <a:ext cx="1097280" cy="411480"/>
+          </a:xfrm>
+          <a:prstGeom prst="rect">
+            <a:avLst/>
+          </a:prstGeom>
+          <a:noFill/>
+        </p:spPr>
+        <p:txBody>
+          <a:bodyPr wrap="square">
+            <a:spAutoFit/>
+          </a:bodyPr>
+          <a:lstStyle/>
+          <a:p>
+            <a:pPr algn="l">
+              <a:defRPr sz="2400" b="1">
+                <a:solidFill>
+                  <a:srgbClr val="333333"/>
+                </a:solidFill>
+                <a:latin typeface="Calibri"/>
+              </a:defRPr>
+            </a:pPr>
+            <a:r>
+              <a:rPr lang="fr-FR" noProof="0" dirty="0"/>
+              <a:t>50%</a:t>
+            </a:r>
+          </a:p>
+        </p:txBody>
+      </p:sp>
+      <p:sp>
+        <p:nvSpPr>
+          <p:cNvPr id="18" name="TextBox 17"/>
+          <p:cNvSpPr txBox="1"/>
+          <p:nvPr/>
+        </p:nvSpPr>
+        <p:spPr>
+          <a:xfrm>
+            <a:off x="10241280" y="2651760"/>
+            <a:ext cx="1097280" cy="320040"/>
+          </a:xfrm>
+          <a:prstGeom prst="rect">
+            <a:avLst/>
+          </a:prstGeom>
+          <a:noFill/>
+        </p:spPr>
+        <p:txBody>
+          <a:bodyPr wrap="square">
+            <a:spAutoFit/>
+          </a:bodyPr>
+          <a:lstStyle/>
+          <a:p>
+            <a:pPr algn="l">
+              <a:defRPr sz="1300" b="1">
+                <a:solidFill>
+                  <a:srgbClr val="ED7D31"/>
+                </a:solidFill>
+                <a:latin typeface="Calibri"/>
+              </a:defRPr>
+            </a:pPr>
+            <a:r>
+              <a:rPr lang="fr-FR" noProof="0" dirty="0"/>
+              <a:t>Hit</a:t>
+            </a:r>
+          </a:p>
+        </p:txBody>
+      </p:sp>
+      <p:sp>
+        <p:nvSpPr>
+          <p:cNvPr id="19" name="TextBox 18"/>
+          <p:cNvSpPr txBox="1"/>
+          <p:nvPr/>
+        </p:nvSpPr>
+        <p:spPr>
+          <a:xfrm>
+            <a:off x="10241280" y="2926080"/>
+            <a:ext cx="1097280" cy="411480"/>
+          </a:xfrm>
+          <a:prstGeom prst="rect">
+            <a:avLst/>
+          </a:prstGeom>
+          <a:noFill/>
+        </p:spPr>
+        <p:txBody>
+          <a:bodyPr wrap="square">
+            <a:spAutoFit/>
+          </a:bodyPr>
+          <a:lstStyle/>
+          <a:p>
+            <a:pPr algn="l">
+              <a:defRPr sz="2400" b="1">
+                <a:solidFill>
+                  <a:srgbClr val="333333"/>
+                </a:solidFill>
+                <a:latin typeface="Calibri"/>
+              </a:defRPr>
+            </a:pPr>
+            <a:r>
+              <a:rPr lang="fr-FR" noProof="0" dirty="0"/>
+              <a:t>90%</a:t>
+            </a:r>
+          </a:p>
+        </p:txBody>
+      </p:sp>
+      <p:sp>
+        <p:nvSpPr>
+          <p:cNvPr id="20" name="Rounded Rectangle 19"/>
+          <p:cNvSpPr/>
+          <p:nvPr/>
+        </p:nvSpPr>
+        <p:spPr>
+          <a:xfrm>
+            <a:off x="457200" y="3931920"/>
+            <a:ext cx="11155680" cy="411480"/>
+          </a:xfrm>
+          <a:prstGeom prst="roundRect">
+            <a:avLst/>
+          </a:prstGeom>
+          <a:solidFill>
+            <a:srgbClr val="70AD47"/>
+          </a:solidFill>
+          <a:ln>
+            <a:noFill/>
+          </a:ln>
+        </p:spPr>
+        <p:style>
+          <a:lnRef idx="1">
+            <a:schemeClr val="accent1"/>
+          </a:lnRef>
+          <a:fillRef idx="3">
+            <a:schemeClr val="accent1"/>
+          </a:fillRef>
+          <a:effectRef idx="2">
+            <a:schemeClr val="accent1"/>
+          </a:effectRef>
+          <a:fontRef idx="minor">
+            <a:schemeClr val="lt1"/>
+          </a:fontRef>
+        </p:style>
+        <p:txBody>
+          <a:bodyPr wrap="square" rtlCol="0" anchor="ctr"/>
+          <a:lstStyle/>
+          <a:p>
+            <a:pPr algn="ctr">
+              <a:spcBef>
+                <a:spcPts val="0"/>
+              </a:spcBef>
+              <a:spcAft>
+                <a:spcPts val="0"/>
+              </a:spcAft>
+              <a:defRPr sz="1300" b="1">
+                <a:solidFill>
+                  <a:srgbClr val="FFFFFF"/>
+                </a:solidFill>
+                <a:latin typeface="Calibri"/>
+              </a:defRPr>
+            </a:pPr>
+            <a:r>
+              <a:rPr lang="fr-FR" noProof="0" dirty="0">
+                <a:solidFill>
+                  <a:srgbClr val="FFFFFF"/>
+                </a:solidFill>
+              </a:rPr>
+              <a:t>Test de Différenciation: 5/5 PASS — Chaque utilisateur reçoit des recommandations uniques</a:t>
+            </a:r>
+          </a:p>
+        </p:txBody>
+      </p:sp>
+      <p:sp>
+        <p:nvSpPr>
+          <p:cNvPr id="21" name="TextBox 20"/>
+          <p:cNvSpPr txBox="1"/>
+          <p:nvPr/>
+        </p:nvSpPr>
+        <p:spPr>
+          <a:xfrm>
+            <a:off x="640080" y="4480560"/>
+            <a:ext cx="10972800" cy="1371600"/>
+          </a:xfrm>
+          <a:prstGeom prst="rect">
+            <a:avLst/>
+          </a:prstGeom>
+          <a:noFill/>
+        </p:spPr>
+        <p:txBody>
+          <a:bodyPr wrap="square">
+            <a:spAutoFit/>
+          </a:bodyPr>
+          <a:lstStyle/>
+          <a:p>
+            <a:pPr algn="l">
+              <a:defRPr sz="1100" b="0">
+                <a:solidFill>
+                  <a:srgbClr val="333333"/>
+                </a:solidFill>
+                <a:latin typeface="Consolas"/>
+              </a:defRPr>
+            </a:pPr>
+            <a:r>
+              <a:rPr lang="fr-FR" noProof="0" dirty="0"/>
+              <a:t>user_1   →  Zen Clinic, Pure Lounge, Diamond Place, Golden Clinic</a:t>
+            </a:r>
+          </a:p>
+          <a:p>
+            <a:pPr algn="l">
+              <a:spcBef>
+                <a:spcPts val="200"/>
+              </a:spcBef>
+              <a:spcAft>
+                <a:spcPts val="100"/>
+              </a:spcAft>
+              <a:defRPr sz="1100" b="0">
+                <a:solidFill>
+                  <a:srgbClr val="333333"/>
+                </a:solidFill>
+                <a:latin typeface="Consolas"/>
+              </a:defRPr>
+            </a:pPr>
+            <a:r>
+              <a:rPr lang="fr-FR" noProof="0" dirty="0"/>
+              <a:t>user_10  →  Crystal Place, Diamond Place, Golden </a:t>
+            </a:r>
+            <a:r>
+              <a:rPr lang="fr-FR" noProof="0" dirty="0" err="1"/>
+              <a:t>Lab</a:t>
+            </a:r>
+            <a:r>
+              <a:rPr lang="fr-FR" noProof="0" dirty="0"/>
+              <a:t>, Crystal </a:t>
+            </a:r>
+            <a:r>
+              <a:rPr lang="fr-FR" noProof="0" dirty="0" err="1"/>
+              <a:t>Wellness</a:t>
+            </a:r>
+            <a:endParaRPr lang="fr-FR" noProof="0" dirty="0"/>
+          </a:p>
+          <a:p>
+            <a:pPr algn="l">
+              <a:spcBef>
+                <a:spcPts val="200"/>
+              </a:spcBef>
+              <a:spcAft>
+                <a:spcPts val="100"/>
+              </a:spcAft>
+              <a:defRPr sz="1100" b="0">
+                <a:solidFill>
+                  <a:srgbClr val="333333"/>
+                </a:solidFill>
+                <a:latin typeface="Consolas"/>
+              </a:defRPr>
+            </a:pPr>
+            <a:r>
+              <a:rPr lang="fr-FR" noProof="0" dirty="0"/>
+              <a:t>user_50  →  River Studio, Sunrise </a:t>
+            </a:r>
+            <a:r>
+              <a:rPr lang="fr-FR" noProof="0" dirty="0" err="1"/>
+              <a:t>Lab</a:t>
+            </a:r>
+            <a:r>
+              <a:rPr lang="fr-FR" noProof="0" dirty="0"/>
+              <a:t>, Golden Clinic, Summit Hub</a:t>
+            </a:r>
+          </a:p>
+          <a:p>
+            <a:pPr algn="l">
+              <a:spcBef>
+                <a:spcPts val="200"/>
+              </a:spcBef>
+              <a:spcAft>
+                <a:spcPts val="100"/>
+              </a:spcAft>
+              <a:defRPr sz="1100" b="0">
+                <a:solidFill>
+                  <a:srgbClr val="333333"/>
+                </a:solidFill>
+                <a:latin typeface="Consolas"/>
+              </a:defRPr>
+            </a:pPr>
+            <a:r>
+              <a:rPr lang="fr-FR" noProof="0" dirty="0"/>
+              <a:t>user_100 →  Lotus Clinic, Harmony Lounge, Diamond Hub, </a:t>
+            </a:r>
+            <a:r>
+              <a:rPr lang="fr-FR" noProof="0" dirty="0" err="1"/>
+              <a:t>Ocean</a:t>
+            </a:r>
+            <a:r>
+              <a:rPr lang="fr-FR" noProof="0" dirty="0"/>
+              <a:t> Clinic</a:t>
+            </a:r>
+          </a:p>
+        </p:txBody>
+      </p:sp>
+    </p:spTree>
+  </p:cSld>
+  <p:clrMapOvr>
+    <a:masterClrMapping/>
+  </p:clrMapOvr>
+</p:sld>
+</file>
+
+<file path=ppt/slides/slide12.xml><?xml version="1.0" encoding="utf-8"?>
+<p:sld xmlns:a="http://schemas.openxmlformats.org/drawingml/2006/main" xmlns:r="http://schemas.openxmlformats.org/officeDocument/2006/relationships" xmlns:p="http://schemas.openxmlformats.org/presentationml/2006/main">
+  <p:cSld>
+    <p:spTree>
+      <p:nvGrpSpPr>
+        <p:cNvPr id="1" name=""/>
+        <p:cNvGrpSpPr/>
+        <p:nvPr/>
+      </p:nvGrpSpPr>
+      <p:grpSpPr>
+        <a:xfrm>
+          <a:off x="0" y="0"/>
+          <a:ext cx="0" cy="0"/>
+          <a:chOff x="0" y="0"/>
+          <a:chExt cx="0" cy="0"/>
+        </a:xfrm>
+      </p:grpSpPr>
+      <p:sp>
+        <p:nvSpPr>
+          <p:cNvPr id="2" name="Title 1"/>
+          <p:cNvSpPr>
+            <a:spLocks noGrp="1"/>
+          </p:cNvSpPr>
+          <p:nvPr>
+            <p:ph type="title"/>
+          </p:nvPr>
+        </p:nvSpPr>
+        <p:spPr/>
+        <p:txBody>
+          <a:bodyPr/>
+          <a:lstStyle/>
+          <a:p>
+            <a:r>
+              <a:rPr lang="fr-FR" noProof="0" dirty="0"/>
               <a:t>Data Pipeline &amp; CI/CD</a:t>
             </a:r>
           </a:p>
@@ -21181,7 +22939,7 @@
           </a:fontRef>
         </p:style>
         <p:txBody>
-          <a:bodyPr rtlCol="0" anchor="ctr" wrap="square"/>
+          <a:bodyPr wrap="square" rtlCol="0" anchor="ctr"/>
           <a:lstStyle/>
           <a:p>
             <a:pPr algn="ctr">
@@ -21199,6 +22957,11 @@
               </a:defRPr>
             </a:pPr>
             <a:r>
+              <a:rPr lang="fr-FR" noProof="0" dirty="0">
+                <a:solidFill>
+                  <a:srgbClr val="FFFFFF"/>
+                </a:solidFill>
+              </a:rPr>
               <a:t>EXTRACT</a:t>
             </a:r>
           </a:p>
@@ -21212,6 +22975,11 @@
               </a:defRPr>
             </a:pPr>
             <a:r>
+              <a:rPr lang="fr-FR" noProof="0" dirty="0">
+                <a:solidFill>
+                  <a:srgbClr val="FFFFFF"/>
+                </a:solidFill>
+              </a:rPr>
               <a:t>Base de données</a:t>
             </a:r>
           </a:p>
@@ -21225,6 +22993,11 @@
               </a:defRPr>
             </a:pPr>
             <a:r>
+              <a:rPr lang="fr-FR" noProof="0" dirty="0">
+                <a:solidFill>
+                  <a:srgbClr val="FFFFFF"/>
+                </a:solidFill>
+              </a:rPr>
               <a:t>Ratings + Historique</a:t>
             </a:r>
           </a:p>
@@ -21238,6 +23011,11 @@
               </a:defRPr>
             </a:pPr>
             <a:r>
+              <a:rPr lang="fr-FR" noProof="0" dirty="0">
+                <a:solidFill>
+                  <a:srgbClr val="FFFFFF"/>
+                </a:solidFill>
+              </a:rPr>
               <a:t>+ Métadonnées</a:t>
             </a:r>
           </a:p>
@@ -21283,6 +23061,7 @@
           <a:lstStyle/>
           <a:p>
             <a:pPr algn="ctr"/>
+            <a:endParaRPr lang="fr-FR" noProof="0" dirty="0"/>
           </a:p>
         </p:txBody>
       </p:sp>
@@ -21322,7 +23101,7 @@
           </a:fontRef>
         </p:style>
         <p:txBody>
-          <a:bodyPr rtlCol="0" anchor="ctr" wrap="square"/>
+          <a:bodyPr wrap="square" rtlCol="0" anchor="ctr"/>
           <a:lstStyle/>
           <a:p>
             <a:pPr algn="ctr">
@@ -21340,6 +23119,11 @@
               </a:defRPr>
             </a:pPr>
             <a:r>
+              <a:rPr lang="fr-FR" noProof="0" dirty="0">
+                <a:solidFill>
+                  <a:srgbClr val="FFFFFF"/>
+                </a:solidFill>
+              </a:rPr>
               <a:t>TRANSFORM</a:t>
             </a:r>
           </a:p>
@@ -21353,6 +23137,11 @@
               </a:defRPr>
             </a:pPr>
             <a:r>
+              <a:rPr lang="fr-FR" noProof="0" dirty="0">
+                <a:solidFill>
+                  <a:srgbClr val="FFFFFF"/>
+                </a:solidFill>
+              </a:rPr>
               <a:t>Nettoyage</a:t>
             </a:r>
           </a:p>
@@ -21366,8 +23155,22 @@
               </a:defRPr>
             </a:pPr>
             <a:r>
-              <a:t>Suppr. nulls</a:t>
-            </a:r>
+              <a:rPr lang="fr-FR" noProof="0" dirty="0">
+                <a:solidFill>
+                  <a:srgbClr val="FFFFFF"/>
+                </a:solidFill>
+              </a:rPr>
+              <a:t>Suppr. </a:t>
+            </a:r>
+            <a:r>
+              <a:rPr lang="fr-FR" noProof="0" dirty="0" err="1">
+                <a:solidFill>
+                  <a:srgbClr val="FFFFFF"/>
+                </a:solidFill>
+              </a:rPr>
+              <a:t>nulls</a:t>
+            </a:r>
+            <a:endParaRPr lang="fr-FR" noProof="0" dirty="0"/>
           </a:p>
           <a:p>
             <a:pPr algn="ctr">
@@ -21379,6 +23182,11 @@
               </a:defRPr>
             </a:pPr>
             <a:r>
+              <a:rPr lang="fr-FR" noProof="0" dirty="0">
+                <a:solidFill>
+                  <a:srgbClr val="FFFFFF"/>
+                </a:solidFill>
+              </a:rPr>
               <a:t>Durée → scores</a:t>
             </a:r>
           </a:p>
@@ -21424,6 +23232,7 @@
           <a:lstStyle/>
           <a:p>
             <a:pPr algn="ctr"/>
+            <a:endParaRPr lang="fr-FR" noProof="0" dirty="0"/>
           </a:p>
         </p:txBody>
       </p:sp>
@@ -21463,7 +23272,7 @@
           </a:fontRef>
         </p:style>
         <p:txBody>
-          <a:bodyPr rtlCol="0" anchor="ctr" wrap="square"/>
+          <a:bodyPr wrap="square" rtlCol="0" anchor="ctr"/>
           <a:lstStyle/>
           <a:p>
             <a:pPr algn="ctr">
@@ -21481,6 +23290,11 @@
               </a:defRPr>
             </a:pPr>
             <a:r>
+              <a:rPr lang="fr-FR" noProof="0" dirty="0">
+                <a:solidFill>
+                  <a:srgbClr val="FFFFFF"/>
+                </a:solidFill>
+              </a:rPr>
               <a:t>VALIDATE</a:t>
             </a:r>
           </a:p>
@@ -21494,7 +23308,20 @@
               </a:defRPr>
             </a:pPr>
             <a:r>
-              <a:t>Quality Gates</a:t>
+              <a:rPr lang="fr-FR" noProof="0" dirty="0" err="1">
+                <a:solidFill>
+                  <a:srgbClr val="FFFFFF"/>
+                </a:solidFill>
+              </a:rPr>
+              <a:t>Quality</a:t>
+            </a:r>
+            <a:r>
+              <a:rPr lang="fr-FR" noProof="0" dirty="0">
+                <a:solidFill>
+                  <a:srgbClr val="FFFFFF"/>
+                </a:solidFill>
+              </a:rPr>
+              <a:t> Gates</a:t>
             </a:r>
           </a:p>
           <a:p>
@@ -21507,6 +23334,11 @@
               </a:defRPr>
             </a:pPr>
             <a:r>
+              <a:rPr lang="fr-FR" noProof="0" dirty="0">
+                <a:solidFill>
+                  <a:srgbClr val="FFFFFF"/>
+                </a:solidFill>
+              </a:rPr>
               <a:t>Min 1000 ratings</a:t>
             </a:r>
           </a:p>
@@ -21520,8 +23352,22 @@
               </a:defRPr>
             </a:pPr>
             <a:r>
-              <a:t>Min 50 users</a:t>
-            </a:r>
+              <a:rPr lang="fr-FR" noProof="0" dirty="0">
+                <a:solidFill>
+                  <a:srgbClr val="FFFFFF"/>
+                </a:solidFill>
+              </a:rPr>
+              <a:t>Min 50 </a:t>
+            </a:r>
+            <a:r>
+              <a:rPr lang="fr-FR" noProof="0" dirty="0" err="1">
+                <a:solidFill>
+                  <a:srgbClr val="FFFFFF"/>
+                </a:solidFill>
+              </a:rPr>
+              <a:t>users</a:t>
+            </a:r>
+            <a:endParaRPr lang="fr-FR" noProof="0" dirty="0"/>
           </a:p>
         </p:txBody>
       </p:sp>
@@ -21565,6 +23411,7 @@
           <a:lstStyle/>
           <a:p>
             <a:pPr algn="ctr"/>
+            <a:endParaRPr lang="fr-FR" noProof="0" dirty="0"/>
           </a:p>
         </p:txBody>
       </p:sp>
@@ -21604,7 +23451,7 @@
           </a:fontRef>
         </p:style>
         <p:txBody>
-          <a:bodyPr rtlCol="0" anchor="ctr" wrap="square"/>
+          <a:bodyPr wrap="square" rtlCol="0" anchor="ctr"/>
           <a:lstStyle/>
           <a:p>
             <a:pPr algn="ctr">
@@ -21622,6 +23469,11 @@
               </a:defRPr>
             </a:pPr>
             <a:r>
+              <a:rPr lang="fr-FR" noProof="0" dirty="0">
+                <a:solidFill>
+                  <a:srgbClr val="FFFFFF"/>
+                </a:solidFill>
+              </a:rPr>
               <a:t>TRAIN</a:t>
             </a:r>
           </a:p>
@@ -21635,6 +23487,11 @@
               </a:defRPr>
             </a:pPr>
             <a:r>
+              <a:rPr lang="fr-FR" noProof="0" dirty="0">
+                <a:solidFill>
+                  <a:srgbClr val="FFFFFF"/>
+                </a:solidFill>
+              </a:rPr>
               <a:t>Modèle NCF</a:t>
             </a:r>
           </a:p>
@@ -21648,6 +23505,11 @@
               </a:defRPr>
             </a:pPr>
             <a:r>
+              <a:rPr lang="fr-FR" noProof="0" dirty="0">
+                <a:solidFill>
+                  <a:srgbClr val="FFFFFF"/>
+                </a:solidFill>
+              </a:rPr>
               <a:t>80/20 split</a:t>
             </a:r>
           </a:p>
@@ -21661,8 +23523,22 @@
               </a:defRPr>
             </a:pPr>
             <a:r>
-              <a:t>80 epochs</a:t>
-            </a:r>
+              <a:rPr lang="fr-FR" noProof="0" dirty="0">
+                <a:solidFill>
+                  <a:srgbClr val="FFFFFF"/>
+                </a:solidFill>
+              </a:rPr>
+              <a:t>80 </a:t>
+            </a:r>
+            <a:r>
+              <a:rPr lang="fr-FR" noProof="0" dirty="0" err="1">
+                <a:solidFill>
+                  <a:srgbClr val="FFFFFF"/>
+                </a:solidFill>
+              </a:rPr>
+              <a:t>epochs</a:t>
+            </a:r>
+            <a:endParaRPr lang="fr-FR" noProof="0" dirty="0"/>
           </a:p>
         </p:txBody>
       </p:sp>
@@ -21706,6 +23582,7 @@
           <a:lstStyle/>
           <a:p>
             <a:pPr algn="ctr"/>
+            <a:endParaRPr lang="fr-FR" noProof="0" dirty="0"/>
           </a:p>
         </p:txBody>
       </p:sp>
@@ -21745,7 +23622,7 @@
           </a:fontRef>
         </p:style>
         <p:txBody>
-          <a:bodyPr rtlCol="0" anchor="ctr" wrap="square"/>
+          <a:bodyPr wrap="square" rtlCol="0" anchor="ctr"/>
           <a:lstStyle/>
           <a:p>
             <a:pPr algn="ctr">
@@ -21763,6 +23640,11 @@
               </a:defRPr>
             </a:pPr>
             <a:r>
+              <a:rPr lang="fr-FR" noProof="0" dirty="0">
+                <a:solidFill>
+                  <a:srgbClr val="FFFFFF"/>
+                </a:solidFill>
+              </a:rPr>
               <a:t>EVALUATE</a:t>
             </a:r>
           </a:p>
@@ -21776,6 +23658,11 @@
               </a:defRPr>
             </a:pPr>
             <a:r>
+              <a:rPr lang="fr-FR" noProof="0" dirty="0">
+                <a:solidFill>
+                  <a:srgbClr val="FFFFFF"/>
+                </a:solidFill>
+              </a:rPr>
               <a:t>Métriques</a:t>
             </a:r>
           </a:p>
@@ -21789,6 +23676,11 @@
               </a:defRPr>
             </a:pPr>
             <a:r>
+              <a:rPr lang="fr-FR" noProof="0" dirty="0">
+                <a:solidFill>
+                  <a:srgbClr val="FFFFFF"/>
+                </a:solidFill>
+              </a:rPr>
               <a:t>RMSE ≤ 1.2</a:t>
             </a:r>
           </a:p>
@@ -21802,7 +23694,20 @@
               </a:defRPr>
             </a:pPr>
             <a:r>
-              <a:t>HitRate ≥ 30%</a:t>
+              <a:rPr lang="fr-FR" noProof="0" dirty="0" err="1">
+                <a:solidFill>
+                  <a:srgbClr val="FFFFFF"/>
+                </a:solidFill>
+              </a:rPr>
+              <a:t>HitRate</a:t>
+            </a:r>
+            <a:r>
+              <a:rPr lang="fr-FR" noProof="0" dirty="0">
+                <a:solidFill>
+                  <a:srgbClr val="FFFFFF"/>
+                </a:solidFill>
+              </a:rPr>
+              <a:t> ≥ 30%</a:t>
             </a:r>
           </a:p>
         </p:txBody>
@@ -21843,7 +23748,7 @@
           </a:fontRef>
         </p:style>
         <p:txBody>
-          <a:bodyPr rtlCol="0" anchor="ctr" wrap="square"/>
+          <a:bodyPr wrap="square" rtlCol="0" anchor="ctr"/>
           <a:lstStyle/>
           <a:p>
             <a:pPr algn="ctr">
@@ -21861,6 +23766,11 @@
               </a:defRPr>
             </a:pPr>
             <a:r>
+              <a:rPr lang="fr-FR" noProof="0" dirty="0">
+                <a:solidFill>
+                  <a:srgbClr val="FFFFFF"/>
+                </a:solidFill>
+              </a:rPr>
               <a:t>GitHub Actions CI/CD — Exécution automatique sur chaque push/PR vers main</a:t>
             </a:r>
           </a:p>
@@ -21875,7 +23785,7 @@
         <p:spPr>
           <a:xfrm>
             <a:off x="457200" y="4206240"/>
-            <a:ext cx="10972800" cy="1645920"/>
+            <a:ext cx="10972800" cy="1051570"/>
           </a:xfrm>
           <a:prstGeom prst="rect">
             <a:avLst/>
@@ -21897,6 +23807,7 @@
               </a:defRPr>
             </a:pPr>
             <a:r>
+              <a:rPr lang="fr-FR" noProof="0" dirty="0"/>
               <a:t>Pipeline automatisé:</a:t>
             </a:r>
           </a:p>
@@ -21916,7 +23827,32 @@
               </a:defRPr>
             </a:pPr>
             <a:r>
-              <a:t>1. Checkout code  →  2. Setup Python 3.11  →  3. Install deps  →  4. Generate DB  →  5. Run pipeline  →  6. Run evaluate.py</a:t>
+              <a:rPr lang="fr-FR" noProof="0" dirty="0"/>
+              <a:t>1. </a:t>
+            </a:r>
+            <a:r>
+              <a:rPr lang="fr-FR" noProof="0" dirty="0" err="1"/>
+              <a:t>Checkout</a:t>
+            </a:r>
+            <a:r>
+              <a:rPr lang="fr-FR" noProof="0" dirty="0"/>
+              <a:t> code  →  2. Setup Python 3.11  →  3. Install </a:t>
+            </a:r>
+            <a:r>
+              <a:rPr lang="fr-FR" noProof="0" dirty="0" err="1"/>
+              <a:t>deps</a:t>
+            </a:r>
+            <a:r>
+              <a:rPr lang="fr-FR" noProof="0" dirty="0"/>
+              <a:t>  →  4. Take data </a:t>
+            </a:r>
+            <a:r>
+              <a:rPr lang="fr-FR" noProof="0" dirty="0" err="1"/>
+              <a:t>from</a:t>
+            </a:r>
+            <a:r>
+              <a:rPr lang="fr-FR" noProof="0" dirty="0"/>
+              <a:t> DB  →  5. Run pipeline  →  6. Run evaluate.py</a:t>
             </a:r>
           </a:p>
           <a:p>
@@ -21935,8 +23871,30 @@
               </a:defRPr>
             </a:pPr>
             <a:r>
-              <a:t>7. Upload quality_report.json comme artifact</a:t>
-            </a:r>
+              <a:rPr lang="fr-FR" noProof="0" dirty="0"/>
+              <a:t>7. </a:t>
+            </a:r>
+            <a:r>
+              <a:rPr lang="fr-FR" noProof="0" dirty="0" err="1"/>
+              <a:t>Upload</a:t>
+            </a:r>
+            <a:r>
+              <a:rPr lang="fr-FR" noProof="0" dirty="0"/>
+              <a:t> </a:t>
+            </a:r>
+            <a:r>
+              <a:rPr lang="fr-FR" noProof="0" dirty="0" err="1"/>
+              <a:t>quality_report.json</a:t>
+            </a:r>
+            <a:r>
+              <a:rPr lang="fr-FR" noProof="0" dirty="0"/>
+              <a:t> comme </a:t>
+            </a:r>
+            <a:r>
+              <a:rPr lang="fr-FR" noProof="0" dirty="0" err="1"/>
+              <a:t>artifact</a:t>
+            </a:r>
+            <a:endParaRPr lang="fr-FR" noProof="0" dirty="0"/>
           </a:p>
           <a:p>
             <a:pPr algn="l">
@@ -21954,7 +23912,32 @@
               </a:defRPr>
             </a:pPr>
             <a:r>
-              <a:t>Si quality gates échouent (RMSE &gt; 1.2 ou HitRate &lt; 30%) → CI fail → PR bloquée</a:t>
+              <a:rPr lang="fr-FR" noProof="0" dirty="0"/>
+              <a:t>Si </a:t>
+            </a:r>
+            <a:r>
+              <a:rPr lang="fr-FR" noProof="0" dirty="0" err="1"/>
+              <a:t>quality</a:t>
+            </a:r>
+            <a:r>
+              <a:rPr lang="fr-FR" noProof="0" dirty="0"/>
+              <a:t> </a:t>
+            </a:r>
+            <a:r>
+              <a:rPr lang="fr-FR" noProof="0" dirty="0" err="1"/>
+              <a:t>gates</a:t>
+            </a:r>
+            <a:r>
+              <a:rPr lang="fr-FR" noProof="0" dirty="0"/>
+              <a:t> échouent (RMSE &gt; 1.2 ou </a:t>
+            </a:r>
+            <a:r>
+              <a:rPr lang="fr-FR" noProof="0" dirty="0" err="1"/>
+              <a:t>HitRate</a:t>
+            </a:r>
+            <a:r>
+              <a:rPr lang="fr-FR" noProof="0" dirty="0"/>
+              <a:t> &lt; 30%) → CI fail → PR bloquée</a:t>
             </a:r>
           </a:p>
         </p:txBody>
@@ -21967,8 +23950,8 @@
 </p:sld>
 </file>
 
-<file path=ppt/slides/slide11.xml><?xml version="1.0" encoding="utf-8"?>
-<p:sld xmlns:a="http://schemas.openxmlformats.org/drawingml/2006/main" xmlns:p="http://schemas.openxmlformats.org/presentationml/2006/main" xmlns:r="http://schemas.openxmlformats.org/officeDocument/2006/relationships">
+<file path=ppt/slides/slide13.xml><?xml version="1.0" encoding="utf-8"?>
+<p:sld xmlns:a="http://schemas.openxmlformats.org/drawingml/2006/main" xmlns:r="http://schemas.openxmlformats.org/officeDocument/2006/relationships" xmlns:p="http://schemas.openxmlformats.org/presentationml/2006/main">
   <p:cSld>
     <p:spTree>
       <p:nvGrpSpPr>
@@ -21976,7 +23959,14 @@
         <p:cNvGrpSpPr/>
         <p:nvPr/>
       </p:nvGrpSpPr>
-      <p:grpSpPr/>
+      <p:grpSpPr>
+        <a:xfrm>
+          <a:off x="0" y="0"/>
+          <a:ext cx="0" cy="0"/>
+          <a:chOff x="0" y="0"/>
+          <a:chExt cx="0" cy="0"/>
+        </a:xfrm>
+      </p:grpSpPr>
       <p:sp>
         <p:nvSpPr>
           <p:cNvPr id="2" name="Title 1"/>
@@ -21993,6 +23983,7 @@
           <a:lstStyle/>
           <a:p>
             <a:r>
+              <a:rPr lang="fr-FR" noProof="0" dirty="0"/>
               <a:t>Concept Clé : Factorisation Matricielle</a:t>
             </a:r>
           </a:p>
@@ -22034,7 +24025,7 @@
           </a:fontRef>
         </p:style>
         <p:txBody>
-          <a:bodyPr rtlCol="0" anchor="ctr" wrap="square"/>
+          <a:bodyPr wrap="square" rtlCol="0" anchor="ctr"/>
           <a:lstStyle/>
           <a:p>
             <a:pPr algn="ctr">
@@ -22052,6 +24043,11 @@
               </a:defRPr>
             </a:pPr>
             <a:r>
+              <a:rPr lang="fr-FR" noProof="0" dirty="0">
+                <a:solidFill>
+                  <a:srgbClr val="FFFFFF"/>
+                </a:solidFill>
+              </a:rPr>
               <a:t>Matrice R (creuse)</a:t>
             </a:r>
           </a:p>
@@ -22065,7 +24061,7 @@
         </p:nvSpPr>
         <p:spPr>
           <a:xfrm>
-            <a:off x="457200" y="2194560"/>
+            <a:off x="822960" y="2066544"/>
             <a:ext cx="3291840" cy="1188720"/>
           </a:xfrm>
           <a:prstGeom prst="rect">
@@ -22088,6 +24084,11 @@
               </a:defRPr>
             </a:pPr>
             <a:r>
+              <a:rPr lang="fr-FR" noProof="0" dirty="0">
+                <a:solidFill>
+                  <a:srgbClr val="FFFFFF"/>
+                </a:solidFill>
+              </a:rPr>
               <a:t>         p1    p2    p3    p4</a:t>
             </a:r>
           </a:p>
@@ -22107,6 +24108,11 @@
               </a:defRPr>
             </a:pPr>
             <a:r>
+              <a:rPr lang="fr-FR" noProof="0" dirty="0">
+                <a:solidFill>
+                  <a:srgbClr val="FFFFFF"/>
+                </a:solidFill>
+              </a:rPr>
               <a:t>u1   4.0    ?    3.2    ?</a:t>
             </a:r>
           </a:p>
@@ -22126,6 +24132,11 @@
               </a:defRPr>
             </a:pPr>
             <a:r>
+              <a:rPr lang="fr-FR" noProof="0" dirty="0">
+                <a:solidFill>
+                  <a:srgbClr val="FFFFFF"/>
+                </a:solidFill>
+              </a:rPr>
               <a:t>u2    ?    5.0    ?    2.1</a:t>
             </a:r>
           </a:p>
@@ -22145,6 +24156,11 @@
               </a:defRPr>
             </a:pPr>
             <a:r>
+              <a:rPr lang="fr-FR" noProof="0" dirty="0">
+                <a:solidFill>
+                  <a:srgbClr val="FFFFFF"/>
+                </a:solidFill>
+              </a:rPr>
               <a:t>u3   1.5    ?     ?    4.0</a:t>
             </a:r>
           </a:p>
@@ -22164,6 +24180,11 @@
               </a:defRPr>
             </a:pPr>
             <a:r>
+              <a:rPr lang="fr-FR" noProof="0" dirty="0">
+                <a:solidFill>
+                  <a:srgbClr val="FFFFFF"/>
+                </a:solidFill>
+              </a:rPr>
               <a:t>? = inconnu (~65% de la matrice)</a:t>
             </a:r>
           </a:p>
@@ -22200,6 +24221,11 @@
               </a:defRPr>
             </a:pPr>
             <a:r>
+              <a:rPr lang="fr-FR" noProof="0" dirty="0">
+                <a:solidFill>
+                  <a:srgbClr val="333333"/>
+                </a:solidFill>
+              </a:rPr>
               <a:t>≈</a:t>
             </a:r>
           </a:p>
@@ -22241,7 +24267,7 @@
           </a:fontRef>
         </p:style>
         <p:txBody>
-          <a:bodyPr rtlCol="0" anchor="ctr" wrap="square"/>
+          <a:bodyPr wrap="square" rtlCol="0" anchor="ctr"/>
           <a:lstStyle/>
           <a:p>
             <a:pPr algn="ctr">
@@ -22259,6 +24285,11 @@
               </a:defRPr>
             </a:pPr>
             <a:r>
+              <a:rPr lang="fr-FR" noProof="0" dirty="0">
+                <a:solidFill>
+                  <a:srgbClr val="FFFFFF"/>
+                </a:solidFill>
+              </a:rPr>
               <a:t>U (utilisateurs, k=2)</a:t>
             </a:r>
           </a:p>
@@ -22295,6 +24326,11 @@
               </a:defRPr>
             </a:pPr>
             <a:r>
+              <a:rPr lang="fr-FR" noProof="0" dirty="0">
+                <a:solidFill>
+                  <a:srgbClr val="FFFFFF"/>
+                </a:solidFill>
+              </a:rPr>
               <a:t>u1  [0.9,  0.8]</a:t>
             </a:r>
           </a:p>
@@ -22314,6 +24350,11 @@
               </a:defRPr>
             </a:pPr>
             <a:r>
+              <a:rPr lang="fr-FR" noProof="0" dirty="0">
+                <a:solidFill>
+                  <a:srgbClr val="FFFFFF"/>
+                </a:solidFill>
+              </a:rPr>
               <a:t>u2  [0.7, -0.5]</a:t>
             </a:r>
           </a:p>
@@ -22333,6 +24374,11 @@
               </a:defRPr>
             </a:pPr>
             <a:r>
+              <a:rPr lang="fr-FR" noProof="0" dirty="0">
+                <a:solidFill>
+                  <a:srgbClr val="FFFFFF"/>
+                </a:solidFill>
+              </a:rPr>
               <a:t>u3  [-0.6, 0.9]</a:t>
             </a:r>
           </a:p>
@@ -22352,6 +24398,11 @@
               </a:defRPr>
             </a:pPr>
             <a:r>
+              <a:rPr lang="fr-FR" noProof="0" dirty="0">
+                <a:solidFill>
+                  <a:srgbClr val="FFFFFF"/>
+                </a:solidFill>
+              </a:rPr>
               <a:t>Chaque ligne = goût utilisateur</a:t>
             </a:r>
           </a:p>
@@ -22388,6 +24439,7 @@
               </a:defRPr>
             </a:pPr>
             <a:r>
+              <a:rPr lang="fr-FR" noProof="0" dirty="0"/>
               <a:t>×</a:t>
             </a:r>
           </a:p>
@@ -22429,7 +24481,7 @@
           </a:fontRef>
         </p:style>
         <p:txBody>
-          <a:bodyPr rtlCol="0" anchor="ctr" wrap="square"/>
+          <a:bodyPr wrap="square" rtlCol="0" anchor="ctr"/>
           <a:lstStyle/>
           <a:p>
             <a:pPr algn="ctr">
@@ -22447,6 +24499,11 @@
               </a:defRPr>
             </a:pPr>
             <a:r>
+              <a:rPr lang="fr-FR" noProof="0" dirty="0">
+                <a:solidFill>
+                  <a:srgbClr val="FFFFFF"/>
+                </a:solidFill>
+              </a:rPr>
               <a:t>Vᵀ (items, k=2)</a:t>
             </a:r>
           </a:p>
@@ -22483,6 +24540,11 @@
               </a:defRPr>
             </a:pPr>
             <a:r>
+              <a:rPr lang="fr-FR" noProof="0" dirty="0">
+                <a:solidFill>
+                  <a:srgbClr val="FFFFFF"/>
+                </a:solidFill>
+              </a:rPr>
               <a:t>p1  [ 0.9, -0.3]</a:t>
             </a:r>
           </a:p>
@@ -22502,6 +24564,11 @@
               </a:defRPr>
             </a:pPr>
             <a:r>
+              <a:rPr lang="fr-FR" noProof="0" dirty="0">
+                <a:solidFill>
+                  <a:srgbClr val="FFFFFF"/>
+                </a:solidFill>
+              </a:rPr>
               <a:t>p2  [ 0.8,  0.1]</a:t>
             </a:r>
           </a:p>
@@ -22521,6 +24588,11 @@
               </a:defRPr>
             </a:pPr>
             <a:r>
+              <a:rPr lang="fr-FR" noProof="0" dirty="0">
+                <a:solidFill>
+                  <a:srgbClr val="FFFFFF"/>
+                </a:solidFill>
+              </a:rPr>
               <a:t>p3  [ 0.5,  0.9]</a:t>
             </a:r>
           </a:p>
@@ -22540,6 +24612,11 @@
               </a:defRPr>
             </a:pPr>
             <a:r>
+              <a:rPr lang="fr-FR" noProof="0" dirty="0">
+                <a:solidFill>
+                  <a:srgbClr val="FFFFFF"/>
+                </a:solidFill>
+              </a:rPr>
               <a:t>Chaque ligne = caractéristiques item</a:t>
             </a:r>
           </a:p>
@@ -22581,7 +24658,7 @@
           </a:fontRef>
         </p:style>
         <p:txBody>
-          <a:bodyPr rtlCol="0" anchor="ctr" wrap="square"/>
+          <a:bodyPr wrap="square" rtlCol="0" anchor="ctr"/>
           <a:lstStyle/>
           <a:p>
             <a:pPr algn="ctr">
@@ -22599,6 +24676,11 @@
               </a:defRPr>
             </a:pPr>
             <a:r>
+              <a:rPr lang="fr-FR" noProof="0" dirty="0">
+                <a:solidFill>
+                  <a:srgbClr val="FFFFFF"/>
+                </a:solidFill>
+              </a:rPr>
               <a:t>Prédiction = produit scalaire du vecteur utilisateur × vecteur item</a:t>
             </a:r>
           </a:p>
@@ -22635,6 +24717,7 @@
               </a:defRPr>
             </a:pPr>
             <a:r>
+              <a:rPr lang="fr-FR" noProof="0" dirty="0"/>
               <a:t>u1 × p3 = [0.9, 0.8] · [0.5, 0.9] = 0.45 + 0.72 = 1.17  (match élevé !)</a:t>
             </a:r>
           </a:p>
@@ -22654,6 +24737,7 @@
               </a:defRPr>
             </a:pPr>
             <a:r>
+              <a:rPr lang="fr-FR" noProof="0" dirty="0"/>
               <a:t>u3 × p1 = [-0.6, 0.9] · [0.9, -0.3] = -0.54 + (-0.27) = -0.81  (match faible)</a:t>
             </a:r>
           </a:p>
@@ -22673,6 +24757,7 @@
               </a:defRPr>
             </a:pPr>
             <a:r>
+              <a:rPr lang="fr-FR" noProof="0" dirty="0"/>
               <a:t>L'entraînement ajuste U et V pour que U × Vᵀ ≈ R sur les entrées connues. Les entrées inconnues sont remplies automatiquement → ce sont les recommandations.</a:t>
             </a:r>
           </a:p>
@@ -22686,8 +24771,8 @@
 </p:sld>
 </file>
 
-<file path=ppt/slides/slide12.xml><?xml version="1.0" encoding="utf-8"?>
-<p:sld xmlns:a="http://schemas.openxmlformats.org/drawingml/2006/main" xmlns:p="http://schemas.openxmlformats.org/presentationml/2006/main" xmlns:r="http://schemas.openxmlformats.org/officeDocument/2006/relationships">
+<file path=ppt/slides/slide14.xml><?xml version="1.0" encoding="utf-8"?>
+<p:sld xmlns:a="http://schemas.openxmlformats.org/drawingml/2006/main" xmlns:r="http://schemas.openxmlformats.org/officeDocument/2006/relationships" xmlns:p="http://schemas.openxmlformats.org/presentationml/2006/main">
   <p:cSld>
     <p:spTree>
       <p:nvGrpSpPr>
@@ -22695,7 +24780,14 @@
         <p:cNvGrpSpPr/>
         <p:nvPr/>
       </p:nvGrpSpPr>
-      <p:grpSpPr/>
+      <p:grpSpPr>
+        <a:xfrm>
+          <a:off x="0" y="0"/>
+          <a:ext cx="0" cy="0"/>
+          <a:chOff x="0" y="0"/>
+          <a:chExt cx="0" cy="0"/>
+        </a:xfrm>
+      </p:grpSpPr>
       <p:sp>
         <p:nvSpPr>
           <p:cNvPr id="2" name="Title 1"/>
@@ -22712,779 +24804,7 @@
           <a:lstStyle/>
           <a:p>
             <a:r>
-              <a:t>Scalabilité &amp; Améliorations Futures</a:t>
-            </a:r>
-          </a:p>
-        </p:txBody>
-      </p:sp>
-      <p:sp>
-        <p:nvSpPr>
-          <p:cNvPr id="3" name="Rounded Rectangle 2"/>
-          <p:cNvSpPr/>
-          <p:nvPr/>
-        </p:nvSpPr>
-        <p:spPr>
-          <a:xfrm>
-            <a:off x="365760" y="1645920"/>
-            <a:ext cx="5303520" cy="2286000"/>
-          </a:xfrm>
-          <a:prstGeom prst="roundRect">
-            <a:avLst/>
-          </a:prstGeom>
-          <a:solidFill>
-            <a:srgbClr val="888888"/>
-          </a:solidFill>
-          <a:ln>
-            <a:noFill/>
-          </a:ln>
-        </p:spPr>
-        <p:style>
-          <a:lnRef idx="1">
-            <a:schemeClr val="accent1"/>
-          </a:lnRef>
-          <a:fillRef idx="3">
-            <a:schemeClr val="accent1"/>
-          </a:fillRef>
-          <a:effectRef idx="2">
-            <a:schemeClr val="accent1"/>
-          </a:effectRef>
-          <a:fontRef idx="minor">
-            <a:schemeClr val="lt1"/>
-          </a:fontRef>
-        </p:style>
-        <p:txBody>
-          <a:bodyPr rtlCol="0" anchor="ctr" wrap="square"/>
-          <a:lstStyle/>
-          <a:p>
-            <a:pPr algn="ctr">
-              <a:spcBef>
-                <a:spcPts val="0"/>
-              </a:spcBef>
-              <a:spcAft>
-                <a:spcPts val="0"/>
-              </a:spcAft>
-              <a:defRPr sz="1400" b="1">
-                <a:solidFill>
-                  <a:srgbClr val="FFFFFF"/>
-                </a:solidFill>
-                <a:latin typeface="Calibri"/>
-              </a:defRPr>
-            </a:pPr>
-            <a:r>
-              <a:t>Limitations Actuelles</a:t>
-            </a:r>
-          </a:p>
-        </p:txBody>
-      </p:sp>
-      <p:sp>
-        <p:nvSpPr>
-          <p:cNvPr id="4" name="TextBox 3"/>
-          <p:cNvSpPr txBox="1"/>
-          <p:nvPr/>
-        </p:nvSpPr>
-        <p:spPr>
-          <a:xfrm>
-            <a:off x="548640" y="2194560"/>
-            <a:ext cx="4937760" cy="1645920"/>
-          </a:xfrm>
-          <a:prstGeom prst="rect">
-            <a:avLst/>
-          </a:prstGeom>
-          <a:noFill/>
-        </p:spPr>
-        <p:txBody>
-          <a:bodyPr wrap="square">
-            <a:spAutoFit/>
-          </a:bodyPr>
-          <a:lstStyle/>
-          <a:p>
-            <a:pPr algn="l">
-              <a:defRPr sz="1200" b="0">
-                <a:solidFill>
-                  <a:srgbClr val="333333"/>
-                </a:solidFill>
-                <a:latin typeface="Calibri"/>
-              </a:defRPr>
-            </a:pPr>
-            <a:r>
-              <a:t>• Scoring brute-force (user × tous les items)</a:t>
-            </a:r>
-          </a:p>
-          <a:p>
-            <a:pPr algn="l">
-              <a:spcBef>
-                <a:spcPts val="400"/>
-              </a:spcBef>
-              <a:spcAft>
-                <a:spcPts val="200"/>
-              </a:spcAft>
-              <a:defRPr sz="1200" b="0">
-                <a:solidFill>
-                  <a:srgbClr val="333333"/>
-                </a:solidFill>
-                <a:latin typeface="Calibri"/>
-              </a:defRPr>
-            </a:pPr>
-            <a:r>
-              <a:t>• Fonctionne pour 500 × 200 = 100K paires</a:t>
-            </a:r>
-          </a:p>
-          <a:p>
-            <a:pPr algn="l">
-              <a:spcBef>
-                <a:spcPts val="400"/>
-              </a:spcBef>
-              <a:spcAft>
-                <a:spcPts val="200"/>
-              </a:spcAft>
-              <a:defRPr sz="1200" b="0">
-                <a:solidFill>
-                  <a:srgbClr val="333333"/>
-                </a:solidFill>
-                <a:latin typeface="Calibri"/>
-              </a:defRPr>
-            </a:pPr>
-            <a:r>
-              <a:t>• Ne passe pas à l'échelle pour des millions d'items</a:t>
-            </a:r>
-          </a:p>
-          <a:p>
-            <a:pPr algn="l">
-              <a:spcBef>
-                <a:spcPts val="400"/>
-              </a:spcBef>
-              <a:spcAft>
-                <a:spcPts val="200"/>
-              </a:spcAft>
-              <a:defRPr sz="1200" b="0">
-                <a:solidFill>
-                  <a:srgbClr val="333333"/>
-                </a:solidFill>
-                <a:latin typeface="Calibri"/>
-              </a:defRPr>
-            </a:pPr>
-            <a:r>
-              <a:t>• Données synthétiques (patterns gaussiens)</a:t>
-            </a:r>
-          </a:p>
-          <a:p>
-            <a:pPr algn="l">
-              <a:spcBef>
-                <a:spcPts val="400"/>
-              </a:spcBef>
-              <a:spcAft>
-                <a:spcPts val="200"/>
-              </a:spcAft>
-              <a:defRPr sz="1200" b="0">
-                <a:solidFill>
-                  <a:srgbClr val="333333"/>
-                </a:solidFill>
-                <a:latin typeface="Calibri"/>
-              </a:defRPr>
-            </a:pPr>
-            <a:r>
-              <a:t>• RMSE 0.67 non comparable aux benchmarks réels</a:t>
-            </a:r>
-          </a:p>
-        </p:txBody>
-      </p:sp>
-      <p:sp>
-        <p:nvSpPr>
-          <p:cNvPr id="5" name="Rounded Rectangle 4"/>
-          <p:cNvSpPr/>
-          <p:nvPr/>
-        </p:nvSpPr>
-        <p:spPr>
-          <a:xfrm>
-            <a:off x="6217920" y="1645920"/>
-            <a:ext cx="5303520" cy="2286000"/>
-          </a:xfrm>
-          <a:prstGeom prst="roundRect">
-            <a:avLst/>
-          </a:prstGeom>
-          <a:solidFill>
-            <a:srgbClr val="4472C4"/>
-          </a:solidFill>
-          <a:ln>
-            <a:noFill/>
-          </a:ln>
-        </p:spPr>
-        <p:style>
-          <a:lnRef idx="1">
-            <a:schemeClr val="accent1"/>
-          </a:lnRef>
-          <a:fillRef idx="3">
-            <a:schemeClr val="accent1"/>
-          </a:fillRef>
-          <a:effectRef idx="2">
-            <a:schemeClr val="accent1"/>
-          </a:effectRef>
-          <a:fontRef idx="minor">
-            <a:schemeClr val="lt1"/>
-          </a:fontRef>
-        </p:style>
-        <p:txBody>
-          <a:bodyPr rtlCol="0" anchor="ctr" wrap="square"/>
-          <a:lstStyle/>
-          <a:p>
-            <a:pPr algn="ctr">
-              <a:spcBef>
-                <a:spcPts val="0"/>
-              </a:spcBef>
-              <a:spcAft>
-                <a:spcPts val="0"/>
-              </a:spcAft>
-              <a:defRPr sz="1400" b="1">
-                <a:solidFill>
-                  <a:srgbClr val="FFFFFF"/>
-                </a:solidFill>
-                <a:latin typeface="Calibri"/>
-              </a:defRPr>
-            </a:pPr>
-            <a:r>
-              <a:t>Scaling Production : Deux Étapes</a:t>
-            </a:r>
-          </a:p>
-        </p:txBody>
-      </p:sp>
-      <p:sp>
-        <p:nvSpPr>
-          <p:cNvPr id="6" name="TextBox 5"/>
-          <p:cNvSpPr txBox="1"/>
-          <p:nvPr/>
-        </p:nvSpPr>
-        <p:spPr>
-          <a:xfrm>
-            <a:off x="6400800" y="2194560"/>
-            <a:ext cx="4937760" cy="1645920"/>
-          </a:xfrm>
-          <a:prstGeom prst="rect">
-            <a:avLst/>
-          </a:prstGeom>
-          <a:noFill/>
-        </p:spPr>
-        <p:txBody>
-          <a:bodyPr wrap="square">
-            <a:spAutoFit/>
-          </a:bodyPr>
-          <a:lstStyle/>
-          <a:p>
-            <a:pPr algn="l">
-              <a:defRPr sz="1200" b="1">
-                <a:solidFill>
-                  <a:srgbClr val="333333"/>
-                </a:solidFill>
-                <a:latin typeface="Calibri"/>
-              </a:defRPr>
-            </a:pPr>
-            <a:r>
-              <a:t>Étape 1 — Recall (FAISS / ANN)</a:t>
-            </a:r>
-          </a:p>
-          <a:p>
-            <a:pPr algn="l">
-              <a:spcBef>
-                <a:spcPts val="400"/>
-              </a:spcBef>
-              <a:spcAft>
-                <a:spcPts val="200"/>
-              </a:spcAft>
-              <a:defRPr sz="1200" b="0">
-                <a:solidFill>
-                  <a:srgbClr val="333333"/>
-                </a:solidFill>
-                <a:latin typeface="Calibri"/>
-              </a:defRPr>
-            </a:pPr>
-            <a:r>
-              <a:t>1M items → ~1000 candidats en O(log n)</a:t>
-            </a:r>
-          </a:p>
-          <a:p>
-            <a:pPr algn="l">
-              <a:spcBef>
-                <a:spcPts val="400"/>
-              </a:spcBef>
-              <a:spcAft>
-                <a:spcPts val="200"/>
-              </a:spcAft>
-              <a:defRPr sz="1200" b="1">
-                <a:solidFill>
-                  <a:srgbClr val="333333"/>
-                </a:solidFill>
-                <a:latin typeface="Calibri"/>
-              </a:defRPr>
-            </a:pPr>
-            <a:r>
-              <a:t>Étape 2 — Ranking (NCF)</a:t>
-            </a:r>
-          </a:p>
-          <a:p>
-            <a:pPr algn="l">
-              <a:spcBef>
-                <a:spcPts val="400"/>
-              </a:spcBef>
-              <a:spcAft>
-                <a:spcPts val="200"/>
-              </a:spcAft>
-              <a:defRPr sz="1200" b="0">
-                <a:solidFill>
-                  <a:srgbClr val="333333"/>
-                </a:solidFill>
-                <a:latin typeface="Calibri"/>
-              </a:defRPr>
-            </a:pPr>
-            <a:r>
-              <a:t>Scorer uniquement 1000 candidats</a:t>
-            </a:r>
-          </a:p>
-          <a:p>
-            <a:pPr algn="l">
-              <a:spcBef>
-                <a:spcPts val="400"/>
-              </a:spcBef>
-              <a:spcAft>
-                <a:spcPts val="200"/>
-              </a:spcAft>
-              <a:defRPr sz="1200" b="0">
-                <a:solidFill>
-                  <a:srgbClr val="333333"/>
-                </a:solidFill>
-                <a:latin typeface="Calibri"/>
-              </a:defRPr>
-            </a:pPr>
-            <a:r>
-              <a:t>Retourner Top-K à l'utilisateur</a:t>
-            </a:r>
-          </a:p>
-        </p:txBody>
-      </p:sp>
-      <p:sp>
-        <p:nvSpPr>
-          <p:cNvPr id="7" name="Rounded Rectangle 6"/>
-          <p:cNvSpPr/>
-          <p:nvPr/>
-        </p:nvSpPr>
-        <p:spPr>
-          <a:xfrm>
-            <a:off x="365760" y="4389120"/>
-            <a:ext cx="2468880" cy="1463040"/>
-          </a:xfrm>
-          <a:prstGeom prst="roundRect">
-            <a:avLst/>
-          </a:prstGeom>
-          <a:solidFill>
-            <a:srgbClr val="70AD47"/>
-          </a:solidFill>
-          <a:ln>
-            <a:noFill/>
-          </a:ln>
-        </p:spPr>
-        <p:style>
-          <a:lnRef idx="1">
-            <a:schemeClr val="accent1"/>
-          </a:lnRef>
-          <a:fillRef idx="3">
-            <a:schemeClr val="accent1"/>
-          </a:fillRef>
-          <a:effectRef idx="2">
-            <a:schemeClr val="accent1"/>
-          </a:effectRef>
-          <a:fontRef idx="minor">
-            <a:schemeClr val="lt1"/>
-          </a:fontRef>
-        </p:style>
-        <p:txBody>
-          <a:bodyPr rtlCol="0" anchor="ctr" wrap="square"/>
-          <a:lstStyle/>
-          <a:p>
-            <a:pPr algn="ctr">
-              <a:spcBef>
-                <a:spcPts val="0"/>
-              </a:spcBef>
-              <a:spcAft>
-                <a:spcPts val="400"/>
-              </a:spcAft>
-              <a:defRPr sz="1400" b="1">
-                <a:solidFill>
-                  <a:srgbClr val="FFFFFF"/>
-                </a:solidFill>
-                <a:latin typeface="Calibri"/>
-              </a:defRPr>
-            </a:pPr>
-            <a:r>
-              <a:t>Early Stopping</a:t>
-            </a:r>
-          </a:p>
-          <a:p>
-            <a:pPr algn="ctr">
-              <a:defRPr sz="1100">
-                <a:solidFill>
-                  <a:srgbClr val="FFFFFF"/>
-                </a:solidFill>
-                <a:latin typeface="Calibri"/>
-              </a:defRPr>
-            </a:pPr>
-            <a:r>
-              <a:t>Arrêter quand la</a:t>
-            </a:r>
-          </a:p>
-          <a:p>
-            <a:pPr algn="ctr">
-              <a:defRPr sz="1100">
-                <a:solidFill>
-                  <a:srgbClr val="FFFFFF"/>
-                </a:solidFill>
-                <a:latin typeface="Calibri"/>
-              </a:defRPr>
-            </a:pPr>
-            <a:r>
-              <a:t>loss de validation</a:t>
-            </a:r>
-          </a:p>
-          <a:p>
-            <a:pPr algn="ctr">
-              <a:defRPr sz="1100">
-                <a:solidFill>
-                  <a:srgbClr val="FFFFFF"/>
-                </a:solidFill>
-                <a:latin typeface="Calibri"/>
-              </a:defRPr>
-            </a:pPr>
-            <a:r>
-              <a:t>stagne</a:t>
-            </a:r>
-          </a:p>
-        </p:txBody>
-      </p:sp>
-      <p:sp>
-        <p:nvSpPr>
-          <p:cNvPr id="8" name="Rounded Rectangle 7"/>
-          <p:cNvSpPr/>
-          <p:nvPr/>
-        </p:nvSpPr>
-        <p:spPr>
-          <a:xfrm>
-            <a:off x="3200400" y="4389120"/>
-            <a:ext cx="2468880" cy="1463040"/>
-          </a:xfrm>
-          <a:prstGeom prst="roundRect">
-            <a:avLst/>
-          </a:prstGeom>
-          <a:solidFill>
-            <a:srgbClr val="ED7D31"/>
-          </a:solidFill>
-          <a:ln>
-            <a:noFill/>
-          </a:ln>
-        </p:spPr>
-        <p:style>
-          <a:lnRef idx="1">
-            <a:schemeClr val="accent1"/>
-          </a:lnRef>
-          <a:fillRef idx="3">
-            <a:schemeClr val="accent1"/>
-          </a:fillRef>
-          <a:effectRef idx="2">
-            <a:schemeClr val="accent1"/>
-          </a:effectRef>
-          <a:fontRef idx="minor">
-            <a:schemeClr val="lt1"/>
-          </a:fontRef>
-        </p:style>
-        <p:txBody>
-          <a:bodyPr rtlCol="0" anchor="ctr" wrap="square"/>
-          <a:lstStyle/>
-          <a:p>
-            <a:pPr algn="ctr">
-              <a:spcBef>
-                <a:spcPts val="0"/>
-              </a:spcBef>
-              <a:spcAft>
-                <a:spcPts val="400"/>
-              </a:spcAft>
-              <a:defRPr sz="1400" b="1">
-                <a:solidFill>
-                  <a:srgbClr val="FFFFFF"/>
-                </a:solidFill>
-                <a:latin typeface="Calibri"/>
-              </a:defRPr>
-            </a:pPr>
-            <a:r>
-              <a:t>Optuna</a:t>
-            </a:r>
-          </a:p>
-          <a:p>
-            <a:pPr algn="ctr">
-              <a:defRPr sz="1100">
-                <a:solidFill>
-                  <a:srgbClr val="FFFFFF"/>
-                </a:solidFill>
-                <a:latin typeface="Calibri"/>
-              </a:defRPr>
-            </a:pPr>
-            <a:r>
-              <a:t>Recherche bayésienne</a:t>
-            </a:r>
-          </a:p>
-          <a:p>
-            <a:pPr algn="ctr">
-              <a:defRPr sz="1100">
-                <a:solidFill>
-                  <a:srgbClr val="FFFFFF"/>
-                </a:solidFill>
-                <a:latin typeface="Calibri"/>
-              </a:defRPr>
-            </a:pPr>
-            <a:r>
-              <a:t>d'hyperparamètres</a:t>
-            </a:r>
-          </a:p>
-          <a:p>
-            <a:pPr algn="ctr">
-              <a:defRPr sz="1100">
-                <a:solidFill>
-                  <a:srgbClr val="FFFFFF"/>
-                </a:solidFill>
-                <a:latin typeface="Calibri"/>
-              </a:defRPr>
-            </a:pPr>
-            <a:r>
-              <a:t>(50 essais)</a:t>
-            </a:r>
-          </a:p>
-        </p:txBody>
-      </p:sp>
-      <p:sp>
-        <p:nvSpPr>
-          <p:cNvPr id="9" name="Rounded Rectangle 8"/>
-          <p:cNvSpPr/>
-          <p:nvPr/>
-        </p:nvSpPr>
-        <p:spPr>
-          <a:xfrm>
-            <a:off x="6035040" y="4389120"/>
-            <a:ext cx="2468880" cy="1463040"/>
-          </a:xfrm>
-          <a:prstGeom prst="roundRect">
-            <a:avLst/>
-          </a:prstGeom>
-          <a:solidFill>
-            <a:srgbClr val="FFC000"/>
-          </a:solidFill>
-          <a:ln>
-            <a:noFill/>
-          </a:ln>
-        </p:spPr>
-        <p:style>
-          <a:lnRef idx="1">
-            <a:schemeClr val="accent1"/>
-          </a:lnRef>
-          <a:fillRef idx="3">
-            <a:schemeClr val="accent1"/>
-          </a:fillRef>
-          <a:effectRef idx="2">
-            <a:schemeClr val="accent1"/>
-          </a:effectRef>
-          <a:fontRef idx="minor">
-            <a:schemeClr val="lt1"/>
-          </a:fontRef>
-        </p:style>
-        <p:txBody>
-          <a:bodyPr rtlCol="0" anchor="ctr" wrap="square"/>
-          <a:lstStyle/>
-          <a:p>
-            <a:pPr algn="ctr">
-              <a:spcBef>
-                <a:spcPts val="0"/>
-              </a:spcBef>
-              <a:spcAft>
-                <a:spcPts val="400"/>
-              </a:spcAft>
-              <a:defRPr sz="1400" b="1">
-                <a:solidFill>
-                  <a:srgbClr val="FFFFFF"/>
-                </a:solidFill>
-                <a:latin typeface="Calibri"/>
-              </a:defRPr>
-            </a:pPr>
-            <a:r>
-              <a:t>Temporel</a:t>
-            </a:r>
-          </a:p>
-          <a:p>
-            <a:pPr algn="ctr">
-              <a:defRPr sz="1100">
-                <a:solidFill>
-                  <a:srgbClr val="FFFFFF"/>
-                </a:solidFill>
-                <a:latin typeface="Calibri"/>
-              </a:defRPr>
-            </a:pPr>
-            <a:r>
-              <a:t>Pondérer les notes</a:t>
-            </a:r>
-          </a:p>
-          <a:p>
-            <a:pPr algn="ctr">
-              <a:defRPr sz="1100">
-                <a:solidFill>
-                  <a:srgbClr val="FFFFFF"/>
-                </a:solidFill>
-                <a:latin typeface="Calibri"/>
-              </a:defRPr>
-            </a:pPr>
-            <a:r>
-              <a:t>récentes plus que</a:t>
-            </a:r>
-          </a:p>
-          <a:p>
-            <a:pPr algn="ctr">
-              <a:defRPr sz="1100">
-                <a:solidFill>
-                  <a:srgbClr val="FFFFFF"/>
-                </a:solidFill>
-                <a:latin typeface="Calibri"/>
-              </a:defRPr>
-            </a:pPr>
-            <a:r>
-              <a:t>les anciennes</a:t>
-            </a:r>
-          </a:p>
-        </p:txBody>
-      </p:sp>
-      <p:sp>
-        <p:nvSpPr>
-          <p:cNvPr id="10" name="Rounded Rectangle 9"/>
-          <p:cNvSpPr/>
-          <p:nvPr/>
-        </p:nvSpPr>
-        <p:spPr>
-          <a:xfrm>
-            <a:off x="8869680" y="4389120"/>
-            <a:ext cx="2468880" cy="1463040"/>
-          </a:xfrm>
-          <a:prstGeom prst="roundRect">
-            <a:avLst/>
-          </a:prstGeom>
-          <a:solidFill>
-            <a:srgbClr val="954F72"/>
-          </a:solidFill>
-          <a:ln>
-            <a:noFill/>
-          </a:ln>
-        </p:spPr>
-        <p:style>
-          <a:lnRef idx="1">
-            <a:schemeClr val="accent1"/>
-          </a:lnRef>
-          <a:fillRef idx="3">
-            <a:schemeClr val="accent1"/>
-          </a:fillRef>
-          <a:effectRef idx="2">
-            <a:schemeClr val="accent1"/>
-          </a:effectRef>
-          <a:fontRef idx="minor">
-            <a:schemeClr val="lt1"/>
-          </a:fontRef>
-        </p:style>
-        <p:txBody>
-          <a:bodyPr rtlCol="0" anchor="ctr" wrap="square"/>
-          <a:lstStyle/>
-          <a:p>
-            <a:pPr algn="ctr">
-              <a:spcBef>
-                <a:spcPts val="0"/>
-              </a:spcBef>
-              <a:spcAft>
-                <a:spcPts val="400"/>
-              </a:spcAft>
-              <a:defRPr sz="1400" b="1">
-                <a:solidFill>
-                  <a:srgbClr val="FFFFFF"/>
-                </a:solidFill>
-                <a:latin typeface="Calibri"/>
-              </a:defRPr>
-            </a:pPr>
-            <a:r>
-              <a:t>Attention</a:t>
-            </a:r>
-          </a:p>
-          <a:p>
-            <a:pPr algn="ctr">
-              <a:defRPr sz="1100">
-                <a:solidFill>
-                  <a:srgbClr val="FFFFFF"/>
-                </a:solidFill>
-                <a:latin typeface="Calibri"/>
-              </a:defRPr>
-            </a:pPr>
-            <a:r>
-              <a:t>Apprendre quels</a:t>
-            </a:r>
-          </a:p>
-          <a:p>
-            <a:pPr algn="ctr">
-              <a:defRPr sz="1100">
-                <a:solidFill>
-                  <a:srgbClr val="FFFFFF"/>
-                </a:solidFill>
-                <a:latin typeface="Calibri"/>
-              </a:defRPr>
-            </a:pPr>
-            <a:r>
-              <a:t>facteurs latents</a:t>
-            </a:r>
-          </a:p>
-          <a:p>
-            <a:pPr algn="ctr">
-              <a:defRPr sz="1100">
-                <a:solidFill>
-                  <a:srgbClr val="FFFFFF"/>
-                </a:solidFill>
-                <a:latin typeface="Calibri"/>
-              </a:defRPr>
-            </a:pPr>
-            <a:r>
-              <a:t>comptent le plus</a:t>
-            </a:r>
-          </a:p>
-        </p:txBody>
-      </p:sp>
-    </p:spTree>
-  </p:cSld>
-  <p:clrMapOvr>
-    <a:masterClrMapping/>
-  </p:clrMapOvr>
-</p:sld>
-</file>
-
-<file path=ppt/slides/slide13.xml><?xml version="1.0" encoding="utf-8"?>
-<p:sld xmlns:a="http://schemas.openxmlformats.org/drawingml/2006/main" xmlns:p="http://schemas.openxmlformats.org/presentationml/2006/main" xmlns:r="http://schemas.openxmlformats.org/officeDocument/2006/relationships">
-  <p:cSld>
-    <p:spTree>
-      <p:nvGrpSpPr>
-        <p:cNvPr id="1" name=""/>
-        <p:cNvGrpSpPr/>
-        <p:nvPr/>
-      </p:nvGrpSpPr>
-      <p:grpSpPr/>
-      <p:sp>
-        <p:nvSpPr>
-          <p:cNvPr id="2" name="Title 1"/>
-          <p:cNvSpPr>
-            <a:spLocks noGrp="1"/>
-          </p:cNvSpPr>
-          <p:nvPr>
-            <p:ph type="title"/>
-          </p:nvPr>
-        </p:nvSpPr>
-        <p:spPr/>
-        <p:txBody>
-          <a:bodyPr/>
-          <a:lstStyle/>
-          <a:p>
-            <a:r>
+              <a:rPr lang="fr-FR" noProof="0" dirty="0"/>
               <a:t>Merci</a:t>
             </a:r>
           </a:p>
@@ -23502,21 +24822,35 @@
         </p:nvSpPr>
         <p:spPr/>
         <p:txBody>
-          <a:bodyPr/>
+          <a:bodyPr>
+            <a:normAutofit fontScale="92500" lnSpcReduction="20000"/>
+          </a:bodyPr>
           <a:lstStyle/>
           <a:p>
             <a:r>
+              <a:rPr lang="fr-FR" noProof="0" dirty="0"/>
               <a:t>NI Yuzhen  |  niyuzhen2020@gmail.com</a:t>
             </a:r>
           </a:p>
           <a:p>
             <a:r>
-              <a:t>GitHub: github.com/Clement-NI/recommendation_system_py</a:t>
-            </a:r>
-          </a:p>
-          <a:p>
-            <a:r>
-              <a:t>PyTorch  |  Flask  |  SQLite  |  GitHub Actions</a:t>
+              <a:rPr lang="fr-FR" noProof="0" dirty="0"/>
+              <a:t>GitHub: github.com/Clement-NI/</a:t>
+            </a:r>
+            <a:r>
+              <a:rPr lang="fr-FR" noProof="0" dirty="0" err="1"/>
+              <a:t>recommendation_system_py</a:t>
+            </a:r>
+            <a:endParaRPr lang="fr-FR" noProof="0" dirty="0"/>
+          </a:p>
+          <a:p>
+            <a:r>
+              <a:rPr lang="fr-FR" noProof="0" dirty="0" err="1"/>
+              <a:t>PyTorch</a:t>
+            </a:r>
+            <a:r>
+              <a:rPr lang="fr-FR" noProof="0" dirty="0"/>
+              <a:t>  |  Flask  |  SQLite  |  GitHub Actions</a:t>
             </a:r>
           </a:p>
         </p:txBody>
@@ -23633,11 +24967,7 @@
             </a:r>
             <a:r>
               <a:rPr lang="fr-FR" noProof="0" dirty="0"/>
-              <a:t> : manque de transparence pour certains boutiques et restaurants sur     Grenoble et Besoin de démocratisation des outils numérique</a:t>
-            </a:r>
-            <a:r>
-              <a:rPr lang="fr-FR" dirty="0"/>
-              <a:t>s pour eux </a:t>
+              <a:t> : manque de transparence pour certains boutiques et restaurants sur     Grenoble et Besoin de démocratisation des outils numériques pour eux </a:t>
             </a:r>
           </a:p>
           <a:p>
@@ -23646,18 +24976,14 @@
             </a:pPr>
             <a:r>
               <a:rPr lang="fr-FR" noProof="0" dirty="0"/>
-              <a:t> Organisme</a:t>
-            </a:r>
-            <a:r>
-              <a:rPr lang="fr-FR" dirty="0"/>
-              <a:t> : </a:t>
-            </a:r>
-            <a:r>
-              <a:rPr lang="fr-FR" dirty="0" err="1"/>
+              <a:t> Organisme : </a:t>
+            </a:r>
+            <a:r>
+              <a:rPr lang="fr-FR" noProof="0" dirty="0" err="1"/>
               <a:t>Cobook</a:t>
             </a:r>
             <a:r>
-              <a:rPr lang="fr-FR" dirty="0"/>
+              <a:rPr lang="fr-FR" noProof="0" dirty="0"/>
               <a:t>, association inscrite dans le registre de la préfecture de Grenoble</a:t>
             </a:r>
           </a:p>
@@ -23667,22 +24993,18 @@
             </a:pPr>
             <a:r>
               <a:rPr lang="fr-FR" noProof="0" dirty="0"/>
-              <a:t> </a:t>
-            </a:r>
-            <a:r>
-              <a:rPr lang="fr-FR" dirty="0"/>
-              <a:t>Pourquoi ce projet ? Machine </a:t>
-            </a:r>
-            <a:r>
-              <a:rPr lang="fr-FR" dirty="0" err="1"/>
+              <a:t> Pourquoi ce projet ? Machine </a:t>
+            </a:r>
+            <a:r>
+              <a:rPr lang="fr-FR" noProof="0" dirty="0" err="1"/>
               <a:t>learning</a:t>
             </a:r>
             <a:r>
-              <a:rPr lang="fr-FR" dirty="0"/>
+              <a:rPr lang="fr-FR" noProof="0" dirty="0"/>
               <a:t> + Développement full stack + </a:t>
             </a:r>
             <a:r>
-              <a:rPr lang="fr-FR" dirty="0" err="1"/>
+              <a:rPr lang="fr-FR" noProof="0" dirty="0" err="1"/>
               <a:t>Devops</a:t>
             </a:r>
             <a:endParaRPr lang="fr-FR" noProof="0" dirty="0"/>
@@ -23747,22 +25069,9 @@
           <a:lstStyle/>
           <a:p>
             <a:r>
-              <a:rPr lang="en-US" altLang="zh-CN" dirty="0" err="1"/>
-              <a:t>Que</a:t>
-            </a:r>
-            <a:r>
-              <a:rPr lang="en-US" altLang="zh-CN" dirty="0"/>
-              <a:t> </a:t>
-            </a:r>
-            <a:r>
-              <a:rPr lang="en-US" altLang="zh-CN" dirty="0" err="1"/>
-              <a:t>fais</a:t>
-            </a:r>
-            <a:r>
-              <a:rPr lang="en-US" altLang="zh-CN" dirty="0"/>
-              <a:t>-je Chez cobook.org ?</a:t>
-            </a:r>
-            <a:endParaRPr lang="zh-CN" altLang="en-US" dirty="0"/>
+              <a:rPr lang="fr-FR" noProof="0" dirty="0"/>
+              <a:t>Que fais-je Chez cobook.org ?</a:t>
+            </a:r>
           </a:p>
         </p:txBody>
       </p:sp>
@@ -23791,15 +25100,15 @@
               <a:buNone/>
             </a:pPr>
             <a:r>
-              <a:rPr lang="fr-FR" altLang="zh-CN" dirty="0"/>
+              <a:rPr lang="fr-FR" noProof="0" dirty="0"/>
               <a:t> Responsabilité : Développeur Full Stack, Data </a:t>
             </a:r>
             <a:r>
-              <a:rPr lang="fr-FR" altLang="zh-CN" dirty="0" err="1"/>
+              <a:rPr lang="fr-FR" noProof="0" dirty="0" err="1"/>
               <a:t>Scientist</a:t>
             </a:r>
             <a:r>
-              <a:rPr lang="fr-FR" altLang="zh-CN" dirty="0"/>
+              <a:rPr lang="fr-FR" noProof="0" dirty="0"/>
               <a:t>, Secrétaire</a:t>
             </a:r>
           </a:p>
@@ -23808,15 +25117,15 @@
               <a:buNone/>
             </a:pPr>
             <a:r>
-              <a:rPr lang="fr-FR" altLang="zh-CN" dirty="0"/>
+              <a:rPr lang="fr-FR" noProof="0" dirty="0"/>
               <a:t> Missions : 1. Développement du </a:t>
             </a:r>
             <a:r>
-              <a:rPr lang="fr-FR" altLang="zh-CN" dirty="0" err="1"/>
+              <a:rPr lang="fr-FR" noProof="0" dirty="0" err="1"/>
               <a:t>Back-end</a:t>
             </a:r>
             <a:r>
-              <a:rPr lang="fr-FR" altLang="zh-CN" dirty="0"/>
+              <a:rPr lang="fr-FR" noProof="0" dirty="0"/>
               <a:t> en Next.js et Python </a:t>
             </a:r>
           </a:p>
@@ -23825,15 +25134,15 @@
               <a:buNone/>
             </a:pPr>
             <a:r>
-              <a:rPr lang="fr-FR" altLang="zh-CN" dirty="0"/>
+              <a:rPr lang="fr-FR" noProof="0" dirty="0"/>
               <a:t>2. Traduction des textes sur </a:t>
             </a:r>
             <a:r>
-              <a:rPr lang="fr-FR" altLang="zh-CN" dirty="0" err="1"/>
+              <a:rPr lang="fr-FR" noProof="0" dirty="0" err="1"/>
               <a:t>Front-end</a:t>
             </a:r>
             <a:r>
-              <a:rPr lang="fr-FR" altLang="zh-CN" dirty="0"/>
+              <a:rPr lang="fr-FR" noProof="0" dirty="0"/>
               <a:t> (en React.js) </a:t>
             </a:r>
           </a:p>
@@ -23842,7 +25151,7 @@
               <a:buNone/>
             </a:pPr>
             <a:r>
-              <a:rPr lang="fr-FR" altLang="zh-CN" dirty="0"/>
+              <a:rPr lang="fr-FR" noProof="0" dirty="0"/>
               <a:t>3. Conception et deploiement du système de recommandation (le pipeline, le modèle, les APIs)</a:t>
             </a:r>
           </a:p>
@@ -23851,15 +25160,15 @@
               <a:buNone/>
             </a:pPr>
             <a:r>
-              <a:rPr lang="fr-FR" altLang="zh-CN" dirty="0"/>
+              <a:rPr lang="fr-FR" noProof="0" dirty="0"/>
               <a:t>4. Gestion du projet (Jira, </a:t>
             </a:r>
             <a:r>
-              <a:rPr lang="fr-FR" altLang="zh-CN" dirty="0" err="1"/>
+              <a:rPr lang="fr-FR" noProof="0" dirty="0" err="1"/>
               <a:t>Github</a:t>
             </a:r>
             <a:r>
-              <a:rPr lang="fr-FR" altLang="zh-CN" dirty="0"/>
+              <a:rPr lang="fr-FR" noProof="0" dirty="0"/>
               <a:t>)</a:t>
             </a:r>
           </a:p>
@@ -23867,7 +25176,7 @@
             <a:pPr marL="0" indent="0">
               <a:buNone/>
             </a:pPr>
-            <a:endParaRPr lang="zh-CN" altLang="en-US" dirty="0"/>
+            <a:endParaRPr lang="fr-FR" noProof="0" dirty="0"/>
           </a:p>
         </p:txBody>
       </p:sp>
@@ -23885,7 +25194,7 @@
 </file>
 
 <file path=ppt/slides/slide4.xml><?xml version="1.0" encoding="utf-8"?>
-<p:sld xmlns:a="http://schemas.openxmlformats.org/drawingml/2006/main" xmlns:p="http://schemas.openxmlformats.org/presentationml/2006/main" xmlns:r="http://schemas.openxmlformats.org/officeDocument/2006/relationships">
+<p:sld xmlns:a="http://schemas.openxmlformats.org/drawingml/2006/main" xmlns:r="http://schemas.openxmlformats.org/officeDocument/2006/relationships" xmlns:p="http://schemas.openxmlformats.org/presentationml/2006/main">
   <p:cSld>
     <p:spTree>
       <p:nvGrpSpPr>
@@ -23893,7 +25202,370 @@
         <p:cNvGrpSpPr/>
         <p:nvPr/>
       </p:nvGrpSpPr>
-      <p:grpSpPr/>
+      <p:grpSpPr>
+        <a:xfrm>
+          <a:off x="0" y="0"/>
+          <a:ext cx="0" cy="0"/>
+          <a:chOff x="0" y="0"/>
+          <a:chExt cx="0" cy="0"/>
+        </a:xfrm>
+      </p:grpSpPr>
+      <p:sp>
+        <p:nvSpPr>
+          <p:cNvPr id="2" name="标题 1">
+            <a:extLst>
+              <a:ext uri="{FF2B5EF4-FFF2-40B4-BE49-F238E27FC236}">
+                <a16:creationId xmlns:a16="http://schemas.microsoft.com/office/drawing/2014/main" id="{E61F3938-16EB-47DE-11B8-38A67413EB28}"/>
+              </a:ext>
+            </a:extLst>
+          </p:cNvPr>
+          <p:cNvSpPr>
+            <a:spLocks noGrp="1"/>
+          </p:cNvSpPr>
+          <p:nvPr>
+            <p:ph type="title"/>
+          </p:nvPr>
+        </p:nvSpPr>
+        <p:spPr/>
+        <p:txBody>
+          <a:bodyPr/>
+          <a:lstStyle/>
+          <a:p>
+            <a:r>
+              <a:rPr lang="fr-FR" noProof="0" dirty="0" err="1"/>
+              <a:t>Front-end</a:t>
+            </a:r>
+            <a:endParaRPr lang="fr-FR" noProof="0" dirty="0"/>
+          </a:p>
+        </p:txBody>
+      </p:sp>
+      <p:sp>
+        <p:nvSpPr>
+          <p:cNvPr id="3" name="内容占位符 2">
+            <a:extLst>
+              <a:ext uri="{FF2B5EF4-FFF2-40B4-BE49-F238E27FC236}">
+                <a16:creationId xmlns:a16="http://schemas.microsoft.com/office/drawing/2014/main" id="{249F2793-62FD-931D-4ED1-D2C214D23E99}"/>
+              </a:ext>
+            </a:extLst>
+          </p:cNvPr>
+          <p:cNvSpPr>
+            <a:spLocks noGrp="1"/>
+          </p:cNvSpPr>
+          <p:nvPr>
+            <p:ph idx="1"/>
+          </p:nvPr>
+        </p:nvSpPr>
+        <p:spPr/>
+        <p:txBody>
+          <a:bodyPr/>
+          <a:lstStyle/>
+          <a:p>
+            <a:r>
+              <a:rPr lang="fr-FR" noProof="0" dirty="0"/>
+              <a:t>Stack : </a:t>
+            </a:r>
+            <a:r>
+              <a:rPr lang="fr-FR" noProof="0" dirty="0" err="1"/>
+              <a:t>React</a:t>
+            </a:r>
+            <a:r>
+              <a:rPr lang="fr-FR" dirty="0"/>
+              <a:t> Native</a:t>
+            </a:r>
+            <a:r>
+              <a:rPr lang="fr-FR" noProof="0" dirty="0"/>
+              <a:t>  </a:t>
+            </a:r>
+          </a:p>
+          <a:p>
+            <a:r>
+              <a:rPr lang="fr-FR" noProof="0" dirty="0"/>
+              <a:t>1. Ensemble des Components Open Source (</a:t>
+            </a:r>
+            <a:r>
+              <a:rPr lang="fr-FR" noProof="0" dirty="0" err="1"/>
+              <a:t>Masonary</a:t>
+            </a:r>
+            <a:r>
+              <a:rPr lang="fr-FR" noProof="0" dirty="0"/>
+              <a:t> </a:t>
+            </a:r>
+            <a:r>
+              <a:rPr lang="fr-FR" noProof="0" dirty="0" err="1"/>
+              <a:t>list</a:t>
+            </a:r>
+            <a:r>
+              <a:rPr lang="fr-FR" noProof="0" dirty="0"/>
+              <a:t> …)</a:t>
+            </a:r>
+          </a:p>
+          <a:p>
+            <a:r>
+              <a:rPr lang="fr-FR" noProof="0" dirty="0"/>
+              <a:t>2. Pas difficile de Maintenir</a:t>
+            </a:r>
+          </a:p>
+          <a:p>
+            <a:r>
+              <a:rPr lang="fr-FR" noProof="0" dirty="0"/>
+              <a:t>3. Bien intégré avec le </a:t>
+            </a:r>
+            <a:r>
+              <a:rPr lang="fr-FR" noProof="0" dirty="0" err="1"/>
+              <a:t>Back-end</a:t>
+            </a:r>
+            <a:r>
+              <a:rPr lang="fr-FR" noProof="0" dirty="0"/>
+              <a:t> </a:t>
+            </a:r>
+          </a:p>
+          <a:p>
+            <a:r>
+              <a:rPr lang="fr-FR" dirty="0"/>
+              <a:t>4. Support des deux OS (Android, IOS) </a:t>
+            </a:r>
+          </a:p>
+          <a:p>
+            <a:endParaRPr lang="fr-FR" noProof="0" dirty="0"/>
+          </a:p>
+        </p:txBody>
+      </p:sp>
+    </p:spTree>
+    <p:extLst>
+      <p:ext uri="{BB962C8B-B14F-4D97-AF65-F5344CB8AC3E}">
+        <p14:creationId xmlns:p14="http://schemas.microsoft.com/office/powerpoint/2010/main" val="593208298"/>
+      </p:ext>
+    </p:extLst>
+  </p:cSld>
+  <p:clrMapOvr>
+    <a:masterClrMapping/>
+  </p:clrMapOvr>
+</p:sld>
+</file>
+
+<file path=ppt/slides/slide5.xml><?xml version="1.0" encoding="utf-8"?>
+<p:sld xmlns:a="http://schemas.openxmlformats.org/drawingml/2006/main" xmlns:r="http://schemas.openxmlformats.org/officeDocument/2006/relationships" xmlns:p="http://schemas.openxmlformats.org/presentationml/2006/main">
+  <p:cSld>
+    <p:spTree>
+      <p:nvGrpSpPr>
+        <p:cNvPr id="1" name=""/>
+        <p:cNvGrpSpPr/>
+        <p:nvPr/>
+      </p:nvGrpSpPr>
+      <p:grpSpPr>
+        <a:xfrm>
+          <a:off x="0" y="0"/>
+          <a:ext cx="0" cy="0"/>
+          <a:chOff x="0" y="0"/>
+          <a:chExt cx="0" cy="0"/>
+        </a:xfrm>
+      </p:grpSpPr>
+      <p:sp>
+        <p:nvSpPr>
+          <p:cNvPr id="2" name="标题 1">
+            <a:extLst>
+              <a:ext uri="{FF2B5EF4-FFF2-40B4-BE49-F238E27FC236}">
+                <a16:creationId xmlns:a16="http://schemas.microsoft.com/office/drawing/2014/main" id="{FA33B2CE-AB9F-206F-51B6-D8BC8340D99D}"/>
+              </a:ext>
+            </a:extLst>
+          </p:cNvPr>
+          <p:cNvSpPr>
+            <a:spLocks noGrp="1"/>
+          </p:cNvSpPr>
+          <p:nvPr>
+            <p:ph type="title"/>
+          </p:nvPr>
+        </p:nvSpPr>
+        <p:spPr/>
+        <p:txBody>
+          <a:bodyPr/>
+          <a:lstStyle/>
+          <a:p>
+            <a:r>
+              <a:rPr lang="fr-FR" noProof="0" dirty="0" err="1"/>
+              <a:t>Back-end</a:t>
+            </a:r>
+            <a:endParaRPr lang="fr-FR" noProof="0" dirty="0"/>
+          </a:p>
+        </p:txBody>
+      </p:sp>
+      <p:sp>
+        <p:nvSpPr>
+          <p:cNvPr id="3" name="内容占位符 2">
+            <a:extLst>
+              <a:ext uri="{FF2B5EF4-FFF2-40B4-BE49-F238E27FC236}">
+                <a16:creationId xmlns:a16="http://schemas.microsoft.com/office/drawing/2014/main" id="{61DE7670-62DA-AB23-2118-A5FD35E0D7DB}"/>
+              </a:ext>
+            </a:extLst>
+          </p:cNvPr>
+          <p:cNvSpPr>
+            <a:spLocks noGrp="1"/>
+          </p:cNvSpPr>
+          <p:nvPr>
+            <p:ph idx="1"/>
+          </p:nvPr>
+        </p:nvSpPr>
+        <p:spPr/>
+        <p:txBody>
+          <a:bodyPr/>
+          <a:lstStyle/>
+          <a:p>
+            <a:r>
+              <a:rPr lang="fr-FR" noProof="0" dirty="0"/>
+              <a:t>Stack : Next.js + Python ( </a:t>
+            </a:r>
+            <a:r>
+              <a:rPr lang="fr-FR" noProof="0" dirty="0" err="1"/>
+              <a:t>Pytorch</a:t>
+            </a:r>
+            <a:r>
+              <a:rPr lang="fr-FR" noProof="0" dirty="0"/>
+              <a:t>, Django) + SQL</a:t>
+            </a:r>
+          </a:p>
+          <a:p>
+            <a:r>
+              <a:rPr lang="fr-FR" noProof="0" dirty="0"/>
+              <a:t>1. Base de données Relationnel (</a:t>
+            </a:r>
+            <a:r>
+              <a:rPr lang="fr-FR" noProof="0" dirty="0" err="1"/>
+              <a:t>MySql</a:t>
+            </a:r>
+            <a:r>
+              <a:rPr lang="fr-FR" noProof="0" dirty="0"/>
+              <a:t>) sur AWS (</a:t>
+            </a:r>
+            <a:r>
+              <a:rPr lang="fr-FR" noProof="0" dirty="0" err="1"/>
+              <a:t>west</a:t>
+            </a:r>
+            <a:r>
+              <a:rPr lang="fr-FR" noProof="0" dirty="0"/>
+              <a:t>-eu) </a:t>
+            </a:r>
+          </a:p>
+          <a:p>
+            <a:r>
+              <a:rPr lang="fr-FR" dirty="0"/>
+              <a:t>2. Choix de Next.js : Grammaire simple, facile a écrire le code et le maintenir, concurrence des </a:t>
+            </a:r>
+            <a:r>
+              <a:rPr lang="fr-FR" dirty="0" err="1"/>
+              <a:t>requete</a:t>
+            </a:r>
+            <a:r>
+              <a:rPr lang="fr-FR" dirty="0"/>
+              <a:t> API et des </a:t>
+            </a:r>
+            <a:r>
+              <a:rPr lang="fr-FR" dirty="0" err="1"/>
+              <a:t>operations</a:t>
+            </a:r>
+            <a:r>
+              <a:rPr lang="fr-FR" dirty="0"/>
+              <a:t> </a:t>
+            </a:r>
+            <a:r>
+              <a:rPr lang="fr-FR" dirty="0" err="1"/>
+              <a:t>CRUDs</a:t>
+            </a:r>
+            <a:r>
+              <a:rPr lang="fr-FR" dirty="0"/>
+              <a:t>. Pas besoin de trop de ressources de CPU (single thread)</a:t>
+            </a:r>
+          </a:p>
+          <a:p>
+            <a:r>
+              <a:rPr lang="fr-FR" noProof="0" dirty="0"/>
+              <a:t>3. API</a:t>
+            </a:r>
+            <a:r>
+              <a:rPr lang="fr-FR" dirty="0"/>
+              <a:t>s : Fast API en Python qui support les requêtes </a:t>
+            </a:r>
+            <a:r>
+              <a:rPr lang="fr-FR" dirty="0" err="1"/>
+              <a:t>async</a:t>
+            </a:r>
+            <a:r>
+              <a:rPr lang="fr-FR" dirty="0"/>
+              <a:t> </a:t>
+            </a:r>
+          </a:p>
+          <a:p>
+            <a:r>
+              <a:rPr lang="fr-FR" noProof="0" dirty="0"/>
+              <a:t>4.</a:t>
+            </a:r>
+            <a:r>
+              <a:rPr lang="fr-FR" dirty="0"/>
+              <a:t> Système de </a:t>
+            </a:r>
+            <a:r>
+              <a:rPr lang="fr-FR" dirty="0" err="1"/>
+              <a:t>recommendation</a:t>
+            </a:r>
+            <a:r>
+              <a:rPr lang="fr-FR" dirty="0"/>
+              <a:t> sur le serveur local ( pour la raison économique ) </a:t>
+            </a:r>
+          </a:p>
+          <a:p>
+            <a:r>
+              <a:rPr lang="fr-FR" noProof="0" dirty="0"/>
+              <a:t>5. </a:t>
+            </a:r>
+            <a:r>
+              <a:rPr lang="fr-FR" noProof="0" dirty="0" err="1"/>
+              <a:t>Devops</a:t>
+            </a:r>
+            <a:r>
+              <a:rPr lang="fr-FR" noProof="0" dirty="0"/>
+              <a:t> avec Docker et </a:t>
+            </a:r>
+            <a:r>
+              <a:rPr lang="fr-FR" noProof="0" dirty="0" err="1"/>
+              <a:t>GithubAction</a:t>
+            </a:r>
+            <a:r>
+              <a:rPr lang="fr-FR" dirty="0"/>
+              <a:t> </a:t>
+            </a:r>
+            <a:endParaRPr lang="fr-FR" noProof="0" dirty="0"/>
+          </a:p>
+        </p:txBody>
+      </p:sp>
+    </p:spTree>
+    <p:extLst>
+      <p:ext uri="{BB962C8B-B14F-4D97-AF65-F5344CB8AC3E}">
+        <p14:creationId xmlns:p14="http://schemas.microsoft.com/office/powerpoint/2010/main" val="2807178517"/>
+      </p:ext>
+    </p:extLst>
+  </p:cSld>
+  <p:clrMapOvr>
+    <a:masterClrMapping/>
+  </p:clrMapOvr>
+</p:sld>
+</file>
+
+<file path=ppt/slides/slide6.xml><?xml version="1.0" encoding="utf-8"?>
+<p:sld xmlns:a="http://schemas.openxmlformats.org/drawingml/2006/main" xmlns:r="http://schemas.openxmlformats.org/officeDocument/2006/relationships" xmlns:p="http://schemas.openxmlformats.org/presentationml/2006/main">
+  <p:cSld>
+    <p:spTree>
+      <p:nvGrpSpPr>
+        <p:cNvPr id="1" name=""/>
+        <p:cNvGrpSpPr/>
+        <p:nvPr/>
+      </p:nvGrpSpPr>
+      <p:grpSpPr>
+        <a:xfrm>
+          <a:off x="0" y="0"/>
+          <a:ext cx="0" cy="0"/>
+          <a:chOff x="0" y="0"/>
+          <a:chExt cx="0" cy="0"/>
+        </a:xfrm>
+      </p:grpSpPr>
       <p:sp>
         <p:nvSpPr>
           <p:cNvPr id="2" name="Title 1"/>
@@ -23910,6 +25582,7 @@
           <a:lstStyle/>
           <a:p>
             <a:r>
+              <a:rPr lang="fr-FR" noProof="0" dirty="0"/>
               <a:t>Système de Recommandation</a:t>
             </a:r>
           </a:p>
@@ -23931,7 +25604,16 @@
           <a:lstStyle/>
           <a:p>
             <a:r>
-              <a:t>Neural Collaborative Filtering — Architecture, Entraînement, Évaluation</a:t>
+              <a:rPr lang="fr-FR" noProof="0" dirty="0"/>
+              <a:t>Neural Collaborative </a:t>
+            </a:r>
+            <a:r>
+              <a:rPr lang="fr-FR" noProof="0" dirty="0" err="1"/>
+              <a:t>Filtering</a:t>
+            </a:r>
+            <a:r>
+              <a:rPr lang="fr-FR" noProof="0" dirty="0"/>
+              <a:t> — Architecture, Entraînement, Évaluation</a:t>
             </a:r>
           </a:p>
         </p:txBody>
@@ -23944,8 +25626,8 @@
 </p:sld>
 </file>
 
-<file path=ppt/slides/slide5.xml><?xml version="1.0" encoding="utf-8"?>
-<p:sld xmlns:a="http://schemas.openxmlformats.org/drawingml/2006/main" xmlns:p="http://schemas.openxmlformats.org/presentationml/2006/main" xmlns:r="http://schemas.openxmlformats.org/officeDocument/2006/relationships">
+<file path=ppt/slides/slide7.xml><?xml version="1.0" encoding="utf-8"?>
+<p:sld xmlns:a="http://schemas.openxmlformats.org/drawingml/2006/main" xmlns:r="http://schemas.openxmlformats.org/officeDocument/2006/relationships" xmlns:p="http://schemas.openxmlformats.org/presentationml/2006/main">
   <p:cSld>
     <p:spTree>
       <p:nvGrpSpPr>
@@ -23953,7 +25635,14 @@
         <p:cNvGrpSpPr/>
         <p:nvPr/>
       </p:nvGrpSpPr>
-      <p:grpSpPr/>
+      <p:grpSpPr>
+        <a:xfrm>
+          <a:off x="0" y="0"/>
+          <a:ext cx="0" cy="0"/>
+          <a:chOff x="0" y="0"/>
+          <a:chExt cx="0" cy="0"/>
+        </a:xfrm>
+      </p:grpSpPr>
       <p:sp>
         <p:nvSpPr>
           <p:cNvPr id="2" name="Title 1"/>
@@ -23970,6 +25659,7 @@
           <a:lstStyle/>
           <a:p>
             <a:r>
+              <a:rPr lang="fr-FR" noProof="0" dirty="0"/>
               <a:t>Architecture du Système de Recommandation</a:t>
             </a:r>
           </a:p>
@@ -24011,7 +25701,7 @@
           </a:fontRef>
         </p:style>
         <p:txBody>
-          <a:bodyPr rtlCol="0" anchor="ctr" wrap="square"/>
+          <a:bodyPr wrap="square" rtlCol="0" anchor="ctr"/>
           <a:lstStyle/>
           <a:p>
             <a:pPr algn="ctr">
@@ -24029,11 +25719,31 @@
               </a:defRPr>
             </a:pPr>
             <a:r>
+              <a:rPr lang="fr-FR" noProof="0" dirty="0">
+                <a:solidFill>
+                  <a:srgbClr val="FFFFFF"/>
+                </a:solidFill>
+              </a:rPr>
               <a:t>Collaborative</a:t>
             </a:r>
-            <a:br/>
-            <a:r>
-              <a:t>Filtering (NCF)</a:t>
+            <a:br>
+              <a:rPr lang="fr-FR" noProof="0" dirty="0"/>
+            </a:br>
+            <a:r>
+              <a:rPr lang="fr-FR" noProof="0" dirty="0" err="1">
+                <a:solidFill>
+                  <a:srgbClr val="FFFFFF"/>
+                </a:solidFill>
+              </a:rPr>
+              <a:t>Filtering</a:t>
+            </a:r>
+            <a:r>
+              <a:rPr lang="fr-FR" noProof="0" dirty="0">
+                <a:solidFill>
+                  <a:srgbClr val="FFFFFF"/>
+                </a:solidFill>
+              </a:rPr>
+              <a:t> (NCF)</a:t>
             </a:r>
           </a:p>
           <a:p>
@@ -24046,6 +25756,11 @@
               </a:defRPr>
             </a:pPr>
             <a:r>
+              <a:rPr lang="fr-FR" noProof="0" dirty="0">
+                <a:solidFill>
+                  <a:srgbClr val="FFFFFF"/>
+                </a:solidFill>
+              </a:rPr>
               <a:t>Utilisateur connu</a:t>
             </a:r>
           </a:p>
@@ -24059,6 +25774,11 @@
               </a:defRPr>
             </a:pPr>
             <a:r>
+              <a:rPr lang="fr-FR" noProof="0" dirty="0">
+                <a:solidFill>
+                  <a:srgbClr val="FFFFFF"/>
+                </a:solidFill>
+              </a:rPr>
               <a:t>Pas de recherche</a:t>
             </a:r>
           </a:p>
@@ -24072,8 +25792,22 @@
               </a:defRPr>
             </a:pPr>
             <a:r>
-              <a:t>Modèle PyTorch</a:t>
-            </a:r>
+              <a:rPr lang="fr-FR" noProof="0" dirty="0">
+                <a:solidFill>
+                  <a:srgbClr val="FFFFFF"/>
+                </a:solidFill>
+              </a:rPr>
+              <a:t>Modèle </a:t>
+            </a:r>
+            <a:r>
+              <a:rPr lang="fr-FR" noProof="0" dirty="0" err="1">
+                <a:solidFill>
+                  <a:srgbClr val="FFFFFF"/>
+                </a:solidFill>
+              </a:rPr>
+              <a:t>PyTorch</a:t>
+            </a:r>
+            <a:endParaRPr lang="fr-FR" noProof="0" dirty="0"/>
           </a:p>
         </p:txBody>
       </p:sp>
@@ -24113,7 +25847,7 @@
           </a:fontRef>
         </p:style>
         <p:txBody>
-          <a:bodyPr rtlCol="0" anchor="ctr" wrap="square"/>
+          <a:bodyPr wrap="square" rtlCol="0" anchor="ctr"/>
           <a:lstStyle/>
           <a:p>
             <a:pPr algn="ctr">
@@ -24131,12 +25865,25 @@
               </a:defRPr>
             </a:pPr>
             <a:r>
+              <a:rPr lang="fr-FR" noProof="0" dirty="0">
+                <a:solidFill>
+                  <a:srgbClr val="FFFFFF"/>
+                </a:solidFill>
+              </a:rPr>
               <a:t>Content-Based</a:t>
             </a:r>
-            <a:br/>
-            <a:r>
+            <a:br>
+              <a:rPr lang="fr-FR" noProof="0" dirty="0"/>
+            </a:br>
+            <a:r>
+              <a:rPr lang="fr-FR" noProof="0" dirty="0" err="1">
+                <a:solidFill>
+                  <a:srgbClr val="FFFFFF"/>
+                </a:solidFill>
+              </a:rPr>
               <a:t>Filtering</a:t>
             </a:r>
+            <a:endParaRPr lang="fr-FR" noProof="0" dirty="0"/>
           </a:p>
           <a:p>
             <a:pPr algn="ctr">
@@ -24148,6 +25895,11 @@
               </a:defRPr>
             </a:pPr>
             <a:r>
+              <a:rPr lang="fr-FR" noProof="0" dirty="0">
+                <a:solidFill>
+                  <a:srgbClr val="FFFFFF"/>
+                </a:solidFill>
+              </a:rPr>
               <a:t>Recherche textuelle</a:t>
             </a:r>
           </a:p>
@@ -24161,6 +25913,11 @@
               </a:defRPr>
             </a:pPr>
             <a:r>
+              <a:rPr lang="fr-FR" noProof="0" dirty="0">
+                <a:solidFill>
+                  <a:srgbClr val="FFFFFF"/>
+                </a:solidFill>
+              </a:rPr>
               <a:t>TF-IDF + Cosinus</a:t>
             </a:r>
           </a:p>
@@ -24174,8 +25931,30 @@
               </a:defRPr>
             </a:pPr>
             <a:r>
-              <a:t>Fuzzy matching</a:t>
-            </a:r>
+              <a:rPr lang="fr-FR" noProof="0" dirty="0" err="1">
+                <a:solidFill>
+                  <a:srgbClr val="FFFFFF"/>
+                </a:solidFill>
+              </a:rPr>
+              <a:t>Fuzzy</a:t>
+            </a:r>
+            <a:r>
+              <a:rPr lang="fr-FR" noProof="0" dirty="0">
+                <a:solidFill>
+                  <a:srgbClr val="FFFFFF"/>
+                </a:solidFill>
+              </a:rPr>
+              <a:t> </a:t>
+            </a:r>
+            <a:r>
+              <a:rPr lang="fr-FR" noProof="0" dirty="0" err="1">
+                <a:solidFill>
+                  <a:srgbClr val="FFFFFF"/>
+                </a:solidFill>
+              </a:rPr>
+              <a:t>matching</a:t>
+            </a:r>
+            <a:endParaRPr lang="fr-FR" noProof="0" dirty="0"/>
           </a:p>
         </p:txBody>
       </p:sp>
@@ -24215,7 +25994,7 @@
           </a:fontRef>
         </p:style>
         <p:txBody>
-          <a:bodyPr rtlCol="0" anchor="ctr" wrap="square"/>
+          <a:bodyPr wrap="square" rtlCol="0" anchor="ctr"/>
           <a:lstStyle/>
           <a:p>
             <a:pPr algn="ctr">
@@ -24233,10 +26012,22 @@
               </a:defRPr>
             </a:pPr>
             <a:r>
+              <a:rPr lang="fr-FR" noProof="0" dirty="0" err="1">
+                <a:solidFill>
+                  <a:srgbClr val="FFFFFF"/>
+                </a:solidFill>
+              </a:rPr>
               <a:t>Hybrid</a:t>
             </a:r>
-            <a:br/>
-            <a:r>
+            <a:br>
+              <a:rPr lang="fr-FR" noProof="0" dirty="0"/>
+            </a:br>
+            <a:r>
+              <a:rPr lang="fr-FR" noProof="0" dirty="0">
+                <a:solidFill>
+                  <a:srgbClr val="FFFFFF"/>
+                </a:solidFill>
+              </a:rPr>
               <a:t>CF + Content</a:t>
             </a:r>
           </a:p>
@@ -24250,6 +26041,11 @@
               </a:defRPr>
             </a:pPr>
             <a:r>
+              <a:rPr lang="fr-FR" noProof="0" dirty="0">
+                <a:solidFill>
+                  <a:srgbClr val="FFFFFF"/>
+                </a:solidFill>
+              </a:rPr>
               <a:t>Utilisateur connu</a:t>
             </a:r>
           </a:p>
@@ -24263,6 +26059,11 @@
               </a:defRPr>
             </a:pPr>
             <a:r>
+              <a:rPr lang="fr-FR" noProof="0" dirty="0">
+                <a:solidFill>
+                  <a:srgbClr val="FFFFFF"/>
+                </a:solidFill>
+              </a:rPr>
               <a:t>+ recherche</a:t>
             </a:r>
           </a:p>
@@ -24276,6 +26077,11 @@
               </a:defRPr>
             </a:pPr>
             <a:r>
+              <a:rPr lang="fr-FR" noProof="0" dirty="0">
+                <a:solidFill>
+                  <a:srgbClr val="FFFFFF"/>
+                </a:solidFill>
+              </a:rPr>
               <a:t>alpha × CF + (1-α) × CB</a:t>
             </a:r>
           </a:p>
@@ -24317,7 +26123,7 @@
           </a:fontRef>
         </p:style>
         <p:txBody>
-          <a:bodyPr rtlCol="0" anchor="ctr" wrap="square"/>
+          <a:bodyPr wrap="square" rtlCol="0" anchor="ctr"/>
           <a:lstStyle/>
           <a:p>
             <a:pPr algn="ctr">
@@ -24335,6 +26141,11 @@
               </a:defRPr>
             </a:pPr>
             <a:r>
+              <a:rPr lang="fr-FR" noProof="0" dirty="0">
+                <a:solidFill>
+                  <a:srgbClr val="FFFFFF"/>
+                </a:solidFill>
+              </a:rPr>
               <a:t>Popularité</a:t>
             </a:r>
           </a:p>
@@ -24348,6 +26159,11 @@
               </a:defRPr>
             </a:pPr>
             <a:r>
+              <a:rPr lang="fr-FR" noProof="0" dirty="0">
+                <a:solidFill>
+                  <a:srgbClr val="FFFFFF"/>
+                </a:solidFill>
+              </a:rPr>
               <a:t>Utilisateur anonyme</a:t>
             </a:r>
           </a:p>
@@ -24361,6 +26177,11 @@
               </a:defRPr>
             </a:pPr>
             <a:r>
+              <a:rPr lang="fr-FR" noProof="0" dirty="0">
+                <a:solidFill>
+                  <a:srgbClr val="FFFFFF"/>
+                </a:solidFill>
+              </a:rPr>
               <a:t>Pas de recherche</a:t>
             </a:r>
           </a:p>
@@ -24374,6 +26195,11 @@
               </a:defRPr>
             </a:pPr>
             <a:r>
+              <a:rPr lang="fr-FR" noProof="0" dirty="0">
+                <a:solidFill>
+                  <a:srgbClr val="FFFFFF"/>
+                </a:solidFill>
+              </a:rPr>
               <a:t>Moyenne des notes</a:t>
             </a:r>
           </a:p>
@@ -24387,7 +26213,7 @@
         </p:nvSpPr>
         <p:spPr>
           <a:xfrm>
-            <a:off x="3200400" y="1463040"/>
+            <a:off x="5160874" y="1335024"/>
             <a:ext cx="5486400" cy="502920"/>
           </a:xfrm>
           <a:prstGeom prst="roundRect">
@@ -24415,7 +26241,7 @@
           </a:fontRef>
         </p:style>
         <p:txBody>
-          <a:bodyPr rtlCol="0" anchor="ctr" wrap="square"/>
+          <a:bodyPr wrap="square" rtlCol="0" anchor="ctr"/>
           <a:lstStyle/>
           <a:p>
             <a:pPr algn="ctr">
@@ -24433,8 +26259,22 @@
               </a:defRPr>
             </a:pPr>
             <a:r>
-              <a:t>Flask REST API — POST /api/recommendations</a:t>
-            </a:r>
+              <a:rPr lang="fr-FR" noProof="0" dirty="0">
+                <a:solidFill>
+                  <a:srgbClr val="FFFFFF"/>
+                </a:solidFill>
+              </a:rPr>
+              <a:t>Flask REST API — POST /api/</a:t>
+            </a:r>
+            <a:r>
+              <a:rPr lang="fr-FR" noProof="0" dirty="0" err="1">
+                <a:solidFill>
+                  <a:srgbClr val="FFFFFF"/>
+                </a:solidFill>
+              </a:rPr>
+              <a:t>recommendations</a:t>
+            </a:r>
+            <a:endParaRPr lang="fr-FR" noProof="0" dirty="0"/>
           </a:p>
         </p:txBody>
       </p:sp>
@@ -24469,7 +26309,48 @@
               </a:defRPr>
             </a:pPr>
             <a:r>
-              <a:t>Sélection automatique :  connu + pas de query → CF  |  connu + query → Hybrid  |  anonyme + query → Content-Based  |  anonyme + pas de query → Popularité</a:t>
+              <a:rPr lang="fr-FR" noProof="0" dirty="0"/>
+              <a:t>Sélection automatique :  connu + pas de </a:t>
+            </a:r>
+            <a:r>
+              <a:rPr lang="fr-FR" noProof="0" dirty="0" err="1"/>
+              <a:t>query</a:t>
+            </a:r>
+            <a:r>
+              <a:rPr lang="fr-FR" noProof="0" dirty="0"/>
+              <a:t> → CF  |  connu + </a:t>
+            </a:r>
+            <a:r>
+              <a:rPr lang="fr-FR" noProof="0" dirty="0" err="1"/>
+              <a:t>query</a:t>
+            </a:r>
+            <a:r>
+              <a:rPr lang="fr-FR" noProof="0" dirty="0"/>
+              <a:t> → </a:t>
+            </a:r>
+            <a:r>
+              <a:rPr lang="fr-FR" noProof="0" dirty="0" err="1"/>
+              <a:t>Hybrid</a:t>
+            </a:r>
+            <a:r>
+              <a:rPr lang="fr-FR" noProof="0" dirty="0"/>
+              <a:t>  |  anonyme + </a:t>
+            </a:r>
+            <a:r>
+              <a:rPr lang="fr-FR" noProof="0" dirty="0" err="1"/>
+              <a:t>query</a:t>
+            </a:r>
+            <a:r>
+              <a:rPr lang="fr-FR" noProof="0" dirty="0"/>
+              <a:t> → Content-Based  |  anonyme + pas de </a:t>
+            </a:r>
+            <a:r>
+              <a:rPr lang="fr-FR" noProof="0" dirty="0" err="1"/>
+              <a:t>query</a:t>
+            </a:r>
+            <a:r>
+              <a:rPr lang="fr-FR" noProof="0" dirty="0"/>
+              <a:t> → Popularité</a:t>
             </a:r>
           </a:p>
         </p:txBody>
@@ -24514,6 +26395,7 @@
           <a:lstStyle/>
           <a:p>
             <a:pPr algn="ctr"/>
+            <a:endParaRPr lang="fr-FR" noProof="0" dirty="0"/>
           </a:p>
         </p:txBody>
       </p:sp>
@@ -24525,8 +26407,8 @@
 </p:sld>
 </file>
 
-<file path=ppt/slides/slide6.xml><?xml version="1.0" encoding="utf-8"?>
-<p:sld xmlns:a="http://schemas.openxmlformats.org/drawingml/2006/main" xmlns:p="http://schemas.openxmlformats.org/presentationml/2006/main" xmlns:r="http://schemas.openxmlformats.org/officeDocument/2006/relationships">
+<file path=ppt/slides/slide8.xml><?xml version="1.0" encoding="utf-8"?>
+<p:sld xmlns:a="http://schemas.openxmlformats.org/drawingml/2006/main" xmlns:r="http://schemas.openxmlformats.org/officeDocument/2006/relationships" xmlns:p="http://schemas.openxmlformats.org/presentationml/2006/main">
   <p:cSld>
     <p:spTree>
       <p:nvGrpSpPr>
@@ -24534,7 +26416,14 @@
         <p:cNvGrpSpPr/>
         <p:nvPr/>
       </p:nvGrpSpPr>
-      <p:grpSpPr/>
+      <p:grpSpPr>
+        <a:xfrm>
+          <a:off x="0" y="0"/>
+          <a:ext cx="0" cy="0"/>
+          <a:chOff x="0" y="0"/>
+          <a:chExt cx="0" cy="0"/>
+        </a:xfrm>
+      </p:grpSpPr>
       <p:sp>
         <p:nvSpPr>
           <p:cNvPr id="2" name="Title 1"/>
@@ -24551,6 +26440,7 @@
           <a:lstStyle/>
           <a:p>
             <a:r>
+              <a:rPr lang="fr-FR" noProof="0" dirty="0"/>
               <a:t>Architecture du Modèle NCF (He et al., 2017)</a:t>
             </a:r>
           </a:p>
@@ -24592,7 +26482,7 @@
           </a:fontRef>
         </p:style>
         <p:txBody>
-          <a:bodyPr rtlCol="0" anchor="ctr" wrap="square"/>
+          <a:bodyPr wrap="square" rtlCol="0" anchor="ctr"/>
           <a:lstStyle/>
           <a:p>
             <a:pPr algn="ctr">
@@ -24610,8 +26500,30 @@
               </a:defRPr>
             </a:pPr>
             <a:r>
-              <a:t>user_id, item_id</a:t>
-            </a:r>
+              <a:rPr lang="fr-FR" noProof="0" dirty="0" err="1">
+                <a:solidFill>
+                  <a:srgbClr val="FFFFFF"/>
+                </a:solidFill>
+              </a:rPr>
+              <a:t>user_id</a:t>
+            </a:r>
+            <a:r>
+              <a:rPr lang="fr-FR" noProof="0" dirty="0">
+                <a:solidFill>
+                  <a:srgbClr val="FFFFFF"/>
+                </a:solidFill>
+              </a:rPr>
+              <a:t>, </a:t>
+            </a:r>
+            <a:r>
+              <a:rPr lang="fr-FR" noProof="0" dirty="0" err="1">
+                <a:solidFill>
+                  <a:srgbClr val="FFFFFF"/>
+                </a:solidFill>
+              </a:rPr>
+              <a:t>item_id</a:t>
+            </a:r>
+            <a:endParaRPr lang="fr-FR" noProof="0" dirty="0"/>
           </a:p>
         </p:txBody>
       </p:sp>
@@ -24651,7 +26563,7 @@
           </a:fontRef>
         </p:style>
         <p:txBody>
-          <a:bodyPr rtlCol="0" anchor="ctr" wrap="square"/>
+          <a:bodyPr wrap="square" rtlCol="0" anchor="ctr"/>
           <a:lstStyle/>
           <a:p>
             <a:pPr algn="ctr">
@@ -24669,6 +26581,11 @@
               </a:defRPr>
             </a:pPr>
             <a:r>
+              <a:rPr lang="fr-FR" noProof="0" dirty="0">
+                <a:solidFill>
+                  <a:srgbClr val="FFFFFF"/>
+                </a:solidFill>
+              </a:rPr>
               <a:t>GMF Path — Interactions Linéaires</a:t>
             </a:r>
           </a:p>
@@ -24705,14 +26622,53 @@
               </a:defRPr>
             </a:pPr>
             <a:r>
-              <a:t>• User Embedding [n_users, 24]</a:t>
-            </a:r>
-            <a:br/>
-            <a:r>
-              <a:t>• Item Embedding [n_items, 24]</a:t>
-            </a:r>
-            <a:br/>
-            <a:r>
+              <a:rPr lang="fr-FR" noProof="0" dirty="0"/>
+              <a:t>• User </a:t>
+            </a:r>
+            <a:r>
+              <a:rPr lang="fr-FR" noProof="0" dirty="0" err="1"/>
+              <a:t>Embedding</a:t>
+            </a:r>
+            <a:r>
+              <a:rPr lang="fr-FR" noProof="0" dirty="0"/>
+              <a:t> [</a:t>
+            </a:r>
+            <a:r>
+              <a:rPr lang="fr-FR" noProof="0" dirty="0" err="1"/>
+              <a:t>n_users</a:t>
+            </a:r>
+            <a:r>
+              <a:rPr lang="fr-FR" noProof="0" dirty="0"/>
+              <a:t>, 24]</a:t>
+            </a:r>
+            <a:br>
+              <a:rPr lang="fr-FR" noProof="0" dirty="0"/>
+            </a:br>
+            <a:r>
+              <a:rPr lang="fr-FR" noProof="0" dirty="0"/>
+              <a:t>• Item </a:t>
+            </a:r>
+            <a:r>
+              <a:rPr lang="fr-FR" noProof="0" dirty="0" err="1"/>
+              <a:t>Embedding</a:t>
+            </a:r>
+            <a:r>
+              <a:rPr lang="fr-FR" noProof="0" dirty="0"/>
+              <a:t> [</a:t>
+            </a:r>
+            <a:r>
+              <a:rPr lang="fr-FR" noProof="0" dirty="0" err="1"/>
+              <a:t>n_items</a:t>
+            </a:r>
+            <a:r>
+              <a:rPr lang="fr-FR" noProof="0" dirty="0"/>
+              <a:t>, 24]</a:t>
+            </a:r>
+            <a:br>
+              <a:rPr lang="fr-FR" noProof="0" dirty="0"/>
+            </a:br>
+            <a:r>
+              <a:rPr lang="fr-FR" noProof="0" dirty="0"/>
               <a:t>• Produit élément par élément → vecteur [batch, 24]</a:t>
             </a:r>
           </a:p>
@@ -24754,7 +26710,7 @@
           </a:fontRef>
         </p:style>
         <p:txBody>
-          <a:bodyPr rtlCol="0" anchor="ctr" wrap="square"/>
+          <a:bodyPr wrap="square" rtlCol="0" anchor="ctr"/>
           <a:lstStyle/>
           <a:p>
             <a:pPr algn="ctr">
@@ -24772,6 +26728,11 @@
               </a:defRPr>
             </a:pPr>
             <a:r>
+              <a:rPr lang="fr-FR" noProof="0" dirty="0">
+                <a:solidFill>
+                  <a:srgbClr val="FFFFFF"/>
+                </a:solidFill>
+              </a:rPr>
               <a:t>MLP Path — Interactions Non-linéaires</a:t>
             </a:r>
           </a:p>
@@ -24808,18 +26769,68 @@
               </a:defRPr>
             </a:pPr>
             <a:r>
-              <a:t>• User MLP Emb [n_users, 24]  +  Item MLP Emb [n_items, 24]</a:t>
-            </a:r>
-            <a:br/>
-            <a:r>
-              <a:t>• Concat [48] → Linear(48,24) + ReLU + Dropout(0.3)</a:t>
-            </a:r>
-            <a:br/>
-            <a:r>
-              <a:t>• Linear(24,12) + ReLU + Dropout(0.3)</a:t>
-            </a:r>
-            <a:br/>
-            <a:r>
+              <a:rPr lang="fr-FR" noProof="0" dirty="0"/>
+              <a:t>• User MLP Emb [</a:t>
+            </a:r>
+            <a:r>
+              <a:rPr lang="fr-FR" noProof="0" dirty="0" err="1"/>
+              <a:t>n_users</a:t>
+            </a:r>
+            <a:r>
+              <a:rPr lang="fr-FR" noProof="0" dirty="0"/>
+              <a:t>, 24]  +  Item MLP Emb [</a:t>
+            </a:r>
+            <a:r>
+              <a:rPr lang="fr-FR" noProof="0" dirty="0" err="1"/>
+              <a:t>n_items</a:t>
+            </a:r>
+            <a:r>
+              <a:rPr lang="fr-FR" noProof="0" dirty="0"/>
+              <a:t>, 24]</a:t>
+            </a:r>
+            <a:br>
+              <a:rPr lang="fr-FR" noProof="0" dirty="0"/>
+            </a:br>
+            <a:r>
+              <a:rPr lang="fr-FR" noProof="0" dirty="0"/>
+              <a:t>• </a:t>
+            </a:r>
+            <a:r>
+              <a:rPr lang="fr-FR" noProof="0" dirty="0" err="1"/>
+              <a:t>Concat</a:t>
+            </a:r>
+            <a:r>
+              <a:rPr lang="fr-FR" noProof="0" dirty="0"/>
+              <a:t> [48] → Linear(48,24) + </a:t>
+            </a:r>
+            <a:r>
+              <a:rPr lang="fr-FR" noProof="0" dirty="0" err="1"/>
+              <a:t>ReLU</a:t>
+            </a:r>
+            <a:r>
+              <a:rPr lang="fr-FR" noProof="0" dirty="0"/>
+              <a:t> + Dropout(0.3)</a:t>
+            </a:r>
+            <a:br>
+              <a:rPr lang="fr-FR" noProof="0" dirty="0"/>
+            </a:br>
+            <a:r>
+              <a:rPr lang="fr-FR" noProof="0" dirty="0"/>
+              <a:t>• Linear(24,12) + </a:t>
+            </a:r>
+            <a:r>
+              <a:rPr lang="fr-FR" noProof="0" dirty="0" err="1"/>
+              <a:t>ReLU</a:t>
+            </a:r>
+            <a:r>
+              <a:rPr lang="fr-FR" noProof="0" dirty="0"/>
+              <a:t> + Dropout(0.3)</a:t>
+            </a:r>
+            <a:br>
+              <a:rPr lang="fr-FR" noProof="0" dirty="0"/>
+            </a:br>
+            <a:r>
+              <a:rPr lang="fr-FR" noProof="0" dirty="0"/>
               <a:t>• Sortie: vecteur [batch, 12]</a:t>
             </a:r>
           </a:p>
@@ -24861,7 +26872,7 @@
           </a:fontRef>
         </p:style>
         <p:txBody>
-          <a:bodyPr rtlCol="0" anchor="ctr" wrap="square"/>
+          <a:bodyPr wrap="square" rtlCol="0" anchor="ctr"/>
           <a:lstStyle/>
           <a:p>
             <a:pPr algn="ctr">
@@ -24879,7 +26890,76 @@
               </a:defRPr>
             </a:pPr>
             <a:r>
-              <a:t>Fusion: Concat [24+12=36] → Linear(36,1) + user_bias + item_bias + global_bias → Score</a:t>
+              <a:rPr lang="fr-FR" noProof="0" dirty="0">
+                <a:solidFill>
+                  <a:srgbClr val="FFFFFF"/>
+                </a:solidFill>
+              </a:rPr>
+              <a:t>Fusion: </a:t>
+            </a:r>
+            <a:r>
+              <a:rPr lang="fr-FR" noProof="0" dirty="0" err="1">
+                <a:solidFill>
+                  <a:srgbClr val="FFFFFF"/>
+                </a:solidFill>
+              </a:rPr>
+              <a:t>Concat</a:t>
+            </a:r>
+            <a:r>
+              <a:rPr lang="fr-FR" noProof="0" dirty="0">
+                <a:solidFill>
+                  <a:srgbClr val="FFFFFF"/>
+                </a:solidFill>
+              </a:rPr>
+              <a:t> [24+12=36] → Linear(36,1) + </a:t>
+            </a:r>
+            <a:r>
+              <a:rPr lang="fr-FR" noProof="0" dirty="0" err="1">
+                <a:solidFill>
+                  <a:srgbClr val="FFFFFF"/>
+                </a:solidFill>
+              </a:rPr>
+              <a:t>user_bias</a:t>
+            </a:r>
+            <a:r>
+              <a:rPr lang="fr-FR" noProof="0" dirty="0">
+                <a:solidFill>
+                  <a:srgbClr val="FFFFFF"/>
+                </a:solidFill>
+              </a:rPr>
+              <a:t> + </a:t>
+            </a:r>
+            <a:r>
+              <a:rPr lang="fr-FR" noProof="0" dirty="0" err="1">
+                <a:solidFill>
+                  <a:srgbClr val="FFFFFF"/>
+                </a:solidFill>
+              </a:rPr>
+              <a:t>item_bias</a:t>
+            </a:r>
+            <a:r>
+              <a:rPr lang="fr-FR" noProof="0" dirty="0">
+                <a:solidFill>
+                  <a:srgbClr val="FFFFFF"/>
+                </a:solidFill>
+              </a:rPr>
+              <a:t> + </a:t>
+            </a:r>
+            <a:r>
+              <a:rPr lang="fr-FR" noProof="0" dirty="0" err="1">
+                <a:solidFill>
+                  <a:srgbClr val="FFFFFF"/>
+                </a:solidFill>
+              </a:rPr>
+              <a:t>global_bias</a:t>
+            </a:r>
+            <a:r>
+              <a:rPr lang="fr-FR" noProof="0" dirty="0">
+                <a:solidFill>
+                  <a:srgbClr val="FFFFFF"/>
+                </a:solidFill>
+              </a:rPr>
+              <a:t> → Score</a:t>
             </a:r>
           </a:p>
         </p:txBody>
@@ -24924,6 +27004,7 @@
           <a:lstStyle/>
           <a:p>
             <a:pPr algn="ctr"/>
+            <a:endParaRPr lang="fr-FR" noProof="0" dirty="0"/>
           </a:p>
         </p:txBody>
       </p:sp>
@@ -24967,6 +27048,7 @@
           <a:lstStyle/>
           <a:p>
             <a:pPr algn="ctr"/>
+            <a:endParaRPr lang="fr-FR" noProof="0" dirty="0"/>
           </a:p>
         </p:txBody>
       </p:sp>
@@ -25010,6 +27092,7 @@
           <a:lstStyle/>
           <a:p>
             <a:pPr algn="ctr"/>
+            <a:endParaRPr lang="fr-FR" noProof="0" dirty="0"/>
           </a:p>
         </p:txBody>
       </p:sp>
@@ -25021,8 +27104,8 @@
 </p:sld>
 </file>
 
-<file path=ppt/slides/slide7.xml><?xml version="1.0" encoding="utf-8"?>
-<p:sld xmlns:a="http://schemas.openxmlformats.org/drawingml/2006/main" xmlns:p="http://schemas.openxmlformats.org/presentationml/2006/main" xmlns:r="http://schemas.openxmlformats.org/officeDocument/2006/relationships">
+<file path=ppt/slides/slide9.xml><?xml version="1.0" encoding="utf-8"?>
+<p:sld xmlns:a="http://schemas.openxmlformats.org/drawingml/2006/main" xmlns:r="http://schemas.openxmlformats.org/officeDocument/2006/relationships" xmlns:p="http://schemas.openxmlformats.org/presentationml/2006/main">
   <p:cSld>
     <p:spTree>
       <p:nvGrpSpPr>
@@ -25030,7 +27113,14 @@
         <p:cNvGrpSpPr/>
         <p:nvPr/>
       </p:nvGrpSpPr>
-      <p:grpSpPr/>
+      <p:grpSpPr>
+        <a:xfrm>
+          <a:off x="0" y="0"/>
+          <a:ext cx="0" cy="0"/>
+          <a:chOff x="0" y="0"/>
+          <a:chExt cx="0" cy="0"/>
+        </a:xfrm>
+      </p:grpSpPr>
       <p:sp>
         <p:nvSpPr>
           <p:cNvPr id="2" name="Title 1"/>
@@ -25047,6 +27137,7 @@
           <a:lstStyle/>
           <a:p>
             <a:r>
+              <a:rPr lang="fr-FR" noProof="0" dirty="0"/>
               <a:t>Processus d'Entraînement</a:t>
             </a:r>
           </a:p>
@@ -25060,7 +27151,7 @@
         </p:nvSpPr>
         <p:spPr>
           <a:xfrm>
-            <a:off x="365760" y="1645920"/>
+            <a:off x="365760" y="1667866"/>
             <a:ext cx="3474720" cy="2011680"/>
           </a:xfrm>
           <a:prstGeom prst="roundRect">
@@ -25088,7 +27179,7 @@
           </a:fontRef>
         </p:style>
         <p:txBody>
-          <a:bodyPr rtlCol="0" anchor="ctr" wrap="square"/>
+          <a:bodyPr wrap="square" rtlCol="0" anchor="ctr"/>
           <a:lstStyle/>
           <a:p>
             <a:pPr algn="ctr">
@@ -25106,6 +27197,11 @@
               </a:defRPr>
             </a:pPr>
             <a:r>
+              <a:rPr lang="fr-FR" noProof="0" dirty="0">
+                <a:solidFill>
+                  <a:srgbClr val="FFFFFF"/>
+                </a:solidFill>
+              </a:rPr>
               <a:t>Sources de Données</a:t>
             </a:r>
           </a:p>
@@ -25119,7 +27215,7 @@
         </p:nvSpPr>
         <p:spPr>
           <a:xfrm>
-            <a:off x="548640" y="2194560"/>
+            <a:off x="914400" y="2136038"/>
             <a:ext cx="3108960" cy="1371600"/>
           </a:xfrm>
           <a:prstGeom prst="rect">
@@ -25142,6 +27238,11 @@
               </a:defRPr>
             </a:pPr>
             <a:r>
+              <a:rPr lang="fr-FR" noProof="0" dirty="0">
+                <a:solidFill>
+                  <a:srgbClr val="FFFFFF"/>
+                </a:solidFill>
+              </a:rPr>
               <a:t>Ratings explicites (1-5 étoiles)</a:t>
             </a:r>
           </a:p>
@@ -25161,6 +27262,11 @@
               </a:defRPr>
             </a:pPr>
             <a:r>
+              <a:rPr lang="fr-FR" noProof="0" dirty="0">
+                <a:solidFill>
+                  <a:srgbClr val="FFFFFF"/>
+                </a:solidFill>
+              </a:rPr>
               <a:t>~35 000 avis utilisateurs</a:t>
             </a:r>
           </a:p>
@@ -25180,6 +27286,11 @@
               </a:defRPr>
             </a:pPr>
             <a:r>
+              <a:rPr lang="fr-FR" noProof="0" dirty="0">
+                <a:solidFill>
+                  <a:srgbClr val="FFFFFF"/>
+                </a:solidFill>
+              </a:rPr>
               <a:t>Feedback implicite (durée)</a:t>
             </a:r>
           </a:p>
@@ -25199,6 +27310,11 @@
               </a:defRPr>
             </a:pPr>
             <a:r>
+              <a:rPr lang="fr-FR" noProof="0" dirty="0">
+                <a:solidFill>
+                  <a:srgbClr val="FFFFFF"/>
+                </a:solidFill>
+              </a:rPr>
               <a:t>Durée navigation → échelle log</a:t>
             </a:r>
           </a:p>
@@ -25218,6 +27334,11 @@
               </a:defRPr>
             </a:pPr>
             <a:r>
+              <a:rPr lang="fr-FR" noProof="0" dirty="0">
+                <a:solidFill>
+                  <a:srgbClr val="FFFFFF"/>
+                </a:solidFill>
+              </a:rPr>
               <a:t>Converti en scores 1.0-4.0</a:t>
             </a:r>
           </a:p>
@@ -25259,7 +27380,7 @@
           </a:fontRef>
         </p:style>
         <p:txBody>
-          <a:bodyPr rtlCol="0" anchor="ctr" wrap="square"/>
+          <a:bodyPr wrap="square" rtlCol="0" anchor="ctr"/>
           <a:lstStyle/>
           <a:p>
             <a:pPr algn="ctr">
@@ -25277,6 +27398,11 @@
               </a:defRPr>
             </a:pPr>
             <a:r>
+              <a:rPr lang="fr-FR" noProof="0" dirty="0">
+                <a:solidFill>
+                  <a:srgbClr val="FFFFFF"/>
+                </a:solidFill>
+              </a:rPr>
               <a:t>Configuration</a:t>
             </a:r>
           </a:p>
@@ -25313,7 +27439,36 @@
               </a:defRPr>
             </a:pPr>
             <a:r>
-              <a:t>Optimizer: Adam (lr=1e-3)</a:t>
+              <a:rPr lang="fr-FR" noProof="0" dirty="0" err="1">
+                <a:solidFill>
+                  <a:srgbClr val="FFFFFF"/>
+                </a:solidFill>
+              </a:rPr>
+              <a:t>Optimizer</a:t>
+            </a:r>
+            <a:r>
+              <a:rPr lang="fr-FR" noProof="0" dirty="0">
+                <a:solidFill>
+                  <a:srgbClr val="FFFFFF"/>
+                </a:solidFill>
+              </a:rPr>
+              <a:t>: Adam (</a:t>
+            </a:r>
+            <a:r>
+              <a:rPr lang="fr-FR" noProof="0" dirty="0" err="1">
+                <a:solidFill>
+                  <a:srgbClr val="FFFFFF"/>
+                </a:solidFill>
+              </a:rPr>
+              <a:t>lr</a:t>
+            </a:r>
+            <a:r>
+              <a:rPr lang="fr-FR" noProof="0" dirty="0">
+                <a:solidFill>
+                  <a:srgbClr val="FFFFFF"/>
+                </a:solidFill>
+              </a:rPr>
+              <a:t>=1e-3)</a:t>
             </a:r>
           </a:p>
           <a:p>
@@ -25332,6 +27487,11 @@
               </a:defRPr>
             </a:pPr>
             <a:r>
+              <a:rPr lang="fr-FR" noProof="0" dirty="0">
+                <a:solidFill>
+                  <a:srgbClr val="FFFFFF"/>
+                </a:solidFill>
+              </a:rPr>
               <a:t>Loss: MSE (régression)</a:t>
             </a:r>
           </a:p>
@@ -25351,7 +27511,28 @@
               </a:defRPr>
             </a:pPr>
             <a:r>
-              <a:t>Batch: 256 | Epochs: 80</a:t>
+              <a:rPr lang="fr-FR" noProof="0" dirty="0">
+                <a:solidFill>
+                  <a:srgbClr val="FFFFFF"/>
+                </a:solidFill>
+              </a:rPr>
+              <a:t>Batch: 256 | </a:t>
+            </a:r>
+            <a:r>
+              <a:rPr lang="fr-FR" noProof="0" dirty="0" err="1">
+                <a:solidFill>
+                  <a:srgbClr val="FFFFFF"/>
+                </a:solidFill>
+              </a:rPr>
+              <a:t>Epochs</a:t>
+            </a:r>
+            <a:r>
+              <a:rPr lang="fr-FR" noProof="0" dirty="0">
+                <a:solidFill>
+                  <a:srgbClr val="FFFFFF"/>
+                </a:solidFill>
+              </a:rPr>
+              <a:t>: 80</a:t>
             </a:r>
           </a:p>
           <a:p>
@@ -25370,7 +27551,28 @@
               </a:defRPr>
             </a:pPr>
             <a:r>
-              <a:t>Weight decay: 5e-4 (L2)</a:t>
+              <a:rPr lang="fr-FR" noProof="0" dirty="0">
+                <a:solidFill>
+                  <a:srgbClr val="FFFFFF"/>
+                </a:solidFill>
+              </a:rPr>
+              <a:t>Weight </a:t>
+            </a:r>
+            <a:r>
+              <a:rPr lang="fr-FR" noProof="0" dirty="0" err="1">
+                <a:solidFill>
+                  <a:srgbClr val="FFFFFF"/>
+                </a:solidFill>
+              </a:rPr>
+              <a:t>decay</a:t>
+            </a:r>
+            <a:r>
+              <a:rPr lang="fr-FR" noProof="0" dirty="0">
+                <a:solidFill>
+                  <a:srgbClr val="FFFFFF"/>
+                </a:solidFill>
+              </a:rPr>
+              <a:t>: 5e-4 (L2)</a:t>
             </a:r>
           </a:p>
           <a:p>
@@ -25389,6 +27591,11 @@
               </a:defRPr>
             </a:pPr>
             <a:r>
+              <a:rPr lang="fr-FR" noProof="0" dirty="0">
+                <a:solidFill>
+                  <a:srgbClr val="FFFFFF"/>
+                </a:solidFill>
+              </a:rPr>
               <a:t>Dropout: 0.3</a:t>
             </a:r>
           </a:p>
@@ -25430,7 +27637,7 @@
           </a:fontRef>
         </p:style>
         <p:txBody>
-          <a:bodyPr rtlCol="0" anchor="ctr" wrap="square"/>
+          <a:bodyPr wrap="square" rtlCol="0" anchor="ctr"/>
           <a:lstStyle/>
           <a:p>
             <a:pPr algn="ctr">
@@ -25448,6 +27655,11 @@
               </a:defRPr>
             </a:pPr>
             <a:r>
+              <a:rPr lang="fr-FR" noProof="0" dirty="0">
+                <a:solidFill>
+                  <a:srgbClr val="FFFFFF"/>
+                </a:solidFill>
+              </a:rPr>
               <a:t>Anti-Surapprentissage</a:t>
             </a:r>
           </a:p>
@@ -25484,6 +27696,11 @@
               </a:defRPr>
             </a:pPr>
             <a:r>
+              <a:rPr lang="fr-FR" noProof="0" dirty="0">
+                <a:solidFill>
+                  <a:srgbClr val="FFFFFF"/>
+                </a:solidFill>
+              </a:rPr>
               <a:t>Dropout(0.3) — désactive 30%</a:t>
             </a:r>
           </a:p>
@@ -25503,6 +27720,11 @@
               </a:defRPr>
             </a:pPr>
             <a:r>
+              <a:rPr lang="fr-FR" noProof="0" dirty="0">
+                <a:solidFill>
+                  <a:srgbClr val="FFFFFF"/>
+                </a:solidFill>
+              </a:rPr>
               <a:t>des neurones aléatoirement</a:t>
             </a:r>
           </a:p>
@@ -25522,7 +27744,28 @@
               </a:defRPr>
             </a:pPr>
             <a:r>
-              <a:t>Weight Decay (L2)</a:t>
+              <a:rPr lang="fr-FR" noProof="0" dirty="0">
+                <a:solidFill>
+                  <a:srgbClr val="FFFFFF"/>
+                </a:solidFill>
+              </a:rPr>
+              <a:t>Weight </a:t>
+            </a:r>
+            <a:r>
+              <a:rPr lang="fr-FR" noProof="0" dirty="0" err="1">
+                <a:solidFill>
+                  <a:srgbClr val="FFFFFF"/>
+                </a:solidFill>
+              </a:rPr>
+              <a:t>Decay</a:t>
+            </a:r>
+            <a:r>
+              <a:rPr lang="fr-FR" noProof="0" dirty="0">
+                <a:solidFill>
+                  <a:srgbClr val="FFFFFF"/>
+                </a:solidFill>
+              </a:rPr>
+              <a:t> (L2)</a:t>
             </a:r>
           </a:p>
           <a:p>
@@ -25541,6 +27784,11 @@
               </a:defRPr>
             </a:pPr>
             <a:r>
+              <a:rPr lang="fr-FR" noProof="0" dirty="0">
+                <a:solidFill>
+                  <a:srgbClr val="FFFFFF"/>
+                </a:solidFill>
+              </a:rPr>
               <a:t>Tire les poids vers zéro</a:t>
             </a:r>
           </a:p>
@@ -25560,8 +27808,22 @@
               </a:defRPr>
             </a:pPr>
             <a:r>
-              <a:t>Empêche l'explosion des embeddings</a:t>
-            </a:r>
+              <a:rPr lang="fr-FR" noProof="0" dirty="0">
+                <a:solidFill>
+                  <a:srgbClr val="FFFFFF"/>
+                </a:solidFill>
+              </a:rPr>
+              <a:t>Empêche l'explosion des </a:t>
+            </a:r>
+            <a:r>
+              <a:rPr lang="fr-FR" noProof="0" dirty="0" err="1">
+                <a:solidFill>
+                  <a:srgbClr val="FFFFFF"/>
+                </a:solidFill>
+              </a:rPr>
+              <a:t>embeddings</a:t>
+            </a:r>
+            <a:endParaRPr lang="fr-FR" noProof="0" dirty="0"/>
           </a:p>
         </p:txBody>
       </p:sp>
@@ -25601,7 +27863,7 @@
           </a:fontRef>
         </p:style>
         <p:txBody>
-          <a:bodyPr rtlCol="0" anchor="ctr" wrap="square"/>
+          <a:bodyPr wrap="square" rtlCol="0" anchor="ctr"/>
           <a:lstStyle/>
           <a:p>
             <a:pPr algn="ctr">
@@ -25619,6 +27881,11 @@
               </a:defRPr>
             </a:pPr>
             <a:r>
+              <a:rPr lang="fr-FR" noProof="0" dirty="0">
+                <a:solidFill>
+                  <a:srgbClr val="FFFFFF"/>
+                </a:solidFill>
+              </a:rPr>
               <a:t>1. Forward</a:t>
             </a:r>
           </a:p>
@@ -25632,6 +27899,11 @@
               </a:defRPr>
             </a:pPr>
             <a:r>
+              <a:rPr lang="fr-FR" noProof="0" dirty="0">
+                <a:solidFill>
+                  <a:srgbClr val="FFFFFF"/>
+                </a:solidFill>
+              </a:rPr>
               <a:t>Input [user, item]</a:t>
             </a:r>
           </a:p>
@@ -25645,6 +27917,11 @@
               </a:defRPr>
             </a:pPr>
             <a:r>
+              <a:rPr lang="fr-FR" noProof="0" dirty="0">
+                <a:solidFill>
+                  <a:srgbClr val="FFFFFF"/>
+                </a:solidFill>
+              </a:rPr>
               <a:t>→ NCF → score prédit</a:t>
             </a:r>
           </a:p>
@@ -25690,6 +27967,7 @@
           <a:lstStyle/>
           <a:p>
             <a:pPr algn="ctr"/>
+            <a:endParaRPr lang="fr-FR" noProof="0" dirty="0"/>
           </a:p>
         </p:txBody>
       </p:sp>
@@ -25729,7 +28007,7 @@
           </a:fontRef>
         </p:style>
         <p:txBody>
-          <a:bodyPr rtlCol="0" anchor="ctr" wrap="square"/>
+          <a:bodyPr wrap="square" rtlCol="0" anchor="ctr"/>
           <a:lstStyle/>
           <a:p>
             <a:pPr algn="ctr">
@@ -25747,6 +28025,11 @@
               </a:defRPr>
             </a:pPr>
             <a:r>
+              <a:rPr lang="fr-FR" noProof="0" dirty="0">
+                <a:solidFill>
+                  <a:srgbClr val="FFFFFF"/>
+                </a:solidFill>
+              </a:rPr>
               <a:t>2. Loss</a:t>
             </a:r>
           </a:p>
@@ -25760,7 +28043,28 @@
               </a:defRPr>
             </a:pPr>
             <a:r>
-              <a:t>MSE = mean(</a:t>
+              <a:rPr lang="fr-FR" noProof="0" dirty="0">
+                <a:solidFill>
+                  <a:srgbClr val="FFFFFF"/>
+                </a:solidFill>
+              </a:rPr>
+              <a:t>MSE = </a:t>
+            </a:r>
+            <a:r>
+              <a:rPr lang="fr-FR" noProof="0" dirty="0" err="1">
+                <a:solidFill>
+                  <a:srgbClr val="FFFFFF"/>
+                </a:solidFill>
+              </a:rPr>
+              <a:t>mean</a:t>
+            </a:r>
+            <a:r>
+              <a:rPr lang="fr-FR" noProof="0" dirty="0">
+                <a:solidFill>
+                  <a:srgbClr val="FFFFFF"/>
+                </a:solidFill>
+              </a:rPr>
+              <a:t>(</a:t>
             </a:r>
           </a:p>
           <a:p>
@@ -25773,6 +28077,11 @@
               </a:defRPr>
             </a:pPr>
             <a:r>
+              <a:rPr lang="fr-FR" noProof="0" dirty="0">
+                <a:solidFill>
+                  <a:srgbClr val="FFFFFF"/>
+                </a:solidFill>
+              </a:rPr>
               <a:t>(prédit - réel)²)</a:t>
             </a:r>
           </a:p>
@@ -25818,6 +28127,7 @@
           <a:lstStyle/>
           <a:p>
             <a:pPr algn="ctr"/>
+            <a:endParaRPr lang="fr-FR" noProof="0" dirty="0"/>
           </a:p>
         </p:txBody>
       </p:sp>
@@ -25857,7 +28167,7 @@
           </a:fontRef>
         </p:style>
         <p:txBody>
-          <a:bodyPr rtlCol="0" anchor="ctr" wrap="square"/>
+          <a:bodyPr wrap="square" rtlCol="0" anchor="ctr"/>
           <a:lstStyle/>
           <a:p>
             <a:pPr algn="ctr">
@@ -25875,8 +28185,22 @@
               </a:defRPr>
             </a:pPr>
             <a:r>
-              <a:t>3. Backward</a:t>
-            </a:r>
+              <a:rPr lang="fr-FR" noProof="0" dirty="0">
+                <a:solidFill>
+                  <a:srgbClr val="FFFFFF"/>
+                </a:solidFill>
+              </a:rPr>
+              <a:t>3. </a:t>
+            </a:r>
+            <a:r>
+              <a:rPr lang="fr-FR" noProof="0" dirty="0" err="1">
+                <a:solidFill>
+                  <a:srgbClr val="FFFFFF"/>
+                </a:solidFill>
+              </a:rPr>
+              <a:t>Backward</a:t>
+            </a:r>
+            <a:endParaRPr lang="fr-FR" noProof="0" dirty="0"/>
           </a:p>
           <a:p>
             <a:pPr algn="ctr">
@@ -25888,7 +28212,20 @@
               </a:defRPr>
             </a:pPr>
             <a:r>
-              <a:t>Autograd calcule</a:t>
+              <a:rPr lang="fr-FR" noProof="0" dirty="0" err="1">
+                <a:solidFill>
+                  <a:srgbClr val="FFFFFF"/>
+                </a:solidFill>
+              </a:rPr>
+              <a:t>Autograd</a:t>
+            </a:r>
+            <a:r>
+              <a:rPr lang="fr-FR" noProof="0" dirty="0">
+                <a:solidFill>
+                  <a:srgbClr val="FFFFFF"/>
+                </a:solidFill>
+              </a:rPr>
+              <a:t> calcule</a:t>
             </a:r>
           </a:p>
           <a:p>
@@ -25901,6 +28238,11 @@
               </a:defRPr>
             </a:pPr>
             <a:r>
+              <a:rPr lang="fr-FR" noProof="0" dirty="0">
+                <a:solidFill>
+                  <a:srgbClr val="FFFFFF"/>
+                </a:solidFill>
+              </a:rPr>
               <a:t>∂Loss/∂Param</a:t>
             </a:r>
           </a:p>
@@ -25946,6 +28288,7 @@
           <a:lstStyle/>
           <a:p>
             <a:pPr algn="ctr"/>
+            <a:endParaRPr lang="fr-FR" noProof="0" dirty="0"/>
           </a:p>
         </p:txBody>
       </p:sp>
@@ -25985,7 +28328,7 @@
           </a:fontRef>
         </p:style>
         <p:txBody>
-          <a:bodyPr rtlCol="0" anchor="ctr" wrap="square"/>
+          <a:bodyPr wrap="square" rtlCol="0" anchor="ctr"/>
           <a:lstStyle/>
           <a:p>
             <a:pPr algn="ctr">
@@ -26003,6 +28346,11 @@
               </a:defRPr>
             </a:pPr>
             <a:r>
+              <a:rPr lang="fr-FR" noProof="0" dirty="0">
+                <a:solidFill>
+                  <a:srgbClr val="FFFFFF"/>
+                </a:solidFill>
+              </a:rPr>
               <a:t>4. Update</a:t>
             </a:r>
           </a:p>
@@ -26016,6 +28364,11 @@
               </a:defRPr>
             </a:pPr>
             <a:r>
+              <a:rPr lang="fr-FR" noProof="0" dirty="0">
+                <a:solidFill>
+                  <a:srgbClr val="FFFFFF"/>
+                </a:solidFill>
+              </a:rPr>
               <a:t>Adam ajuste</a:t>
             </a:r>
           </a:p>
@@ -26029,7 +28382,20 @@
               </a:defRPr>
             </a:pPr>
             <a:r>
-              <a:t>embeddings + poids</a:t>
+              <a:rPr lang="fr-FR" noProof="0" dirty="0" err="1">
+                <a:solidFill>
+                  <a:srgbClr val="FFFFFF"/>
+                </a:solidFill>
+              </a:rPr>
+              <a:t>embeddings</a:t>
+            </a:r>
+            <a:r>
+              <a:rPr lang="fr-FR" noProof="0" dirty="0">
+                <a:solidFill>
+                  <a:srgbClr val="FFFFFF"/>
+                </a:solidFill>
+              </a:rPr>
+              <a:t> + poids</a:t>
             </a:r>
           </a:p>
         </p:txBody>
@@ -26065,1528 +28431,8 @@
               </a:defRPr>
             </a:pPr>
             <a:r>
+              <a:rPr lang="fr-FR" noProof="0" dirty="0"/>
               <a:t>Boucle d'entraînement standard Deep Learning — ~15 000 paramètres entraînables</a:t>
-            </a:r>
-          </a:p>
-        </p:txBody>
-      </p:sp>
-    </p:spTree>
-  </p:cSld>
-  <p:clrMapOvr>
-    <a:masterClrMapping/>
-  </p:clrMapOvr>
-</p:sld>
-</file>
-
-<file path=ppt/slides/slide8.xml><?xml version="1.0" encoding="utf-8"?>
-<p:sld xmlns:a="http://schemas.openxmlformats.org/drawingml/2006/main" xmlns:p="http://schemas.openxmlformats.org/presentationml/2006/main" xmlns:r="http://schemas.openxmlformats.org/officeDocument/2006/relationships">
-  <p:cSld>
-    <p:spTree>
-      <p:nvGrpSpPr>
-        <p:cNvPr id="1" name=""/>
-        <p:cNvGrpSpPr/>
-        <p:nvPr/>
-      </p:nvGrpSpPr>
-      <p:grpSpPr/>
-      <p:sp>
-        <p:nvSpPr>
-          <p:cNvPr id="2" name="Title 1"/>
-          <p:cNvSpPr>
-            <a:spLocks noGrp="1"/>
-          </p:cNvSpPr>
-          <p:nvPr>
-            <p:ph type="title"/>
-          </p:nvPr>
-        </p:nvSpPr>
-        <p:spPr/>
-        <p:txBody>
-          <a:bodyPr/>
-          <a:lstStyle/>
-          <a:p>
-            <a:r>
-              <a:t>Pipeline d'Inférence (Recommandation)</a:t>
-            </a:r>
-          </a:p>
-        </p:txBody>
-      </p:sp>
-      <p:sp>
-        <p:nvSpPr>
-          <p:cNvPr id="3" name="Rounded Rectangle 2"/>
-          <p:cNvSpPr/>
-          <p:nvPr/>
-        </p:nvSpPr>
-        <p:spPr>
-          <a:xfrm>
-            <a:off x="365760" y="1828800"/>
-            <a:ext cx="2468880" cy="2011680"/>
-          </a:xfrm>
-          <a:prstGeom prst="roundRect">
-            <a:avLst/>
-          </a:prstGeom>
-          <a:solidFill>
-            <a:srgbClr val="4472C4"/>
-          </a:solidFill>
-          <a:ln>
-            <a:noFill/>
-          </a:ln>
-        </p:spPr>
-        <p:style>
-          <a:lnRef idx="1">
-            <a:schemeClr val="accent1"/>
-          </a:lnRef>
-          <a:fillRef idx="3">
-            <a:schemeClr val="accent1"/>
-          </a:fillRef>
-          <a:effectRef idx="2">
-            <a:schemeClr val="accent1"/>
-          </a:effectRef>
-          <a:fontRef idx="minor">
-            <a:schemeClr val="lt1"/>
-          </a:fontRef>
-        </p:style>
-        <p:txBody>
-          <a:bodyPr rtlCol="0" anchor="ctr" wrap="square"/>
-          <a:lstStyle/>
-          <a:p>
-            <a:pPr algn="ctr">
-              <a:spcBef>
-                <a:spcPts val="0"/>
-              </a:spcBef>
-              <a:spcAft>
-                <a:spcPts val="600"/>
-              </a:spcAft>
-              <a:defRPr sz="1400" b="1">
-                <a:solidFill>
-                  <a:srgbClr val="FFFFFF"/>
-                </a:solidFill>
-                <a:latin typeface="Calibri"/>
-              </a:defRPr>
-            </a:pPr>
-            <a:r>
-              <a:t>Étape 1</a:t>
-            </a:r>
-            <a:br/>
-            <a:r>
-              <a:t>Construction</a:t>
-            </a:r>
-          </a:p>
-          <a:p>
-            <a:pPr algn="ctr">
-              <a:defRPr sz="1100">
-                <a:solidFill>
-                  <a:srgbClr val="FFFFFF"/>
-                </a:solidFill>
-                <a:latin typeface="Calibri"/>
-              </a:defRPr>
-            </a:pPr>
-            <a:r>
-              <a:t>Répliquer user_idx</a:t>
-            </a:r>
-          </a:p>
-          <a:p>
-            <a:pPr algn="ctr">
-              <a:defRPr sz="1100">
-                <a:solidFill>
-                  <a:srgbClr val="FFFFFF"/>
-                </a:solidFill>
-                <a:latin typeface="Calibri"/>
-              </a:defRPr>
-            </a:pPr>
-            <a:r>
-              <a:t>N fois, pairer</a:t>
-            </a:r>
-          </a:p>
-          <a:p>
-            <a:pPr algn="ctr">
-              <a:defRPr sz="1100">
-                <a:solidFill>
-                  <a:srgbClr val="FFFFFF"/>
-                </a:solidFill>
-                <a:latin typeface="Calibri"/>
-              </a:defRPr>
-            </a:pPr>
-            <a:r>
-              <a:t>avec tous les items</a:t>
-            </a:r>
-          </a:p>
-          <a:p>
-            <a:pPr algn="ctr">
-              <a:defRPr sz="1100">
-                <a:solidFill>
-                  <a:srgbClr val="FFFFFF"/>
-                </a:solidFill>
-                <a:latin typeface="Calibri"/>
-              </a:defRPr>
-            </a:pPr>
-            <a:r>
-              <a:t>→ tenseur [N, 2]</a:t>
-            </a:r>
-          </a:p>
-        </p:txBody>
-      </p:sp>
-      <p:sp>
-        <p:nvSpPr>
-          <p:cNvPr id="4" name="Right Arrow 3"/>
-          <p:cNvSpPr/>
-          <p:nvPr/>
-        </p:nvSpPr>
-        <p:spPr>
-          <a:xfrm>
-            <a:off x="2880360" y="2724912"/>
-            <a:ext cx="365760" cy="228600"/>
-          </a:xfrm>
-          <a:prstGeom prst="rightArrow">
-            <a:avLst/>
-          </a:prstGeom>
-          <a:solidFill>
-            <a:srgbClr val="AAAAAA"/>
-          </a:solidFill>
-          <a:ln>
-            <a:noFill/>
-          </a:ln>
-        </p:spPr>
-        <p:style>
-          <a:lnRef idx="1">
-            <a:schemeClr val="accent1"/>
-          </a:lnRef>
-          <a:fillRef idx="3">
-            <a:schemeClr val="accent1"/>
-          </a:fillRef>
-          <a:effectRef idx="2">
-            <a:schemeClr val="accent1"/>
-          </a:effectRef>
-          <a:fontRef idx="minor">
-            <a:schemeClr val="lt1"/>
-          </a:fontRef>
-        </p:style>
-        <p:txBody>
-          <a:bodyPr rtlCol="0" anchor="ctr"/>
-          <a:lstStyle/>
-          <a:p>
-            <a:pPr algn="ctr"/>
-          </a:p>
-        </p:txBody>
-      </p:sp>
-      <p:sp>
-        <p:nvSpPr>
-          <p:cNvPr id="5" name="Rounded Rectangle 4"/>
-          <p:cNvSpPr/>
-          <p:nvPr/>
-        </p:nvSpPr>
-        <p:spPr>
-          <a:xfrm>
-            <a:off x="3291840" y="1828800"/>
-            <a:ext cx="2468880" cy="2011680"/>
-          </a:xfrm>
-          <a:prstGeom prst="roundRect">
-            <a:avLst/>
-          </a:prstGeom>
-          <a:solidFill>
-            <a:srgbClr val="ED7D31"/>
-          </a:solidFill>
-          <a:ln>
-            <a:noFill/>
-          </a:ln>
-        </p:spPr>
-        <p:style>
-          <a:lnRef idx="1">
-            <a:schemeClr val="accent1"/>
-          </a:lnRef>
-          <a:fillRef idx="3">
-            <a:schemeClr val="accent1"/>
-          </a:fillRef>
-          <a:effectRef idx="2">
-            <a:schemeClr val="accent1"/>
-          </a:effectRef>
-          <a:fontRef idx="minor">
-            <a:schemeClr val="lt1"/>
-          </a:fontRef>
-        </p:style>
-        <p:txBody>
-          <a:bodyPr rtlCol="0" anchor="ctr" wrap="square"/>
-          <a:lstStyle/>
-          <a:p>
-            <a:pPr algn="ctr">
-              <a:spcBef>
-                <a:spcPts val="0"/>
-              </a:spcBef>
-              <a:spcAft>
-                <a:spcPts val="600"/>
-              </a:spcAft>
-              <a:defRPr sz="1400" b="1">
-                <a:solidFill>
-                  <a:srgbClr val="FFFFFF"/>
-                </a:solidFill>
-                <a:latin typeface="Calibri"/>
-              </a:defRPr>
-            </a:pPr>
-            <a:r>
-              <a:t>Étape 2</a:t>
-            </a:r>
-            <a:br/>
-            <a:r>
-              <a:t>Forward Pass</a:t>
-            </a:r>
-          </a:p>
-          <a:p>
-            <a:pPr algn="ctr">
-              <a:defRPr sz="1100">
-                <a:solidFill>
-                  <a:srgbClr val="FFFFFF"/>
-                </a:solidFill>
-                <a:latin typeface="Calibri"/>
-              </a:defRPr>
-            </a:pPr>
-            <a:r>
-              <a:t>Un seul passage</a:t>
-            </a:r>
-          </a:p>
-          <a:p>
-            <a:pPr algn="ctr">
-              <a:defRPr sz="1100">
-                <a:solidFill>
-                  <a:srgbClr val="FFFFFF"/>
-                </a:solidFill>
-                <a:latin typeface="Calibri"/>
-              </a:defRPr>
-            </a:pPr>
-            <a:r>
-              <a:t>dans le NCF</a:t>
-            </a:r>
-          </a:p>
-          <a:p>
-            <a:pPr algn="ctr">
-              <a:defRPr sz="1100">
-                <a:solidFill>
-                  <a:srgbClr val="FFFFFF"/>
-                </a:solidFill>
-                <a:latin typeface="Calibri"/>
-              </a:defRPr>
-            </a:pPr>
-            <a:r>
-              <a:t>N items scorés</a:t>
-            </a:r>
-          </a:p>
-          <a:p>
-            <a:pPr algn="ctr">
-              <a:defRPr sz="1100">
-                <a:solidFill>
-                  <a:srgbClr val="FFFFFF"/>
-                </a:solidFill>
-                <a:latin typeface="Calibri"/>
-              </a:defRPr>
-            </a:pPr>
-            <a:r>
-              <a:t>en parallèle → [N]</a:t>
-            </a:r>
-          </a:p>
-        </p:txBody>
-      </p:sp>
-      <p:sp>
-        <p:nvSpPr>
-          <p:cNvPr id="6" name="Right Arrow 5"/>
-          <p:cNvSpPr/>
-          <p:nvPr/>
-        </p:nvSpPr>
-        <p:spPr>
-          <a:xfrm>
-            <a:off x="5806440" y="2724912"/>
-            <a:ext cx="365760" cy="228600"/>
-          </a:xfrm>
-          <a:prstGeom prst="rightArrow">
-            <a:avLst/>
-          </a:prstGeom>
-          <a:solidFill>
-            <a:srgbClr val="AAAAAA"/>
-          </a:solidFill>
-          <a:ln>
-            <a:noFill/>
-          </a:ln>
-        </p:spPr>
-        <p:style>
-          <a:lnRef idx="1">
-            <a:schemeClr val="accent1"/>
-          </a:lnRef>
-          <a:fillRef idx="3">
-            <a:schemeClr val="accent1"/>
-          </a:fillRef>
-          <a:effectRef idx="2">
-            <a:schemeClr val="accent1"/>
-          </a:effectRef>
-          <a:fontRef idx="minor">
-            <a:schemeClr val="lt1"/>
-          </a:fontRef>
-        </p:style>
-        <p:txBody>
-          <a:bodyPr rtlCol="0" anchor="ctr"/>
-          <a:lstStyle/>
-          <a:p>
-            <a:pPr algn="ctr"/>
-          </a:p>
-        </p:txBody>
-      </p:sp>
-      <p:sp>
-        <p:nvSpPr>
-          <p:cNvPr id="7" name="Rounded Rectangle 6"/>
-          <p:cNvSpPr/>
-          <p:nvPr/>
-        </p:nvSpPr>
-        <p:spPr>
-          <a:xfrm>
-            <a:off x="6217920" y="1828800"/>
-            <a:ext cx="2468880" cy="2011680"/>
-          </a:xfrm>
-          <a:prstGeom prst="roundRect">
-            <a:avLst/>
-          </a:prstGeom>
-          <a:solidFill>
-            <a:srgbClr val="70AD47"/>
-          </a:solidFill>
-          <a:ln>
-            <a:noFill/>
-          </a:ln>
-        </p:spPr>
-        <p:style>
-          <a:lnRef idx="1">
-            <a:schemeClr val="accent1"/>
-          </a:lnRef>
-          <a:fillRef idx="3">
-            <a:schemeClr val="accent1"/>
-          </a:fillRef>
-          <a:effectRef idx="2">
-            <a:schemeClr val="accent1"/>
-          </a:effectRef>
-          <a:fontRef idx="minor">
-            <a:schemeClr val="lt1"/>
-          </a:fontRef>
-        </p:style>
-        <p:txBody>
-          <a:bodyPr rtlCol="0" anchor="ctr" wrap="square"/>
-          <a:lstStyle/>
-          <a:p>
-            <a:pPr algn="ctr">
-              <a:spcBef>
-                <a:spcPts val="0"/>
-              </a:spcBef>
-              <a:spcAft>
-                <a:spcPts val="600"/>
-              </a:spcAft>
-              <a:defRPr sz="1400" b="1">
-                <a:solidFill>
-                  <a:srgbClr val="FFFFFF"/>
-                </a:solidFill>
-                <a:latin typeface="Calibri"/>
-              </a:defRPr>
-            </a:pPr>
-            <a:r>
-              <a:t>Étape 3</a:t>
-            </a:r>
-            <a:br/>
-            <a:r>
-              <a:t>Tri &amp; Filtrage</a:t>
-            </a:r>
-          </a:p>
-          <a:p>
-            <a:pPr algn="ctr">
-              <a:defRPr sz="1100">
-                <a:solidFill>
-                  <a:srgbClr val="FFFFFF"/>
-                </a:solidFill>
-                <a:latin typeface="Calibri"/>
-              </a:defRPr>
-            </a:pPr>
-            <a:r>
-              <a:t>Trier par score</a:t>
-            </a:r>
-          </a:p>
-          <a:p>
-            <a:pPr algn="ctr">
-              <a:defRPr sz="1100">
-                <a:solidFill>
-                  <a:srgbClr val="FFFFFF"/>
-                </a:solidFill>
-                <a:latin typeface="Calibri"/>
-              </a:defRPr>
-            </a:pPr>
-            <a:r>
-              <a:t>descendant</a:t>
-            </a:r>
-          </a:p>
-          <a:p>
-            <a:pPr algn="ctr">
-              <a:defRPr sz="1100">
-                <a:solidFill>
-                  <a:srgbClr val="FFFFFF"/>
-                </a:solidFill>
-                <a:latin typeface="Calibri"/>
-              </a:defRPr>
-            </a:pPr>
-            <a:r>
-              <a:t>Exclure items déjà</a:t>
-            </a:r>
-          </a:p>
-          <a:p>
-            <a:pPr algn="ctr">
-              <a:defRPr sz="1100">
-                <a:solidFill>
-                  <a:srgbClr val="FFFFFF"/>
-                </a:solidFill>
-                <a:latin typeface="Calibri"/>
-              </a:defRPr>
-            </a:pPr>
-            <a:r>
-              <a:t>vus → Top-K</a:t>
-            </a:r>
-          </a:p>
-        </p:txBody>
-      </p:sp>
-      <p:sp>
-        <p:nvSpPr>
-          <p:cNvPr id="8" name="Right Arrow 7"/>
-          <p:cNvSpPr/>
-          <p:nvPr/>
-        </p:nvSpPr>
-        <p:spPr>
-          <a:xfrm>
-            <a:off x="8732520" y="2724912"/>
-            <a:ext cx="365760" cy="228600"/>
-          </a:xfrm>
-          <a:prstGeom prst="rightArrow">
-            <a:avLst/>
-          </a:prstGeom>
-          <a:solidFill>
-            <a:srgbClr val="AAAAAA"/>
-          </a:solidFill>
-          <a:ln>
-            <a:noFill/>
-          </a:ln>
-        </p:spPr>
-        <p:style>
-          <a:lnRef idx="1">
-            <a:schemeClr val="accent1"/>
-          </a:lnRef>
-          <a:fillRef idx="3">
-            <a:schemeClr val="accent1"/>
-          </a:fillRef>
-          <a:effectRef idx="2">
-            <a:schemeClr val="accent1"/>
-          </a:effectRef>
-          <a:fontRef idx="minor">
-            <a:schemeClr val="lt1"/>
-          </a:fontRef>
-        </p:style>
-        <p:txBody>
-          <a:bodyPr rtlCol="0" anchor="ctr"/>
-          <a:lstStyle/>
-          <a:p>
-            <a:pPr algn="ctr"/>
-          </a:p>
-        </p:txBody>
-      </p:sp>
-      <p:sp>
-        <p:nvSpPr>
-          <p:cNvPr id="9" name="Rounded Rectangle 8"/>
-          <p:cNvSpPr/>
-          <p:nvPr/>
-        </p:nvSpPr>
-        <p:spPr>
-          <a:xfrm>
-            <a:off x="9144000" y="1828800"/>
-            <a:ext cx="2468880" cy="2011680"/>
-          </a:xfrm>
-          <a:prstGeom prst="roundRect">
-            <a:avLst/>
-          </a:prstGeom>
-          <a:solidFill>
-            <a:srgbClr val="FFC000"/>
-          </a:solidFill>
-          <a:ln>
-            <a:noFill/>
-          </a:ln>
-        </p:spPr>
-        <p:style>
-          <a:lnRef idx="1">
-            <a:schemeClr val="accent1"/>
-          </a:lnRef>
-          <a:fillRef idx="3">
-            <a:schemeClr val="accent1"/>
-          </a:fillRef>
-          <a:effectRef idx="2">
-            <a:schemeClr val="accent1"/>
-          </a:effectRef>
-          <a:fontRef idx="minor">
-            <a:schemeClr val="lt1"/>
-          </a:fontRef>
-        </p:style>
-        <p:txBody>
-          <a:bodyPr rtlCol="0" anchor="ctr" wrap="square"/>
-          <a:lstStyle/>
-          <a:p>
-            <a:pPr algn="ctr">
-              <a:spcBef>
-                <a:spcPts val="0"/>
-              </a:spcBef>
-              <a:spcAft>
-                <a:spcPts val="600"/>
-              </a:spcAft>
-              <a:defRPr sz="1400" b="1">
-                <a:solidFill>
-                  <a:srgbClr val="FFFFFF"/>
-                </a:solidFill>
-                <a:latin typeface="Calibri"/>
-              </a:defRPr>
-            </a:pPr>
-            <a:r>
-              <a:t>Étape 4</a:t>
-            </a:r>
-            <a:br/>
-            <a:r>
-              <a:t>Réponse</a:t>
-            </a:r>
-          </a:p>
-          <a:p>
-            <a:pPr algn="ctr">
-              <a:defRPr sz="1100">
-                <a:solidFill>
-                  <a:srgbClr val="FFFFFF"/>
-                </a:solidFill>
-                <a:latin typeface="Calibri"/>
-              </a:defRPr>
-            </a:pPr>
-            <a:r>
-              <a:t>Mapper indices</a:t>
-            </a:r>
-          </a:p>
-          <a:p>
-            <a:pPr algn="ctr">
-              <a:defRPr sz="1100">
-                <a:solidFill>
-                  <a:srgbClr val="FFFFFF"/>
-                </a:solidFill>
-                <a:latin typeface="Calibri"/>
-              </a:defRPr>
-            </a:pPr>
-            <a:r>
-              <a:t>→ IDs fournisseurs</a:t>
-            </a:r>
-          </a:p>
-          <a:p>
-            <a:pPr algn="ctr">
-              <a:defRPr sz="1100">
-                <a:solidFill>
-                  <a:srgbClr val="FFFFFF"/>
-                </a:solidFill>
-                <a:latin typeface="Calibri"/>
-              </a:defRPr>
-            </a:pPr>
-            <a:r>
-              <a:t>Attacher noms</a:t>
-            </a:r>
-          </a:p>
-          <a:p>
-            <a:pPr algn="ctr">
-              <a:defRPr sz="1100">
-                <a:solidFill>
-                  <a:srgbClr val="FFFFFF"/>
-                </a:solidFill>
-                <a:latin typeface="Calibri"/>
-              </a:defRPr>
-            </a:pPr>
-            <a:r>
-              <a:t>→ JSON</a:t>
-            </a:r>
-          </a:p>
-        </p:txBody>
-      </p:sp>
-      <p:sp>
-        <p:nvSpPr>
-          <p:cNvPr id="10" name="TextBox 9"/>
-          <p:cNvSpPr txBox="1"/>
-          <p:nvPr/>
-        </p:nvSpPr>
-        <p:spPr>
-          <a:xfrm>
-            <a:off x="365760" y="4206240"/>
-            <a:ext cx="11338560" cy="1371600"/>
-          </a:xfrm>
-          <a:prstGeom prst="rect">
-            <a:avLst/>
-          </a:prstGeom>
-          <a:noFill/>
-        </p:spPr>
-        <p:txBody>
-          <a:bodyPr wrap="square">
-            <a:spAutoFit/>
-          </a:bodyPr>
-          <a:lstStyle/>
-          <a:p>
-            <a:pPr algn="l">
-              <a:defRPr sz="1200" b="0">
-                <a:solidFill>
-                  <a:srgbClr val="333333"/>
-                </a:solidFill>
-                <a:latin typeface="Calibri"/>
-              </a:defRPr>
-            </a:pPr>
-            <a:r>
-              <a:t>Exemple :  user_90 demande Top-5</a:t>
-            </a:r>
-            <a:br/>
-            <a:r>
-              <a:t>[89,89,...,89] × [0,1,...,199]  →  stack [200, 2]  →  forward()  →  [200] scores</a:t>
-            </a:r>
-            <a:br/>
-            <a:r>
-              <a:t>argsort desc → exclure vus → Top-5: [Zen Clinic (4.78), Pure Lounge (4.69), Diamond Place (4.57), ...]</a:t>
-            </a:r>
-          </a:p>
-        </p:txBody>
-      </p:sp>
-    </p:spTree>
-  </p:cSld>
-  <p:clrMapOvr>
-    <a:masterClrMapping/>
-  </p:clrMapOvr>
-</p:sld>
-</file>
-
-<file path=ppt/slides/slide9.xml><?xml version="1.0" encoding="utf-8"?>
-<p:sld xmlns:a="http://schemas.openxmlformats.org/drawingml/2006/main" xmlns:p="http://schemas.openxmlformats.org/presentationml/2006/main" xmlns:r="http://schemas.openxmlformats.org/officeDocument/2006/relationships">
-  <p:cSld>
-    <p:spTree>
-      <p:nvGrpSpPr>
-        <p:cNvPr id="1" name=""/>
-        <p:cNvGrpSpPr/>
-        <p:nvPr/>
-      </p:nvGrpSpPr>
-      <p:grpSpPr/>
-      <p:sp>
-        <p:nvSpPr>
-          <p:cNvPr id="2" name="Title 1"/>
-          <p:cNvSpPr>
-            <a:spLocks noGrp="1"/>
-          </p:cNvSpPr>
-          <p:nvPr>
-            <p:ph type="title"/>
-          </p:nvPr>
-        </p:nvSpPr>
-        <p:spPr/>
-        <p:txBody>
-          <a:bodyPr/>
-          <a:lstStyle/>
-          <a:p>
-            <a:r>
-              <a:t>Résultats d'Évaluation</a:t>
-            </a:r>
-          </a:p>
-        </p:txBody>
-      </p:sp>
-      <p:sp>
-        <p:nvSpPr>
-          <p:cNvPr id="3" name="TextBox 2"/>
-          <p:cNvSpPr txBox="1"/>
-          <p:nvPr/>
-        </p:nvSpPr>
-        <p:spPr>
-          <a:xfrm>
-            <a:off x="457200" y="1463040"/>
-            <a:ext cx="10972800" cy="365760"/>
-          </a:xfrm>
-          <a:prstGeom prst="rect">
-            <a:avLst/>
-          </a:prstGeom>
-          <a:noFill/>
-        </p:spPr>
-        <p:txBody>
-          <a:bodyPr wrap="square">
-            <a:spAutoFit/>
-          </a:bodyPr>
-          <a:lstStyle/>
-          <a:p>
-            <a:pPr algn="ctr">
-              <a:defRPr sz="1300" b="0">
-                <a:solidFill>
-                  <a:srgbClr val="666666"/>
-                </a:solidFill>
-                <a:latin typeface="Calibri"/>
-              </a:defRPr>
-            </a:pPr>
-            <a:r>
-              <a:t>Train/Test split 80/20  |  500 utilisateurs  |  200 items  |  ~35 000 ratings</a:t>
-            </a:r>
-          </a:p>
-        </p:txBody>
-      </p:sp>
-      <p:sp>
-        <p:nvSpPr>
-          <p:cNvPr id="4" name="Rounded Rectangle 3"/>
-          <p:cNvSpPr/>
-          <p:nvPr/>
-        </p:nvSpPr>
-        <p:spPr>
-          <a:xfrm>
-            <a:off x="457200" y="2011680"/>
-            <a:ext cx="5303520" cy="457200"/>
-          </a:xfrm>
-          <a:prstGeom prst="roundRect">
-            <a:avLst/>
-          </a:prstGeom>
-          <a:solidFill>
-            <a:srgbClr val="4472C4"/>
-          </a:solidFill>
-          <a:ln>
-            <a:noFill/>
-          </a:ln>
-        </p:spPr>
-        <p:style>
-          <a:lnRef idx="1">
-            <a:schemeClr val="accent1"/>
-          </a:lnRef>
-          <a:fillRef idx="3">
-            <a:schemeClr val="accent1"/>
-          </a:fillRef>
-          <a:effectRef idx="2">
-            <a:schemeClr val="accent1"/>
-          </a:effectRef>
-          <a:fontRef idx="minor">
-            <a:schemeClr val="lt1"/>
-          </a:fontRef>
-        </p:style>
-        <p:txBody>
-          <a:bodyPr rtlCol="0" anchor="ctr" wrap="square"/>
-          <a:lstStyle/>
-          <a:p>
-            <a:pPr algn="ctr">
-              <a:spcBef>
-                <a:spcPts val="0"/>
-              </a:spcBef>
-              <a:spcAft>
-                <a:spcPts val="0"/>
-              </a:spcAft>
-              <a:defRPr sz="1400" b="1">
-                <a:solidFill>
-                  <a:srgbClr val="FFFFFF"/>
-                </a:solidFill>
-                <a:latin typeface="Calibri"/>
-              </a:defRPr>
-            </a:pPr>
-            <a:r>
-              <a:t>Métriques de Régression</a:t>
-            </a:r>
-          </a:p>
-        </p:txBody>
-      </p:sp>
-      <p:sp>
-        <p:nvSpPr>
-          <p:cNvPr id="5" name="TextBox 4"/>
-          <p:cNvSpPr txBox="1"/>
-          <p:nvPr/>
-        </p:nvSpPr>
-        <p:spPr>
-          <a:xfrm>
-            <a:off x="640080" y="2651760"/>
-            <a:ext cx="2286000" cy="320040"/>
-          </a:xfrm>
-          <a:prstGeom prst="rect">
-            <a:avLst/>
-          </a:prstGeom>
-          <a:noFill/>
-        </p:spPr>
-        <p:txBody>
-          <a:bodyPr wrap="square">
-            <a:spAutoFit/>
-          </a:bodyPr>
-          <a:lstStyle/>
-          <a:p>
-            <a:pPr algn="l">
-              <a:defRPr sz="1300" b="1">
-                <a:solidFill>
-                  <a:srgbClr val="4472C4"/>
-                </a:solidFill>
-                <a:latin typeface="Calibri"/>
-              </a:defRPr>
-            </a:pPr>
-            <a:r>
-              <a:t>RMSE</a:t>
-            </a:r>
-          </a:p>
-        </p:txBody>
-      </p:sp>
-      <p:sp>
-        <p:nvSpPr>
-          <p:cNvPr id="6" name="TextBox 5"/>
-          <p:cNvSpPr txBox="1"/>
-          <p:nvPr/>
-        </p:nvSpPr>
-        <p:spPr>
-          <a:xfrm>
-            <a:off x="640080" y="2926080"/>
-            <a:ext cx="2286000" cy="411480"/>
-          </a:xfrm>
-          <a:prstGeom prst="rect">
-            <a:avLst/>
-          </a:prstGeom>
-          <a:noFill/>
-        </p:spPr>
-        <p:txBody>
-          <a:bodyPr wrap="square">
-            <a:spAutoFit/>
-          </a:bodyPr>
-          <a:lstStyle/>
-          <a:p>
-            <a:pPr algn="l">
-              <a:defRPr sz="2800" b="1">
-                <a:solidFill>
-                  <a:srgbClr val="333333"/>
-                </a:solidFill>
-                <a:latin typeface="Calibri"/>
-              </a:defRPr>
-            </a:pPr>
-            <a:r>
-              <a:t>0.68</a:t>
-            </a:r>
-          </a:p>
-        </p:txBody>
-      </p:sp>
-      <p:sp>
-        <p:nvSpPr>
-          <p:cNvPr id="7" name="TextBox 6"/>
-          <p:cNvSpPr txBox="1"/>
-          <p:nvPr/>
-        </p:nvSpPr>
-        <p:spPr>
-          <a:xfrm>
-            <a:off x="640080" y="3383280"/>
-            <a:ext cx="2286000" cy="274320"/>
-          </a:xfrm>
-          <a:prstGeom prst="rect">
-            <a:avLst/>
-          </a:prstGeom>
-          <a:noFill/>
-        </p:spPr>
-        <p:txBody>
-          <a:bodyPr wrap="square">
-            <a:spAutoFit/>
-          </a:bodyPr>
-          <a:lstStyle/>
-          <a:p>
-            <a:pPr algn="l">
-              <a:defRPr sz="1100" b="0">
-                <a:solidFill>
-                  <a:srgbClr val="888888"/>
-                </a:solidFill>
-                <a:latin typeface="Calibri"/>
-              </a:defRPr>
-            </a:pPr>
-            <a:r>
-              <a:t>NRMSE: 17%</a:t>
-            </a:r>
-          </a:p>
-        </p:txBody>
-      </p:sp>
-      <p:sp>
-        <p:nvSpPr>
-          <p:cNvPr id="8" name="TextBox 7"/>
-          <p:cNvSpPr txBox="1"/>
-          <p:nvPr/>
-        </p:nvSpPr>
-        <p:spPr>
-          <a:xfrm>
-            <a:off x="3200400" y="2651760"/>
-            <a:ext cx="2286000" cy="320040"/>
-          </a:xfrm>
-          <a:prstGeom prst="rect">
-            <a:avLst/>
-          </a:prstGeom>
-          <a:noFill/>
-        </p:spPr>
-        <p:txBody>
-          <a:bodyPr wrap="square">
-            <a:spAutoFit/>
-          </a:bodyPr>
-          <a:lstStyle/>
-          <a:p>
-            <a:pPr algn="l">
-              <a:defRPr sz="1300" b="1">
-                <a:solidFill>
-                  <a:srgbClr val="4472C4"/>
-                </a:solidFill>
-                <a:latin typeface="Calibri"/>
-              </a:defRPr>
-            </a:pPr>
-            <a:r>
-              <a:t>MAE</a:t>
-            </a:r>
-          </a:p>
-        </p:txBody>
-      </p:sp>
-      <p:sp>
-        <p:nvSpPr>
-          <p:cNvPr id="9" name="TextBox 8"/>
-          <p:cNvSpPr txBox="1"/>
-          <p:nvPr/>
-        </p:nvSpPr>
-        <p:spPr>
-          <a:xfrm>
-            <a:off x="3200400" y="2926080"/>
-            <a:ext cx="2286000" cy="411480"/>
-          </a:xfrm>
-          <a:prstGeom prst="rect">
-            <a:avLst/>
-          </a:prstGeom>
-          <a:noFill/>
-        </p:spPr>
-        <p:txBody>
-          <a:bodyPr wrap="square">
-            <a:spAutoFit/>
-          </a:bodyPr>
-          <a:lstStyle/>
-          <a:p>
-            <a:pPr algn="l">
-              <a:defRPr sz="2800" b="1">
-                <a:solidFill>
-                  <a:srgbClr val="333333"/>
-                </a:solidFill>
-                <a:latin typeface="Calibri"/>
-              </a:defRPr>
-            </a:pPr>
-            <a:r>
-              <a:t>0.54</a:t>
-            </a:r>
-          </a:p>
-        </p:txBody>
-      </p:sp>
-      <p:sp>
-        <p:nvSpPr>
-          <p:cNvPr id="10" name="TextBox 9"/>
-          <p:cNvSpPr txBox="1"/>
-          <p:nvPr/>
-        </p:nvSpPr>
-        <p:spPr>
-          <a:xfrm>
-            <a:off x="3200400" y="3383280"/>
-            <a:ext cx="2286000" cy="274320"/>
-          </a:xfrm>
-          <a:prstGeom prst="rect">
-            <a:avLst/>
-          </a:prstGeom>
-          <a:noFill/>
-        </p:spPr>
-        <p:txBody>
-          <a:bodyPr wrap="square">
-            <a:spAutoFit/>
-          </a:bodyPr>
-          <a:lstStyle/>
-          <a:p>
-            <a:pPr algn="l">
-              <a:defRPr sz="1100" b="0">
-                <a:solidFill>
-                  <a:srgbClr val="888888"/>
-                </a:solidFill>
-                <a:latin typeface="Calibri"/>
-              </a:defRPr>
-            </a:pPr>
-            <a:r>
-              <a:t>&lt; 1 point d'erreur</a:t>
-            </a:r>
-          </a:p>
-        </p:txBody>
-      </p:sp>
-      <p:sp>
-        <p:nvSpPr>
-          <p:cNvPr id="11" name="Rounded Rectangle 10"/>
-          <p:cNvSpPr/>
-          <p:nvPr/>
-        </p:nvSpPr>
-        <p:spPr>
-          <a:xfrm>
-            <a:off x="6217920" y="2011680"/>
-            <a:ext cx="5303520" cy="457200"/>
-          </a:xfrm>
-          <a:prstGeom prst="roundRect">
-            <a:avLst/>
-          </a:prstGeom>
-          <a:solidFill>
-            <a:srgbClr val="ED7D31"/>
-          </a:solidFill>
-          <a:ln>
-            <a:noFill/>
-          </a:ln>
-        </p:spPr>
-        <p:style>
-          <a:lnRef idx="1">
-            <a:schemeClr val="accent1"/>
-          </a:lnRef>
-          <a:fillRef idx="3">
-            <a:schemeClr val="accent1"/>
-          </a:fillRef>
-          <a:effectRef idx="2">
-            <a:schemeClr val="accent1"/>
-          </a:effectRef>
-          <a:fontRef idx="minor">
-            <a:schemeClr val="lt1"/>
-          </a:fontRef>
-        </p:style>
-        <p:txBody>
-          <a:bodyPr rtlCol="0" anchor="ctr" wrap="square"/>
-          <a:lstStyle/>
-          <a:p>
-            <a:pPr algn="ctr">
-              <a:spcBef>
-                <a:spcPts val="0"/>
-              </a:spcBef>
-              <a:spcAft>
-                <a:spcPts val="0"/>
-              </a:spcAft>
-              <a:defRPr sz="1400" b="1">
-                <a:solidFill>
-                  <a:srgbClr val="FFFFFF"/>
-                </a:solidFill>
-                <a:latin typeface="Calibri"/>
-              </a:defRPr>
-            </a:pPr>
-            <a:r>
-              <a:t>Métriques de Classement (Top-5)</a:t>
-            </a:r>
-          </a:p>
-        </p:txBody>
-      </p:sp>
-      <p:sp>
-        <p:nvSpPr>
-          <p:cNvPr id="12" name="TextBox 11"/>
-          <p:cNvSpPr txBox="1"/>
-          <p:nvPr/>
-        </p:nvSpPr>
-        <p:spPr>
-          <a:xfrm>
-            <a:off x="6400800" y="2651760"/>
-            <a:ext cx="1097280" cy="320040"/>
-          </a:xfrm>
-          <a:prstGeom prst="rect">
-            <a:avLst/>
-          </a:prstGeom>
-          <a:noFill/>
-        </p:spPr>
-        <p:txBody>
-          <a:bodyPr wrap="square">
-            <a:spAutoFit/>
-          </a:bodyPr>
-          <a:lstStyle/>
-          <a:p>
-            <a:pPr algn="l">
-              <a:defRPr sz="1300" b="1">
-                <a:solidFill>
-                  <a:srgbClr val="ED7D31"/>
-                </a:solidFill>
-                <a:latin typeface="Calibri"/>
-              </a:defRPr>
-            </a:pPr>
-            <a:r>
-              <a:t>P@5</a:t>
-            </a:r>
-          </a:p>
-        </p:txBody>
-      </p:sp>
-      <p:sp>
-        <p:nvSpPr>
-          <p:cNvPr id="13" name="TextBox 12"/>
-          <p:cNvSpPr txBox="1"/>
-          <p:nvPr/>
-        </p:nvSpPr>
-        <p:spPr>
-          <a:xfrm>
-            <a:off x="6400800" y="2926080"/>
-            <a:ext cx="1097280" cy="411480"/>
-          </a:xfrm>
-          <a:prstGeom prst="rect">
-            <a:avLst/>
-          </a:prstGeom>
-          <a:noFill/>
-        </p:spPr>
-        <p:txBody>
-          <a:bodyPr wrap="square">
-            <a:spAutoFit/>
-          </a:bodyPr>
-          <a:lstStyle/>
-          <a:p>
-            <a:pPr algn="l">
-              <a:defRPr sz="2400" b="1">
-                <a:solidFill>
-                  <a:srgbClr val="333333"/>
-                </a:solidFill>
-                <a:latin typeface="Calibri"/>
-              </a:defRPr>
-            </a:pPr>
-            <a:r>
-              <a:t>46%</a:t>
-            </a:r>
-          </a:p>
-        </p:txBody>
-      </p:sp>
-      <p:sp>
-        <p:nvSpPr>
-          <p:cNvPr id="14" name="TextBox 13"/>
-          <p:cNvSpPr txBox="1"/>
-          <p:nvPr/>
-        </p:nvSpPr>
-        <p:spPr>
-          <a:xfrm>
-            <a:off x="7680960" y="2651760"/>
-            <a:ext cx="1097280" cy="320040"/>
-          </a:xfrm>
-          <a:prstGeom prst="rect">
-            <a:avLst/>
-          </a:prstGeom>
-          <a:noFill/>
-        </p:spPr>
-        <p:txBody>
-          <a:bodyPr wrap="square">
-            <a:spAutoFit/>
-          </a:bodyPr>
-          <a:lstStyle/>
-          <a:p>
-            <a:pPr algn="l">
-              <a:defRPr sz="1300" b="1">
-                <a:solidFill>
-                  <a:srgbClr val="ED7D31"/>
-                </a:solidFill>
-                <a:latin typeface="Calibri"/>
-              </a:defRPr>
-            </a:pPr>
-            <a:r>
-              <a:t>R@5</a:t>
-            </a:r>
-          </a:p>
-        </p:txBody>
-      </p:sp>
-      <p:sp>
-        <p:nvSpPr>
-          <p:cNvPr id="15" name="TextBox 14"/>
-          <p:cNvSpPr txBox="1"/>
-          <p:nvPr/>
-        </p:nvSpPr>
-        <p:spPr>
-          <a:xfrm>
-            <a:off x="7680960" y="2926080"/>
-            <a:ext cx="1097280" cy="411480"/>
-          </a:xfrm>
-          <a:prstGeom prst="rect">
-            <a:avLst/>
-          </a:prstGeom>
-          <a:noFill/>
-        </p:spPr>
-        <p:txBody>
-          <a:bodyPr wrap="square">
-            <a:spAutoFit/>
-          </a:bodyPr>
-          <a:lstStyle/>
-          <a:p>
-            <a:pPr algn="l">
-              <a:defRPr sz="2400" b="1">
-                <a:solidFill>
-                  <a:srgbClr val="333333"/>
-                </a:solidFill>
-                <a:latin typeface="Calibri"/>
-              </a:defRPr>
-            </a:pPr>
-            <a:r>
-              <a:t>40%</a:t>
-            </a:r>
-          </a:p>
-        </p:txBody>
-      </p:sp>
-      <p:sp>
-        <p:nvSpPr>
-          <p:cNvPr id="16" name="TextBox 15"/>
-          <p:cNvSpPr txBox="1"/>
-          <p:nvPr/>
-        </p:nvSpPr>
-        <p:spPr>
-          <a:xfrm>
-            <a:off x="8961120" y="2651760"/>
-            <a:ext cx="1097280" cy="320040"/>
-          </a:xfrm>
-          <a:prstGeom prst="rect">
-            <a:avLst/>
-          </a:prstGeom>
-          <a:noFill/>
-        </p:spPr>
-        <p:txBody>
-          <a:bodyPr wrap="square">
-            <a:spAutoFit/>
-          </a:bodyPr>
-          <a:lstStyle/>
-          <a:p>
-            <a:pPr algn="l">
-              <a:defRPr sz="1300" b="1">
-                <a:solidFill>
-                  <a:srgbClr val="ED7D31"/>
-                </a:solidFill>
-                <a:latin typeface="Calibri"/>
-              </a:defRPr>
-            </a:pPr>
-            <a:r>
-              <a:t>NDCG</a:t>
-            </a:r>
-          </a:p>
-        </p:txBody>
-      </p:sp>
-      <p:sp>
-        <p:nvSpPr>
-          <p:cNvPr id="17" name="TextBox 16"/>
-          <p:cNvSpPr txBox="1"/>
-          <p:nvPr/>
-        </p:nvSpPr>
-        <p:spPr>
-          <a:xfrm>
-            <a:off x="8961120" y="2926080"/>
-            <a:ext cx="1097280" cy="411480"/>
-          </a:xfrm>
-          <a:prstGeom prst="rect">
-            <a:avLst/>
-          </a:prstGeom>
-          <a:noFill/>
-        </p:spPr>
-        <p:txBody>
-          <a:bodyPr wrap="square">
-            <a:spAutoFit/>
-          </a:bodyPr>
-          <a:lstStyle/>
-          <a:p>
-            <a:pPr algn="l">
-              <a:defRPr sz="2400" b="1">
-                <a:solidFill>
-                  <a:srgbClr val="333333"/>
-                </a:solidFill>
-                <a:latin typeface="Calibri"/>
-              </a:defRPr>
-            </a:pPr>
-            <a:r>
-              <a:t>50%</a:t>
-            </a:r>
-          </a:p>
-        </p:txBody>
-      </p:sp>
-      <p:sp>
-        <p:nvSpPr>
-          <p:cNvPr id="18" name="TextBox 17"/>
-          <p:cNvSpPr txBox="1"/>
-          <p:nvPr/>
-        </p:nvSpPr>
-        <p:spPr>
-          <a:xfrm>
-            <a:off x="10241280" y="2651760"/>
-            <a:ext cx="1097280" cy="320040"/>
-          </a:xfrm>
-          <a:prstGeom prst="rect">
-            <a:avLst/>
-          </a:prstGeom>
-          <a:noFill/>
-        </p:spPr>
-        <p:txBody>
-          <a:bodyPr wrap="square">
-            <a:spAutoFit/>
-          </a:bodyPr>
-          <a:lstStyle/>
-          <a:p>
-            <a:pPr algn="l">
-              <a:defRPr sz="1300" b="1">
-                <a:solidFill>
-                  <a:srgbClr val="ED7D31"/>
-                </a:solidFill>
-                <a:latin typeface="Calibri"/>
-              </a:defRPr>
-            </a:pPr>
-            <a:r>
-              <a:t>Hit</a:t>
-            </a:r>
-          </a:p>
-        </p:txBody>
-      </p:sp>
-      <p:sp>
-        <p:nvSpPr>
-          <p:cNvPr id="19" name="TextBox 18"/>
-          <p:cNvSpPr txBox="1"/>
-          <p:nvPr/>
-        </p:nvSpPr>
-        <p:spPr>
-          <a:xfrm>
-            <a:off x="10241280" y="2926080"/>
-            <a:ext cx="1097280" cy="411480"/>
-          </a:xfrm>
-          <a:prstGeom prst="rect">
-            <a:avLst/>
-          </a:prstGeom>
-          <a:noFill/>
-        </p:spPr>
-        <p:txBody>
-          <a:bodyPr wrap="square">
-            <a:spAutoFit/>
-          </a:bodyPr>
-          <a:lstStyle/>
-          <a:p>
-            <a:pPr algn="l">
-              <a:defRPr sz="2400" b="1">
-                <a:solidFill>
-                  <a:srgbClr val="333333"/>
-                </a:solidFill>
-                <a:latin typeface="Calibri"/>
-              </a:defRPr>
-            </a:pPr>
-            <a:r>
-              <a:t>90%</a:t>
-            </a:r>
-          </a:p>
-        </p:txBody>
-      </p:sp>
-      <p:sp>
-        <p:nvSpPr>
-          <p:cNvPr id="20" name="Rounded Rectangle 19"/>
-          <p:cNvSpPr/>
-          <p:nvPr/>
-        </p:nvSpPr>
-        <p:spPr>
-          <a:xfrm>
-            <a:off x="457200" y="3931920"/>
-            <a:ext cx="11155680" cy="411480"/>
-          </a:xfrm>
-          <a:prstGeom prst="roundRect">
-            <a:avLst/>
-          </a:prstGeom>
-          <a:solidFill>
-            <a:srgbClr val="70AD47"/>
-          </a:solidFill>
-          <a:ln>
-            <a:noFill/>
-          </a:ln>
-        </p:spPr>
-        <p:style>
-          <a:lnRef idx="1">
-            <a:schemeClr val="accent1"/>
-          </a:lnRef>
-          <a:fillRef idx="3">
-            <a:schemeClr val="accent1"/>
-          </a:fillRef>
-          <a:effectRef idx="2">
-            <a:schemeClr val="accent1"/>
-          </a:effectRef>
-          <a:fontRef idx="minor">
-            <a:schemeClr val="lt1"/>
-          </a:fontRef>
-        </p:style>
-        <p:txBody>
-          <a:bodyPr rtlCol="0" anchor="ctr" wrap="square"/>
-          <a:lstStyle/>
-          <a:p>
-            <a:pPr algn="ctr">
-              <a:spcBef>
-                <a:spcPts val="0"/>
-              </a:spcBef>
-              <a:spcAft>
-                <a:spcPts val="0"/>
-              </a:spcAft>
-              <a:defRPr sz="1300" b="1">
-                <a:solidFill>
-                  <a:srgbClr val="FFFFFF"/>
-                </a:solidFill>
-                <a:latin typeface="Calibri"/>
-              </a:defRPr>
-            </a:pPr>
-            <a:r>
-              <a:t>Test de Différenciation: 5/5 PASS — Chaque utilisateur reçoit des recommandations uniques</a:t>
-            </a:r>
-          </a:p>
-        </p:txBody>
-      </p:sp>
-      <p:sp>
-        <p:nvSpPr>
-          <p:cNvPr id="21" name="TextBox 20"/>
-          <p:cNvSpPr txBox="1"/>
-          <p:nvPr/>
-        </p:nvSpPr>
-        <p:spPr>
-          <a:xfrm>
-            <a:off x="640080" y="4480560"/>
-            <a:ext cx="10972800" cy="1371600"/>
-          </a:xfrm>
-          <a:prstGeom prst="rect">
-            <a:avLst/>
-          </a:prstGeom>
-          <a:noFill/>
-        </p:spPr>
-        <p:txBody>
-          <a:bodyPr wrap="square">
-            <a:spAutoFit/>
-          </a:bodyPr>
-          <a:lstStyle/>
-          <a:p>
-            <a:pPr algn="l">
-              <a:defRPr sz="1100" b="0">
-                <a:solidFill>
-                  <a:srgbClr val="333333"/>
-                </a:solidFill>
-                <a:latin typeface="Consolas"/>
-              </a:defRPr>
-            </a:pPr>
-            <a:r>
-              <a:t>user_1   →  Zen Clinic, Pure Lounge, Diamond Place, Golden Clinic</a:t>
-            </a:r>
-          </a:p>
-          <a:p>
-            <a:pPr algn="l">
-              <a:spcBef>
-                <a:spcPts val="200"/>
-              </a:spcBef>
-              <a:spcAft>
-                <a:spcPts val="100"/>
-              </a:spcAft>
-              <a:defRPr sz="1100" b="0">
-                <a:solidFill>
-                  <a:srgbClr val="333333"/>
-                </a:solidFill>
-                <a:latin typeface="Consolas"/>
-              </a:defRPr>
-            </a:pPr>
-            <a:r>
-              <a:t>user_10  →  Crystal Place, Diamond Place, Golden Lab, Crystal Wellness</a:t>
-            </a:r>
-          </a:p>
-          <a:p>
-            <a:pPr algn="l">
-              <a:spcBef>
-                <a:spcPts val="200"/>
-              </a:spcBef>
-              <a:spcAft>
-                <a:spcPts val="100"/>
-              </a:spcAft>
-              <a:defRPr sz="1100" b="0">
-                <a:solidFill>
-                  <a:srgbClr val="333333"/>
-                </a:solidFill>
-                <a:latin typeface="Consolas"/>
-              </a:defRPr>
-            </a:pPr>
-            <a:r>
-              <a:t>user_50  →  River Studio, Sunrise Lab, Golden Clinic, Summit Hub</a:t>
-            </a:r>
-          </a:p>
-          <a:p>
-            <a:pPr algn="l">
-              <a:spcBef>
-                <a:spcPts val="200"/>
-              </a:spcBef>
-              <a:spcAft>
-                <a:spcPts val="100"/>
-              </a:spcAft>
-              <a:defRPr sz="1100" b="0">
-                <a:solidFill>
-                  <a:srgbClr val="333333"/>
-                </a:solidFill>
-                <a:latin typeface="Consolas"/>
-              </a:defRPr>
-            </a:pPr>
-            <a:r>
-              <a:t>user_100 →  Lotus Clinic, Harmony Lounge, Diamond Hub, Ocean Clinic</a:t>
             </a:r>
           </a:p>
         </p:txBody>

--- a/Cobook_org_final.pptx
+++ b/Cobook_org_final.pptx
@@ -24025,7 +24025,7 @@
           </a:fontRef>
         </p:style>
         <p:txBody>
-          <a:bodyPr wrap="square" rtlCol="0" anchor="ctr"/>
+          <a:bodyPr wrap="square" rtlCol="0" anchor="t" tIns="76200"/>
           <a:lstStyle/>
           <a:p>
             <a:pPr algn="ctr">
@@ -24267,7 +24267,7 @@
           </a:fontRef>
         </p:style>
         <p:txBody>
-          <a:bodyPr wrap="square" rtlCol="0" anchor="ctr"/>
+          <a:bodyPr wrap="square" rtlCol="0" anchor="t" tIns="76200"/>
           <a:lstStyle/>
           <a:p>
             <a:pPr algn="ctr">
@@ -24481,7 +24481,7 @@
           </a:fontRef>
         </p:style>
         <p:txBody>
-          <a:bodyPr wrap="square" rtlCol="0" anchor="ctr"/>
+          <a:bodyPr wrap="square" rtlCol="0" anchor="t" tIns="76200"/>
           <a:lstStyle/>
           <a:p>
             <a:pPr algn="ctr">
@@ -24658,7 +24658,7 @@
           </a:fontRef>
         </p:style>
         <p:txBody>
-          <a:bodyPr wrap="square" rtlCol="0" anchor="ctr"/>
+          <a:bodyPr wrap="square" rtlCol="0" anchor="t" tIns="76200"/>
           <a:lstStyle/>
           <a:p>
             <a:pPr algn="ctr">
@@ -27179,7 +27179,7 @@
           </a:fontRef>
         </p:style>
         <p:txBody>
-          <a:bodyPr wrap="square" rtlCol="0" anchor="ctr"/>
+          <a:bodyPr wrap="square" rtlCol="0" anchor="t" tIns="76200"/>
           <a:lstStyle/>
           <a:p>
             <a:pPr algn="ctr">
@@ -27380,7 +27380,7 @@
           </a:fontRef>
         </p:style>
         <p:txBody>
-          <a:bodyPr wrap="square" rtlCol="0" anchor="ctr"/>
+          <a:bodyPr wrap="square" rtlCol="0" anchor="t" tIns="76200"/>
           <a:lstStyle/>
           <a:p>
             <a:pPr algn="ctr">
@@ -27637,7 +27637,7 @@
           </a:fontRef>
         </p:style>
         <p:txBody>
-          <a:bodyPr wrap="square" rtlCol="0" anchor="ctr"/>
+          <a:bodyPr wrap="square" rtlCol="0" anchor="t" tIns="76200"/>
           <a:lstStyle/>
           <a:p>
             <a:pPr algn="ctr">
@@ -27863,7 +27863,7 @@
           </a:fontRef>
         </p:style>
         <p:txBody>
-          <a:bodyPr wrap="square" rtlCol="0" anchor="ctr"/>
+          <a:bodyPr wrap="square" rtlCol="0" anchor="t" tIns="76200"/>
           <a:lstStyle/>
           <a:p>
             <a:pPr algn="ctr">
@@ -28007,7 +28007,7 @@
           </a:fontRef>
         </p:style>
         <p:txBody>
-          <a:bodyPr wrap="square" rtlCol="0" anchor="ctr"/>
+          <a:bodyPr wrap="square" rtlCol="0" anchor="t" tIns="76200"/>
           <a:lstStyle/>
           <a:p>
             <a:pPr algn="ctr">
@@ -28167,7 +28167,7 @@
           </a:fontRef>
         </p:style>
         <p:txBody>
-          <a:bodyPr wrap="square" rtlCol="0" anchor="ctr"/>
+          <a:bodyPr wrap="square" rtlCol="0" anchor="t" tIns="76200"/>
           <a:lstStyle/>
           <a:p>
             <a:pPr algn="ctr">
@@ -28328,7 +28328,7 @@
           </a:fontRef>
         </p:style>
         <p:txBody>
-          <a:bodyPr wrap="square" rtlCol="0" anchor="ctr"/>
+          <a:bodyPr wrap="square" rtlCol="0" anchor="t" tIns="76200"/>
           <a:lstStyle/>
           <a:p>
             <a:pPr algn="ctr">

--- a/Cobook_org_final.pptx
+++ b/Cobook_org_final.pptx
@@ -24051,138 +24051,131 @@
               <a:t>Matrice R (creuse)</a:t>
             </a:r>
           </a:p>
-        </p:txBody>
-      </p:sp>
-      <p:sp>
-        <p:nvSpPr>
-          <p:cNvPr id="4" name="TextBox 3"/>
-          <p:cNvSpPr txBox="1"/>
-          <p:nvPr/>
-        </p:nvSpPr>
-        <p:spPr>
-          <a:xfrm>
-            <a:off x="822960" y="2066544"/>
-            <a:ext cx="3291840" cy="1188720"/>
-          </a:xfrm>
-          <a:prstGeom prst="rect">
-            <a:avLst/>
-          </a:prstGeom>
-          <a:noFill/>
-        </p:spPr>
-        <p:txBody>
-          <a:bodyPr wrap="square">
-            <a:spAutoFit/>
-          </a:bodyPr>
-          <a:lstStyle/>
-          <a:p>
-            <a:pPr algn="l">
-              <a:defRPr sz="1100" b="0">
-                <a:solidFill>
-                  <a:srgbClr val="333333"/>
-                </a:solidFill>
-                <a:latin typeface="Consolas"/>
-              </a:defRPr>
-            </a:pPr>
-            <a:r>
-              <a:rPr lang="fr-FR" noProof="0" dirty="0">
-                <a:solidFill>
-                  <a:srgbClr val="FFFFFF"/>
-                </a:solidFill>
-              </a:rPr>
-              <a:t>         p1    p2    p3    p4</a:t>
-            </a:r>
-          </a:p>
-          <a:p>
-            <a:pPr algn="l">
-              <a:spcBef>
-                <a:spcPts val="100"/>
-              </a:spcBef>
-              <a:spcAft>
-                <a:spcPts val="200"/>
-              </a:spcAft>
-              <a:defRPr sz="1100" b="0">
-                <a:solidFill>
-                  <a:srgbClr val="333333"/>
-                </a:solidFill>
-                <a:latin typeface="Consolas"/>
-              </a:defRPr>
-            </a:pPr>
-            <a:r>
-              <a:rPr lang="fr-FR" noProof="0" dirty="0">
-                <a:solidFill>
-                  <a:srgbClr val="FFFFFF"/>
-                </a:solidFill>
-              </a:rPr>
-              <a:t>u1   4.0    ?    3.2    ?</a:t>
-            </a:r>
-          </a:p>
-          <a:p>
-            <a:pPr algn="l">
-              <a:spcBef>
-                <a:spcPts val="100"/>
-              </a:spcBef>
-              <a:spcAft>
-                <a:spcPts val="200"/>
-              </a:spcAft>
-              <a:defRPr sz="1100" b="0">
-                <a:solidFill>
-                  <a:srgbClr val="333333"/>
-                </a:solidFill>
-                <a:latin typeface="Consolas"/>
-              </a:defRPr>
-            </a:pPr>
-            <a:r>
-              <a:rPr lang="fr-FR" noProof="0" dirty="0">
-                <a:solidFill>
-                  <a:srgbClr val="FFFFFF"/>
-                </a:solidFill>
-              </a:rPr>
-              <a:t>u2    ?    5.0    ?    2.1</a:t>
-            </a:r>
-          </a:p>
-          <a:p>
-            <a:pPr algn="l">
-              <a:spcBef>
-                <a:spcPts val="100"/>
-              </a:spcBef>
-              <a:spcAft>
-                <a:spcPts val="200"/>
-              </a:spcAft>
-              <a:defRPr sz="1100" b="0">
-                <a:solidFill>
-                  <a:srgbClr val="333333"/>
-                </a:solidFill>
-                <a:latin typeface="Consolas"/>
-              </a:defRPr>
-            </a:pPr>
-            <a:r>
-              <a:rPr lang="fr-FR" noProof="0" dirty="0">
-                <a:solidFill>
-                  <a:srgbClr val="FFFFFF"/>
-                </a:solidFill>
-              </a:rPr>
-              <a:t>u3   1.5    ?     ?    4.0</a:t>
-            </a:r>
-          </a:p>
-          <a:p>
-            <a:pPr algn="l">
+          <a:p>
+            <a:pPr>
               <a:spcBef>
                 <a:spcPts val="400"/>
               </a:spcBef>
               <a:spcAft>
                 <a:spcPts val="200"/>
               </a:spcAft>
-              <a:defRPr sz="1000" b="0">
-                <a:solidFill>
-                  <a:srgbClr val="888888"/>
+            </a:pPr>
+          </a:p>
+          <a:p>
+            <a:pPr algn="ctr">
+              <a:spcBef>
+                <a:spcPts val="100"/>
+              </a:spcBef>
+              <a:spcAft>
+                <a:spcPts val="100"/>
+              </a:spcAft>
+              <a:defRPr sz="1100" b="0">
+                <a:solidFill>
+                  <a:srgbClr val="E0E0E0"/>
                 </a:solidFill>
                 <a:latin typeface="Calibri"/>
               </a:defRPr>
             </a:pPr>
             <a:r>
-              <a:rPr lang="fr-FR" noProof="0" dirty="0">
-                <a:solidFill>
-                  <a:srgbClr val="FFFFFF"/>
+              <a:rPr>
+                <a:solidFill>
+                  <a:srgbClr val="E8E8E8"/>
+                </a:solidFill>
+              </a:rPr>
+              <a:t>p1    p2    p3    p4</a:t>
+            </a:r>
+          </a:p>
+          <a:p>
+            <a:pPr algn="ctr">
+              <a:spcBef>
+                <a:spcPts val="100"/>
+              </a:spcBef>
+              <a:spcAft>
+                <a:spcPts val="100"/>
+              </a:spcAft>
+              <a:defRPr sz="1100" b="0">
+                <a:solidFill>
+                  <a:srgbClr val="E0E0E0"/>
+                </a:solidFill>
+                <a:latin typeface="Calibri"/>
+              </a:defRPr>
+            </a:pPr>
+            <a:r>
+              <a:rPr>
+                <a:solidFill>
+                  <a:srgbClr val="E8E8E8"/>
+                </a:solidFill>
+              </a:rPr>
+              <a:t>u1   4.0    ?    3.2    ?</a:t>
+            </a:r>
+          </a:p>
+          <a:p>
+            <a:pPr algn="ctr">
+              <a:spcBef>
+                <a:spcPts val="100"/>
+              </a:spcBef>
+              <a:spcAft>
+                <a:spcPts val="100"/>
+              </a:spcAft>
+              <a:defRPr sz="1100" b="0">
+                <a:solidFill>
+                  <a:srgbClr val="E0E0E0"/>
+                </a:solidFill>
+                <a:latin typeface="Calibri"/>
+              </a:defRPr>
+            </a:pPr>
+            <a:r>
+              <a:rPr>
+                <a:solidFill>
+                  <a:srgbClr val="E8E8E8"/>
+                </a:solidFill>
+              </a:rPr>
+              <a:t>u2    ?    5.0    ?    2.1</a:t>
+            </a:r>
+          </a:p>
+          <a:p>
+            <a:pPr algn="ctr">
+              <a:spcBef>
+                <a:spcPts val="100"/>
+              </a:spcBef>
+              <a:spcAft>
+                <a:spcPts val="100"/>
+              </a:spcAft>
+              <a:defRPr sz="1100" b="0">
+                <a:solidFill>
+                  <a:srgbClr val="E0E0E0"/>
+                </a:solidFill>
+                <a:latin typeface="Calibri"/>
+              </a:defRPr>
+            </a:pPr>
+            <a:r>
+              <a:rPr>
+                <a:solidFill>
+                  <a:srgbClr val="E8E8E8"/>
+                </a:solidFill>
+              </a:rPr>
+              <a:t>u3   1.5    ?     ?    4.0</a:t>
+            </a:r>
+          </a:p>
+          <a:p>
+            <a:pPr algn="ctr">
+              <a:spcBef>
+                <a:spcPts val="100"/>
+              </a:spcBef>
+              <a:spcAft>
+                <a:spcPts val="100"/>
+              </a:spcAft>
+              <a:defRPr sz="1100" b="0">
+                <a:solidFill>
+                  <a:srgbClr val="E0E0E0"/>
+                </a:solidFill>
+                <a:latin typeface="Calibri"/>
+              </a:defRPr>
+            </a:pPr>
+            <a:r>
+              <a:rPr>
+                <a:solidFill>
+                  <a:srgbClr val="E8E8E8"/>
                 </a:solidFill>
               </a:rPr>
               <a:t>? = inconnu (~65% de la matrice)</a:t>
@@ -24293,114 +24286,107 @@
               <a:t>U (utilisateurs, k=2)</a:t>
             </a:r>
           </a:p>
-        </p:txBody>
-      </p:sp>
-      <p:sp>
-        <p:nvSpPr>
-          <p:cNvPr id="7" name="TextBox 6"/>
-          <p:cNvSpPr txBox="1"/>
-          <p:nvPr/>
-        </p:nvSpPr>
-        <p:spPr>
-          <a:xfrm>
-            <a:off x="4572000" y="2194560"/>
-            <a:ext cx="2834640" cy="1097280"/>
-          </a:xfrm>
-          <a:prstGeom prst="rect">
-            <a:avLst/>
-          </a:prstGeom>
-          <a:noFill/>
-        </p:spPr>
-        <p:txBody>
-          <a:bodyPr wrap="square">
-            <a:spAutoFit/>
-          </a:bodyPr>
-          <a:lstStyle/>
-          <a:p>
-            <a:pPr algn="l">
-              <a:defRPr sz="1100" b="0">
-                <a:solidFill>
-                  <a:srgbClr val="333333"/>
-                </a:solidFill>
-                <a:latin typeface="Consolas"/>
-              </a:defRPr>
-            </a:pPr>
-            <a:r>
-              <a:rPr lang="fr-FR" noProof="0" dirty="0">
-                <a:solidFill>
-                  <a:srgbClr val="FFFFFF"/>
-                </a:solidFill>
-              </a:rPr>
-              <a:t>u1  [0.9,  0.8]</a:t>
-            </a:r>
-          </a:p>
-          <a:p>
-            <a:pPr algn="l">
-              <a:spcBef>
-                <a:spcPts val="100"/>
-              </a:spcBef>
-              <a:spcAft>
-                <a:spcPts val="200"/>
-              </a:spcAft>
-              <a:defRPr sz="1100" b="0">
-                <a:solidFill>
-                  <a:srgbClr val="333333"/>
-                </a:solidFill>
-                <a:latin typeface="Consolas"/>
-              </a:defRPr>
-            </a:pPr>
-            <a:r>
-              <a:rPr lang="fr-FR" noProof="0" dirty="0">
-                <a:solidFill>
-                  <a:srgbClr val="FFFFFF"/>
-                </a:solidFill>
-              </a:rPr>
-              <a:t>u2  [0.7, -0.5]</a:t>
-            </a:r>
-          </a:p>
-          <a:p>
-            <a:pPr algn="l">
-              <a:spcBef>
-                <a:spcPts val="100"/>
-              </a:spcBef>
-              <a:spcAft>
-                <a:spcPts val="200"/>
-              </a:spcAft>
-              <a:defRPr sz="1100" b="0">
-                <a:solidFill>
-                  <a:srgbClr val="333333"/>
-                </a:solidFill>
-                <a:latin typeface="Consolas"/>
-              </a:defRPr>
-            </a:pPr>
-            <a:r>
-              <a:rPr lang="fr-FR" noProof="0" dirty="0">
-                <a:solidFill>
-                  <a:srgbClr val="FFFFFF"/>
-                </a:solidFill>
-              </a:rPr>
-              <a:t>u3  [-0.6, 0.9]</a:t>
-            </a:r>
-          </a:p>
-          <a:p>
-            <a:pPr algn="l">
+          <a:p>
+            <a:pPr>
               <a:spcBef>
                 <a:spcPts val="400"/>
               </a:spcBef>
               <a:spcAft>
                 <a:spcPts val="200"/>
               </a:spcAft>
-              <a:defRPr sz="1000" b="0">
-                <a:solidFill>
-                  <a:srgbClr val="888888"/>
+            </a:pPr>
+          </a:p>
+          <a:p>
+            <a:pPr algn="ctr">
+              <a:spcBef>
+                <a:spcPts val="100"/>
+              </a:spcBef>
+              <a:spcAft>
+                <a:spcPts val="100"/>
+              </a:spcAft>
+              <a:defRPr sz="1100" b="0">
+                <a:solidFill>
+                  <a:srgbClr val="E0E0E0"/>
                 </a:solidFill>
                 <a:latin typeface="Calibri"/>
               </a:defRPr>
             </a:pPr>
             <a:r>
-              <a:rPr lang="fr-FR" noProof="0" dirty="0">
-                <a:solidFill>
-                  <a:srgbClr val="FFFFFF"/>
+              <a:rPr>
+                <a:solidFill>
+                  <a:srgbClr val="E8E8E8"/>
+                </a:solidFill>
+              </a:rPr>
+              <a:t>u1  [0.9,  0.8]</a:t>
+            </a:r>
+          </a:p>
+          <a:p>
+            <a:pPr algn="ctr">
+              <a:spcBef>
+                <a:spcPts val="100"/>
+              </a:spcBef>
+              <a:spcAft>
+                <a:spcPts val="100"/>
+              </a:spcAft>
+              <a:defRPr sz="1100" b="0">
+                <a:solidFill>
+                  <a:srgbClr val="E0E0E0"/>
+                </a:solidFill>
+                <a:latin typeface="Calibri"/>
+              </a:defRPr>
+            </a:pPr>
+            <a:r>
+              <a:rPr>
+                <a:solidFill>
+                  <a:srgbClr val="E8E8E8"/>
+                </a:solidFill>
+              </a:rPr>
+              <a:t>u2  [0.7, -0.5]</a:t>
+            </a:r>
+          </a:p>
+          <a:p>
+            <a:pPr algn="ctr">
+              <a:spcBef>
+                <a:spcPts val="100"/>
+              </a:spcBef>
+              <a:spcAft>
+                <a:spcPts val="100"/>
+              </a:spcAft>
+              <a:defRPr sz="1100" b="0">
+                <a:solidFill>
+                  <a:srgbClr val="E0E0E0"/>
+                </a:solidFill>
+                <a:latin typeface="Calibri"/>
+              </a:defRPr>
+            </a:pPr>
+            <a:r>
+              <a:rPr>
+                <a:solidFill>
+                  <a:srgbClr val="E8E8E8"/>
+                </a:solidFill>
+              </a:rPr>
+              <a:t>u3  [-0.6, 0.9]</a:t>
+            </a:r>
+          </a:p>
+          <a:p>
+            <a:pPr algn="ctr">
+              <a:spcBef>
+                <a:spcPts val="100"/>
+              </a:spcBef>
+              <a:spcAft>
+                <a:spcPts val="100"/>
+              </a:spcAft>
+              <a:defRPr sz="1100" b="0">
+                <a:solidFill>
+                  <a:srgbClr val="E0E0E0"/>
+                </a:solidFill>
+                <a:latin typeface="Calibri"/>
+              </a:defRPr>
+            </a:pPr>
+            <a:r>
+              <a:rPr>
+                <a:solidFill>
+                  <a:srgbClr val="E8E8E8"/>
                 </a:solidFill>
               </a:rPr>
               <a:t>Chaque ligne = goût utilisateur</a:t>
@@ -24507,114 +24493,107 @@
               <a:t>Vᵀ (items, k=2)</a:t>
             </a:r>
           </a:p>
-        </p:txBody>
-      </p:sp>
-      <p:sp>
-        <p:nvSpPr>
-          <p:cNvPr id="10" name="TextBox 9"/>
-          <p:cNvSpPr txBox="1"/>
-          <p:nvPr/>
-        </p:nvSpPr>
-        <p:spPr>
-          <a:xfrm>
-            <a:off x="8229600" y="2194560"/>
-            <a:ext cx="3291840" cy="1097280"/>
-          </a:xfrm>
-          <a:prstGeom prst="rect">
-            <a:avLst/>
-          </a:prstGeom>
-          <a:noFill/>
-        </p:spPr>
-        <p:txBody>
-          <a:bodyPr wrap="square">
-            <a:spAutoFit/>
-          </a:bodyPr>
-          <a:lstStyle/>
-          <a:p>
-            <a:pPr algn="l">
-              <a:defRPr sz="1100" b="0">
-                <a:solidFill>
-                  <a:srgbClr val="333333"/>
-                </a:solidFill>
-                <a:latin typeface="Consolas"/>
-              </a:defRPr>
-            </a:pPr>
-            <a:r>
-              <a:rPr lang="fr-FR" noProof="0" dirty="0">
-                <a:solidFill>
-                  <a:srgbClr val="FFFFFF"/>
-                </a:solidFill>
-              </a:rPr>
-              <a:t>p1  [ 0.9, -0.3]</a:t>
-            </a:r>
-          </a:p>
-          <a:p>
-            <a:pPr algn="l">
-              <a:spcBef>
-                <a:spcPts val="100"/>
-              </a:spcBef>
-              <a:spcAft>
-                <a:spcPts val="200"/>
-              </a:spcAft>
-              <a:defRPr sz="1100" b="0">
-                <a:solidFill>
-                  <a:srgbClr val="333333"/>
-                </a:solidFill>
-                <a:latin typeface="Consolas"/>
-              </a:defRPr>
-            </a:pPr>
-            <a:r>
-              <a:rPr lang="fr-FR" noProof="0" dirty="0">
-                <a:solidFill>
-                  <a:srgbClr val="FFFFFF"/>
-                </a:solidFill>
-              </a:rPr>
-              <a:t>p2  [ 0.8,  0.1]</a:t>
-            </a:r>
-          </a:p>
-          <a:p>
-            <a:pPr algn="l">
-              <a:spcBef>
-                <a:spcPts val="100"/>
-              </a:spcBef>
-              <a:spcAft>
-                <a:spcPts val="200"/>
-              </a:spcAft>
-              <a:defRPr sz="1100" b="0">
-                <a:solidFill>
-                  <a:srgbClr val="333333"/>
-                </a:solidFill>
-                <a:latin typeface="Consolas"/>
-              </a:defRPr>
-            </a:pPr>
-            <a:r>
-              <a:rPr lang="fr-FR" noProof="0" dirty="0">
-                <a:solidFill>
-                  <a:srgbClr val="FFFFFF"/>
-                </a:solidFill>
-              </a:rPr>
-              <a:t>p3  [ 0.5,  0.9]</a:t>
-            </a:r>
-          </a:p>
-          <a:p>
-            <a:pPr algn="l">
+          <a:p>
+            <a:pPr>
               <a:spcBef>
                 <a:spcPts val="400"/>
               </a:spcBef>
               <a:spcAft>
                 <a:spcPts val="200"/>
               </a:spcAft>
-              <a:defRPr sz="1000" b="0">
-                <a:solidFill>
-                  <a:srgbClr val="888888"/>
+            </a:pPr>
+          </a:p>
+          <a:p>
+            <a:pPr algn="ctr">
+              <a:spcBef>
+                <a:spcPts val="100"/>
+              </a:spcBef>
+              <a:spcAft>
+                <a:spcPts val="100"/>
+              </a:spcAft>
+              <a:defRPr sz="1100" b="0">
+                <a:solidFill>
+                  <a:srgbClr val="E0E0E0"/>
                 </a:solidFill>
                 <a:latin typeface="Calibri"/>
               </a:defRPr>
             </a:pPr>
             <a:r>
-              <a:rPr lang="fr-FR" noProof="0" dirty="0">
-                <a:solidFill>
-                  <a:srgbClr val="FFFFFF"/>
+              <a:rPr>
+                <a:solidFill>
+                  <a:srgbClr val="E8E8E8"/>
+                </a:solidFill>
+              </a:rPr>
+              <a:t>p1  [ 0.9, -0.3]</a:t>
+            </a:r>
+          </a:p>
+          <a:p>
+            <a:pPr algn="ctr">
+              <a:spcBef>
+                <a:spcPts val="100"/>
+              </a:spcBef>
+              <a:spcAft>
+                <a:spcPts val="100"/>
+              </a:spcAft>
+              <a:defRPr sz="1100" b="0">
+                <a:solidFill>
+                  <a:srgbClr val="E0E0E0"/>
+                </a:solidFill>
+                <a:latin typeface="Calibri"/>
+              </a:defRPr>
+            </a:pPr>
+            <a:r>
+              <a:rPr>
+                <a:solidFill>
+                  <a:srgbClr val="E8E8E8"/>
+                </a:solidFill>
+              </a:rPr>
+              <a:t>p2  [ 0.8,  0.1]</a:t>
+            </a:r>
+          </a:p>
+          <a:p>
+            <a:pPr algn="ctr">
+              <a:spcBef>
+                <a:spcPts val="100"/>
+              </a:spcBef>
+              <a:spcAft>
+                <a:spcPts val="100"/>
+              </a:spcAft>
+              <a:defRPr sz="1100" b="0">
+                <a:solidFill>
+                  <a:srgbClr val="E0E0E0"/>
+                </a:solidFill>
+                <a:latin typeface="Calibri"/>
+              </a:defRPr>
+            </a:pPr>
+            <a:r>
+              <a:rPr>
+                <a:solidFill>
+                  <a:srgbClr val="E8E8E8"/>
+                </a:solidFill>
+              </a:rPr>
+              <a:t>p3  [ 0.5,  0.9]</a:t>
+            </a:r>
+          </a:p>
+          <a:p>
+            <a:pPr algn="ctr">
+              <a:spcBef>
+                <a:spcPts val="100"/>
+              </a:spcBef>
+              <a:spcAft>
+                <a:spcPts val="100"/>
+              </a:spcAft>
+              <a:defRPr sz="1100" b="0">
+                <a:solidFill>
+                  <a:srgbClr val="E0E0E0"/>
+                </a:solidFill>
+                <a:latin typeface="Calibri"/>
+              </a:defRPr>
+            </a:pPr>
+            <a:r>
+              <a:rPr>
+                <a:solidFill>
+                  <a:srgbClr val="E8E8E8"/>
                 </a:solidFill>
               </a:rPr>
               <a:t>Chaque ligne = caractéristiques item</a:t>
@@ -27205,138 +27184,131 @@
               <a:t>Sources de Données</a:t>
             </a:r>
           </a:p>
-        </p:txBody>
-      </p:sp>
-      <p:sp>
-        <p:nvSpPr>
-          <p:cNvPr id="4" name="TextBox 3"/>
-          <p:cNvSpPr txBox="1"/>
-          <p:nvPr/>
-        </p:nvSpPr>
-        <p:spPr>
-          <a:xfrm>
-            <a:off x="914400" y="2136038"/>
-            <a:ext cx="3108960" cy="1371600"/>
-          </a:xfrm>
-          <a:prstGeom prst="rect">
-            <a:avLst/>
-          </a:prstGeom>
-          <a:noFill/>
-        </p:spPr>
-        <p:txBody>
-          <a:bodyPr wrap="square">
-            <a:spAutoFit/>
-          </a:bodyPr>
-          <a:lstStyle/>
-          <a:p>
-            <a:pPr algn="l">
-              <a:defRPr sz="1200" b="0">
-                <a:solidFill>
-                  <a:srgbClr val="333333"/>
-                </a:solidFill>
-                <a:latin typeface="Calibri"/>
-              </a:defRPr>
-            </a:pPr>
-            <a:r>
-              <a:rPr lang="fr-FR" noProof="0" dirty="0">
-                <a:solidFill>
-                  <a:srgbClr val="FFFFFF"/>
-                </a:solidFill>
-              </a:rPr>
-              <a:t>Ratings explicites (1-5 étoiles)</a:t>
-            </a:r>
-          </a:p>
-          <a:p>
-            <a:pPr algn="l">
+          <a:p>
+            <a:pPr>
               <a:spcBef>
                 <a:spcPts val="400"/>
               </a:spcBef>
               <a:spcAft>
                 <a:spcPts val="200"/>
               </a:spcAft>
-              <a:defRPr sz="1200" b="0">
-                <a:solidFill>
-                  <a:srgbClr val="333333"/>
+            </a:pPr>
+          </a:p>
+          <a:p>
+            <a:pPr algn="ctr">
+              <a:spcBef>
+                <a:spcPts val="100"/>
+              </a:spcBef>
+              <a:spcAft>
+                <a:spcPts val="100"/>
+              </a:spcAft>
+              <a:defRPr sz="1100" b="0">
+                <a:solidFill>
+                  <a:srgbClr val="E0E0E0"/>
                 </a:solidFill>
                 <a:latin typeface="Calibri"/>
               </a:defRPr>
             </a:pPr>
             <a:r>
-              <a:rPr lang="fr-FR" noProof="0" dirty="0">
-                <a:solidFill>
-                  <a:srgbClr val="FFFFFF"/>
+              <a:rPr>
+                <a:solidFill>
+                  <a:srgbClr val="E8E8E8"/>
                 </a:solidFill>
               </a:rPr>
-              <a:t>~35 000 avis utilisateurs</a:t>
-            </a:r>
-          </a:p>
-          <a:p>
-            <a:pPr algn="l">
+              <a:t>Ratings explicites (1-5 étoiles)</a:t>
+            </a:r>
+          </a:p>
+          <a:p>
+            <a:pPr algn="ctr">
               <a:spcBef>
-                <a:spcPts val="400"/>
+                <a:spcPts val="100"/>
               </a:spcBef>
               <a:spcAft>
-                <a:spcPts val="200"/>
+                <a:spcPts val="100"/>
               </a:spcAft>
-              <a:defRPr sz="1200" b="1">
-                <a:solidFill>
-                  <a:srgbClr val="333333"/>
+              <a:defRPr sz="1100" b="0">
+                <a:solidFill>
+                  <a:srgbClr val="E0E0E0"/>
                 </a:solidFill>
                 <a:latin typeface="Calibri"/>
               </a:defRPr>
             </a:pPr>
             <a:r>
-              <a:rPr lang="fr-FR" noProof="0" dirty="0">
-                <a:solidFill>
-                  <a:srgbClr val="FFFFFF"/>
+              <a:rPr>
+                <a:solidFill>
+                  <a:srgbClr val="E8E8E8"/>
                 </a:solidFill>
               </a:rPr>
-              <a:t>Feedback implicite (durée)</a:t>
-            </a:r>
-          </a:p>
-          <a:p>
-            <a:pPr algn="l">
+              <a:t>~35 000 avis utilisateurs</a:t>
+            </a:r>
+          </a:p>
+          <a:p>
+            <a:pPr algn="ctr">
               <a:spcBef>
-                <a:spcPts val="400"/>
+                <a:spcPts val="100"/>
               </a:spcBef>
               <a:spcAft>
-                <a:spcPts val="200"/>
+                <a:spcPts val="100"/>
               </a:spcAft>
-              <a:defRPr sz="1200" b="0">
-                <a:solidFill>
-                  <a:srgbClr val="333333"/>
+              <a:defRPr sz="1100" b="0">
+                <a:solidFill>
+                  <a:srgbClr val="E0E0E0"/>
                 </a:solidFill>
                 <a:latin typeface="Calibri"/>
               </a:defRPr>
             </a:pPr>
             <a:r>
-              <a:rPr lang="fr-FR" noProof="0" dirty="0">
-                <a:solidFill>
-                  <a:srgbClr val="FFFFFF"/>
+              <a:rPr>
+                <a:solidFill>
+                  <a:srgbClr val="E8E8E8"/>
                 </a:solidFill>
               </a:rPr>
-              <a:t>Durée navigation → échelle log</a:t>
-            </a:r>
-          </a:p>
-          <a:p>
-            <a:pPr algn="l">
+              <a:t>Feedback implicite (durée)</a:t>
+            </a:r>
+          </a:p>
+          <a:p>
+            <a:pPr algn="ctr">
               <a:spcBef>
-                <a:spcPts val="400"/>
+                <a:spcPts val="100"/>
               </a:spcBef>
               <a:spcAft>
-                <a:spcPts val="200"/>
+                <a:spcPts val="100"/>
               </a:spcAft>
-              <a:defRPr sz="1200" b="0">
-                <a:solidFill>
-                  <a:srgbClr val="333333"/>
+              <a:defRPr sz="1100" b="0">
+                <a:solidFill>
+                  <a:srgbClr val="E0E0E0"/>
                 </a:solidFill>
                 <a:latin typeface="Calibri"/>
               </a:defRPr>
             </a:pPr>
             <a:r>
-              <a:rPr lang="fr-FR" noProof="0" dirty="0">
-                <a:solidFill>
-                  <a:srgbClr val="FFFFFF"/>
+              <a:rPr>
+                <a:solidFill>
+                  <a:srgbClr val="E8E8E8"/>
+                </a:solidFill>
+              </a:rPr>
+              <a:t>Durée navigation → échelle log</a:t>
+            </a:r>
+          </a:p>
+          <a:p>
+            <a:pPr algn="ctr">
+              <a:spcBef>
+                <a:spcPts val="100"/>
+              </a:spcBef>
+              <a:spcAft>
+                <a:spcPts val="100"/>
+              </a:spcAft>
+              <a:defRPr sz="1100" b="0">
+                <a:solidFill>
+                  <a:srgbClr val="E0E0E0"/>
+                </a:solidFill>
+                <a:latin typeface="Calibri"/>
+              </a:defRPr>
+            </a:pPr>
+            <a:r>
+              <a:rPr>
+                <a:solidFill>
+                  <a:srgbClr val="E8E8E8"/>
                 </a:solidFill>
               </a:rPr>
               <a:t>Converti en scores 1.0-4.0</a:t>
@@ -27406,194 +27378,131 @@
               <a:t>Configuration</a:t>
             </a:r>
           </a:p>
-        </p:txBody>
-      </p:sp>
-      <p:sp>
-        <p:nvSpPr>
-          <p:cNvPr id="6" name="TextBox 5"/>
-          <p:cNvSpPr txBox="1"/>
-          <p:nvPr/>
-        </p:nvSpPr>
-        <p:spPr>
-          <a:xfrm>
-            <a:off x="4389120" y="2194560"/>
-            <a:ext cx="3108960" cy="1371600"/>
-          </a:xfrm>
-          <a:prstGeom prst="rect">
-            <a:avLst/>
-          </a:prstGeom>
-          <a:noFill/>
-        </p:spPr>
-        <p:txBody>
-          <a:bodyPr wrap="square">
-            <a:spAutoFit/>
-          </a:bodyPr>
-          <a:lstStyle/>
-          <a:p>
-            <a:pPr algn="l">
-              <a:defRPr sz="1200" b="0">
-                <a:solidFill>
-                  <a:srgbClr val="333333"/>
-                </a:solidFill>
-                <a:latin typeface="Calibri"/>
-              </a:defRPr>
-            </a:pPr>
-            <a:r>
-              <a:rPr lang="fr-FR" noProof="0" dirty="0" err="1">
-                <a:solidFill>
-                  <a:srgbClr val="FFFFFF"/>
-                </a:solidFill>
-              </a:rPr>
-              <a:t>Optimizer</a:t>
-            </a:r>
-            <a:r>
-              <a:rPr lang="fr-FR" noProof="0" dirty="0">
-                <a:solidFill>
-                  <a:srgbClr val="FFFFFF"/>
-                </a:solidFill>
-              </a:rPr>
-              <a:t>: Adam (</a:t>
-            </a:r>
-            <a:r>
-              <a:rPr lang="fr-FR" noProof="0" dirty="0" err="1">
-                <a:solidFill>
-                  <a:srgbClr val="FFFFFF"/>
-                </a:solidFill>
-              </a:rPr>
-              <a:t>lr</a:t>
-            </a:r>
-            <a:r>
-              <a:rPr lang="fr-FR" noProof="0" dirty="0">
-                <a:solidFill>
-                  <a:srgbClr val="FFFFFF"/>
-                </a:solidFill>
-              </a:rPr>
-              <a:t>=1e-3)</a:t>
-            </a:r>
-          </a:p>
-          <a:p>
-            <a:pPr algn="l">
+          <a:p>
+            <a:pPr>
               <a:spcBef>
                 <a:spcPts val="400"/>
               </a:spcBef>
               <a:spcAft>
                 <a:spcPts val="200"/>
               </a:spcAft>
-              <a:defRPr sz="1200" b="0">
-                <a:solidFill>
-                  <a:srgbClr val="333333"/>
+            </a:pPr>
+          </a:p>
+          <a:p>
+            <a:pPr algn="ctr">
+              <a:spcBef>
+                <a:spcPts val="100"/>
+              </a:spcBef>
+              <a:spcAft>
+                <a:spcPts val="100"/>
+              </a:spcAft>
+              <a:defRPr sz="1100" b="0">
+                <a:solidFill>
+                  <a:srgbClr val="E0E0E0"/>
                 </a:solidFill>
                 <a:latin typeface="Calibri"/>
               </a:defRPr>
             </a:pPr>
             <a:r>
-              <a:rPr lang="fr-FR" noProof="0" dirty="0">
-                <a:solidFill>
-                  <a:srgbClr val="FFFFFF"/>
+              <a:rPr>
+                <a:solidFill>
+                  <a:srgbClr val="E8E8E8"/>
                 </a:solidFill>
               </a:rPr>
-              <a:t>Loss: MSE (régression)</a:t>
-            </a:r>
-          </a:p>
-          <a:p>
-            <a:pPr algn="l">
+              <a:t>Optimizer: Adam (lr=1e-3)</a:t>
+            </a:r>
+          </a:p>
+          <a:p>
+            <a:pPr algn="ctr">
               <a:spcBef>
-                <a:spcPts val="400"/>
+                <a:spcPts val="100"/>
               </a:spcBef>
               <a:spcAft>
-                <a:spcPts val="200"/>
+                <a:spcPts val="100"/>
               </a:spcAft>
-              <a:defRPr sz="1200" b="0">
-                <a:solidFill>
-                  <a:srgbClr val="333333"/>
+              <a:defRPr sz="1100" b="0">
+                <a:solidFill>
+                  <a:srgbClr val="E0E0E0"/>
                 </a:solidFill>
                 <a:latin typeface="Calibri"/>
               </a:defRPr>
             </a:pPr>
             <a:r>
-              <a:rPr lang="fr-FR" noProof="0" dirty="0">
-                <a:solidFill>
-                  <a:srgbClr val="FFFFFF"/>
+              <a:rPr>
+                <a:solidFill>
+                  <a:srgbClr val="E8E8E8"/>
                 </a:solidFill>
               </a:rPr>
-              <a:t>Batch: 256 | </a:t>
-            </a:r>
-            <a:r>
-              <a:rPr lang="fr-FR" noProof="0" dirty="0" err="1">
-                <a:solidFill>
-                  <a:srgbClr val="FFFFFF"/>
-                </a:solidFill>
-              </a:rPr>
-              <a:t>Epochs</a:t>
-            </a:r>
-            <a:r>
-              <a:rPr lang="fr-FR" noProof="0" dirty="0">
-                <a:solidFill>
-                  <a:srgbClr val="FFFFFF"/>
-                </a:solidFill>
-              </a:rPr>
-              <a:t>: 80</a:t>
-            </a:r>
-          </a:p>
-          <a:p>
-            <a:pPr algn="l">
+              <a:t>Loss: MSE (régression)</a:t>
+            </a:r>
+          </a:p>
+          <a:p>
+            <a:pPr algn="ctr">
               <a:spcBef>
-                <a:spcPts val="400"/>
+                <a:spcPts val="100"/>
               </a:spcBef>
               <a:spcAft>
-                <a:spcPts val="200"/>
+                <a:spcPts val="100"/>
               </a:spcAft>
-              <a:defRPr sz="1200" b="0">
-                <a:solidFill>
-                  <a:srgbClr val="333333"/>
+              <a:defRPr sz="1100" b="0">
+                <a:solidFill>
+                  <a:srgbClr val="E0E0E0"/>
                 </a:solidFill>
                 <a:latin typeface="Calibri"/>
               </a:defRPr>
             </a:pPr>
             <a:r>
-              <a:rPr lang="fr-FR" noProof="0" dirty="0">
-                <a:solidFill>
-                  <a:srgbClr val="FFFFFF"/>
+              <a:rPr>
+                <a:solidFill>
+                  <a:srgbClr val="E8E8E8"/>
                 </a:solidFill>
               </a:rPr>
-              <a:t>Weight </a:t>
-            </a:r>
-            <a:r>
-              <a:rPr lang="fr-FR" noProof="0" dirty="0" err="1">
-                <a:solidFill>
-                  <a:srgbClr val="FFFFFF"/>
-                </a:solidFill>
-              </a:rPr>
-              <a:t>decay</a:t>
-            </a:r>
-            <a:r>
-              <a:rPr lang="fr-FR" noProof="0" dirty="0">
-                <a:solidFill>
-                  <a:srgbClr val="FFFFFF"/>
-                </a:solidFill>
-              </a:rPr>
-              <a:t>: 5e-4 (L2)</a:t>
-            </a:r>
-          </a:p>
-          <a:p>
-            <a:pPr algn="l">
+              <a:t>Batch: 256 | Epochs: 80</a:t>
+            </a:r>
+          </a:p>
+          <a:p>
+            <a:pPr algn="ctr">
               <a:spcBef>
-                <a:spcPts val="400"/>
+                <a:spcPts val="100"/>
               </a:spcBef>
               <a:spcAft>
-                <a:spcPts val="200"/>
+                <a:spcPts val="100"/>
               </a:spcAft>
-              <a:defRPr sz="1200" b="0">
-                <a:solidFill>
-                  <a:srgbClr val="333333"/>
+              <a:defRPr sz="1100" b="0">
+                <a:solidFill>
+                  <a:srgbClr val="E0E0E0"/>
                 </a:solidFill>
                 <a:latin typeface="Calibri"/>
               </a:defRPr>
             </a:pPr>
             <a:r>
-              <a:rPr lang="fr-FR" noProof="0" dirty="0">
-                <a:solidFill>
-                  <a:srgbClr val="FFFFFF"/>
+              <a:rPr>
+                <a:solidFill>
+                  <a:srgbClr val="E8E8E8"/>
+                </a:solidFill>
+              </a:rPr>
+              <a:t>Weight decay: 5e-4 (L2)</a:t>
+            </a:r>
+          </a:p>
+          <a:p>
+            <a:pPr algn="ctr">
+              <a:spcBef>
+                <a:spcPts val="100"/>
+              </a:spcBef>
+              <a:spcAft>
+                <a:spcPts val="100"/>
+              </a:spcAft>
+              <a:defRPr sz="1100" b="0">
+                <a:solidFill>
+                  <a:srgbClr val="E0E0E0"/>
+                </a:solidFill>
+                <a:latin typeface="Calibri"/>
+              </a:defRPr>
+            </a:pPr>
+            <a:r>
+              <a:rPr>
+                <a:solidFill>
+                  <a:srgbClr val="E8E8E8"/>
                 </a:solidFill>
               </a:rPr>
               <a:t>Dropout: 0.3</a:t>
@@ -27663,167 +27572,135 @@
               <a:t>Anti-Surapprentissage</a:t>
             </a:r>
           </a:p>
-        </p:txBody>
-      </p:sp>
-      <p:sp>
-        <p:nvSpPr>
-          <p:cNvPr id="8" name="TextBox 7"/>
-          <p:cNvSpPr txBox="1"/>
-          <p:nvPr/>
-        </p:nvSpPr>
-        <p:spPr>
-          <a:xfrm>
-            <a:off x="8229600" y="2194560"/>
-            <a:ext cx="3291840" cy="1371600"/>
-          </a:xfrm>
-          <a:prstGeom prst="rect">
-            <a:avLst/>
-          </a:prstGeom>
-          <a:noFill/>
-        </p:spPr>
-        <p:txBody>
-          <a:bodyPr wrap="square">
-            <a:spAutoFit/>
-          </a:bodyPr>
-          <a:lstStyle/>
-          <a:p>
-            <a:pPr algn="l">
-              <a:defRPr sz="1200" b="0">
-                <a:solidFill>
-                  <a:srgbClr val="333333"/>
-                </a:solidFill>
-                <a:latin typeface="Calibri"/>
-              </a:defRPr>
-            </a:pPr>
-            <a:r>
-              <a:rPr lang="fr-FR" noProof="0" dirty="0">
-                <a:solidFill>
-                  <a:srgbClr val="FFFFFF"/>
-                </a:solidFill>
-              </a:rPr>
-              <a:t>Dropout(0.3) — désactive 30%</a:t>
-            </a:r>
-          </a:p>
-          <a:p>
-            <a:pPr algn="l">
+          <a:p>
+            <a:pPr>
               <a:spcBef>
                 <a:spcPts val="400"/>
               </a:spcBef>
               <a:spcAft>
                 <a:spcPts val="200"/>
               </a:spcAft>
-              <a:defRPr sz="1200" b="0">
-                <a:solidFill>
-                  <a:srgbClr val="333333"/>
+            </a:pPr>
+          </a:p>
+          <a:p>
+            <a:pPr algn="ctr">
+              <a:spcBef>
+                <a:spcPts val="100"/>
+              </a:spcBef>
+              <a:spcAft>
+                <a:spcPts val="100"/>
+              </a:spcAft>
+              <a:defRPr sz="1100" b="0">
+                <a:solidFill>
+                  <a:srgbClr val="E0E0E0"/>
                 </a:solidFill>
                 <a:latin typeface="Calibri"/>
               </a:defRPr>
             </a:pPr>
             <a:r>
-              <a:rPr lang="fr-FR" noProof="0" dirty="0">
-                <a:solidFill>
-                  <a:srgbClr val="FFFFFF"/>
+              <a:rPr>
+                <a:solidFill>
+                  <a:srgbClr val="E8E8E8"/>
                 </a:solidFill>
               </a:rPr>
-              <a:t>des neurones aléatoirement</a:t>
-            </a:r>
-          </a:p>
-          <a:p>
-            <a:pPr algn="l">
+              <a:t>Dropout(0.3) — désactive 30%</a:t>
+            </a:r>
+          </a:p>
+          <a:p>
+            <a:pPr algn="ctr">
               <a:spcBef>
-                <a:spcPts val="400"/>
+                <a:spcPts val="100"/>
               </a:spcBef>
               <a:spcAft>
-                <a:spcPts val="200"/>
+                <a:spcPts val="100"/>
               </a:spcAft>
-              <a:defRPr sz="1200" b="1">
-                <a:solidFill>
-                  <a:srgbClr val="333333"/>
+              <a:defRPr sz="1100" b="0">
+                <a:solidFill>
+                  <a:srgbClr val="E0E0E0"/>
                 </a:solidFill>
                 <a:latin typeface="Calibri"/>
               </a:defRPr>
             </a:pPr>
             <a:r>
-              <a:rPr lang="fr-FR" noProof="0" dirty="0">
-                <a:solidFill>
-                  <a:srgbClr val="FFFFFF"/>
+              <a:rPr>
+                <a:solidFill>
+                  <a:srgbClr val="E8E8E8"/>
                 </a:solidFill>
               </a:rPr>
-              <a:t>Weight </a:t>
-            </a:r>
-            <a:r>
-              <a:rPr lang="fr-FR" noProof="0" dirty="0" err="1">
-                <a:solidFill>
-                  <a:srgbClr val="FFFFFF"/>
-                </a:solidFill>
-              </a:rPr>
-              <a:t>Decay</a:t>
-            </a:r>
-            <a:r>
-              <a:rPr lang="fr-FR" noProof="0" dirty="0">
-                <a:solidFill>
-                  <a:srgbClr val="FFFFFF"/>
-                </a:solidFill>
-              </a:rPr>
-              <a:t> (L2)</a:t>
-            </a:r>
-          </a:p>
-          <a:p>
-            <a:pPr algn="l">
+              <a:t>des neurones aléatoirement</a:t>
+            </a:r>
+          </a:p>
+          <a:p>
+            <a:pPr algn="ctr">
               <a:spcBef>
-                <a:spcPts val="400"/>
+                <a:spcPts val="100"/>
               </a:spcBef>
               <a:spcAft>
-                <a:spcPts val="200"/>
+                <a:spcPts val="100"/>
               </a:spcAft>
-              <a:defRPr sz="1200" b="0">
-                <a:solidFill>
-                  <a:srgbClr val="333333"/>
+              <a:defRPr sz="1100" b="0">
+                <a:solidFill>
+                  <a:srgbClr val="E0E0E0"/>
                 </a:solidFill>
                 <a:latin typeface="Calibri"/>
               </a:defRPr>
             </a:pPr>
             <a:r>
-              <a:rPr lang="fr-FR" noProof="0" dirty="0">
-                <a:solidFill>
-                  <a:srgbClr val="FFFFFF"/>
+              <a:rPr>
+                <a:solidFill>
+                  <a:srgbClr val="E8E8E8"/>
                 </a:solidFill>
               </a:rPr>
-              <a:t>Tire les poids vers zéro</a:t>
-            </a:r>
-          </a:p>
-          <a:p>
-            <a:pPr algn="l">
+              <a:t>Weight Decay (L2)</a:t>
+            </a:r>
+          </a:p>
+          <a:p>
+            <a:pPr algn="ctr">
               <a:spcBef>
-                <a:spcPts val="400"/>
+                <a:spcPts val="100"/>
               </a:spcBef>
               <a:spcAft>
-                <a:spcPts val="200"/>
+                <a:spcPts val="100"/>
               </a:spcAft>
-              <a:defRPr sz="1200" b="0">
-                <a:solidFill>
-                  <a:srgbClr val="333333"/>
+              <a:defRPr sz="1100" b="0">
+                <a:solidFill>
+                  <a:srgbClr val="E0E0E0"/>
                 </a:solidFill>
                 <a:latin typeface="Calibri"/>
               </a:defRPr>
             </a:pPr>
             <a:r>
-              <a:rPr lang="fr-FR" noProof="0" dirty="0">
-                <a:solidFill>
-                  <a:srgbClr val="FFFFFF"/>
+              <a:rPr>
+                <a:solidFill>
+                  <a:srgbClr val="E8E8E8"/>
                 </a:solidFill>
               </a:rPr>
-              <a:t>Empêche l'explosion des </a:t>
-            </a:r>
-            <a:r>
-              <a:rPr lang="fr-FR" noProof="0" dirty="0" err="1">
-                <a:solidFill>
-                  <a:srgbClr val="FFFFFF"/>
+              <a:t>Tire les poids vers zéro</a:t>
+            </a:r>
+          </a:p>
+          <a:p>
+            <a:pPr algn="ctr">
+              <a:spcBef>
+                <a:spcPts val="100"/>
+              </a:spcBef>
+              <a:spcAft>
+                <a:spcPts val="100"/>
+              </a:spcAft>
+              <a:defRPr sz="1100" b="0">
+                <a:solidFill>
+                  <a:srgbClr val="E0E0E0"/>
+                </a:solidFill>
+                <a:latin typeface="Calibri"/>
+              </a:defRPr>
+            </a:pPr>
+            <a:r>
+              <a:rPr>
+                <a:solidFill>
+                  <a:srgbClr val="E8E8E8"/>
                 </a:solidFill>
               </a:rPr>
-              <a:t>embeddings</a:t>
-            </a:r>
-            <a:endParaRPr lang="fr-FR" noProof="0" dirty="0"/>
+              <a:t>Empêche l'explosion des embeddings</a:t>
+            </a:r>
           </a:p>
         </p:txBody>
       </p:sp>
@@ -27901,7 +27778,7 @@
             <a:r>
               <a:rPr lang="fr-FR" noProof="0" dirty="0">
                 <a:solidFill>
-                  <a:srgbClr val="FFFFFF"/>
+                  <a:srgbClr val="E8E8E8"/>
                 </a:solidFill>
               </a:rPr>
               <a:t>Input [user, item]</a:t>
@@ -27919,7 +27796,7 @@
             <a:r>
               <a:rPr lang="fr-FR" noProof="0" dirty="0">
                 <a:solidFill>
-                  <a:srgbClr val="FFFFFF"/>
+                  <a:srgbClr val="E8E8E8"/>
                 </a:solidFill>
               </a:rPr>
               <a:t>→ NCF → score prédit</a:t>
@@ -28045,7 +27922,7 @@
             <a:r>
               <a:rPr lang="fr-FR" noProof="0" dirty="0">
                 <a:solidFill>
-                  <a:srgbClr val="FFFFFF"/>
+                  <a:srgbClr val="E8E8E8"/>
                 </a:solidFill>
               </a:rPr>
               <a:t>MSE = </a:t>
@@ -28053,7 +27930,7 @@
             <a:r>
               <a:rPr lang="fr-FR" noProof="0" dirty="0" err="1">
                 <a:solidFill>
-                  <a:srgbClr val="FFFFFF"/>
+                  <a:srgbClr val="E8E8E8"/>
                 </a:solidFill>
               </a:rPr>
               <a:t>mean</a:t>
@@ -28061,7 +27938,7 @@
             <a:r>
               <a:rPr lang="fr-FR" noProof="0" dirty="0">
                 <a:solidFill>
-                  <a:srgbClr val="FFFFFF"/>
+                  <a:srgbClr val="E8E8E8"/>
                 </a:solidFill>
               </a:rPr>
               <a:t>(</a:t>
@@ -28079,7 +27956,7 @@
             <a:r>
               <a:rPr lang="fr-FR" noProof="0" dirty="0">
                 <a:solidFill>
-                  <a:srgbClr val="FFFFFF"/>
+                  <a:srgbClr val="E8E8E8"/>
                 </a:solidFill>
               </a:rPr>
               <a:t>(prédit - réel)²)</a:t>
@@ -28214,7 +28091,7 @@
             <a:r>
               <a:rPr lang="fr-FR" noProof="0" dirty="0" err="1">
                 <a:solidFill>
-                  <a:srgbClr val="FFFFFF"/>
+                  <a:srgbClr val="E8E8E8"/>
                 </a:solidFill>
               </a:rPr>
               <a:t>Autograd</a:t>
@@ -28222,7 +28099,7 @@
             <a:r>
               <a:rPr lang="fr-FR" noProof="0" dirty="0">
                 <a:solidFill>
-                  <a:srgbClr val="FFFFFF"/>
+                  <a:srgbClr val="E8E8E8"/>
                 </a:solidFill>
               </a:rPr>
               <a:t> calcule</a:t>
@@ -28240,7 +28117,7 @@
             <a:r>
               <a:rPr lang="fr-FR" noProof="0" dirty="0">
                 <a:solidFill>
-                  <a:srgbClr val="FFFFFF"/>
+                  <a:srgbClr val="E8E8E8"/>
                 </a:solidFill>
               </a:rPr>
               <a:t>∂Loss/∂Param</a:t>
@@ -28366,7 +28243,7 @@
             <a:r>
               <a:rPr lang="fr-FR" noProof="0" dirty="0">
                 <a:solidFill>
-                  <a:srgbClr val="FFFFFF"/>
+                  <a:srgbClr val="E8E8E8"/>
                 </a:solidFill>
               </a:rPr>
               <a:t>Adam ajuste</a:t>
@@ -28384,7 +28261,7 @@
             <a:r>
               <a:rPr lang="fr-FR" noProof="0" dirty="0" err="1">
                 <a:solidFill>
-                  <a:srgbClr val="FFFFFF"/>
+                  <a:srgbClr val="E8E8E8"/>
                 </a:solidFill>
               </a:rPr>
               <a:t>embeddings</a:t>
@@ -28392,7 +28269,7 @@
             <a:r>
               <a:rPr lang="fr-FR" noProof="0" dirty="0">
                 <a:solidFill>
-                  <a:srgbClr val="FFFFFF"/>
+                  <a:srgbClr val="E8E8E8"/>
                 </a:solidFill>
               </a:rPr>
               <a:t> + poids</a:t>
